--- a/docs/phase5/presentation.pptx
+++ b/docs/phase5/presentation.pptx
@@ -4374,8 +4374,8 @@
         </p:blipFill>
         <p:spPr>
           <a:xfrm>
-            <a:off x="1097280" y="1280160"/>
-            <a:ext cx="6949440" cy="3200400"/>
+            <a:off x="2834640" y="1188720"/>
+            <a:ext cx="3474720" cy="3474720"/>
           </a:xfrm>
           <a:prstGeom prst="rect">
             <a:avLst/>

--- a/docs/phase5/presentation.pptx
+++ b/docs/phase5/presentation.pptx
@@ -1951,8 +1951,8 @@
         </p:nvSpPr>
         <p:spPr>
           <a:xfrm>
-            <a:off x="914400" y="1645920"/>
-            <a:ext cx="10360152" cy="914400"/>
+            <a:off x="457200" y="1005840"/>
+            <a:ext cx="8229600" cy="640080"/>
           </a:xfrm>
           <a:prstGeom prst="rect">
             <a:avLst/>
@@ -1968,7 +1968,7 @@
               <a:buNone/>
             </a:pPr>
             <a:r>
-              <a:rPr lang="en-US" sz="4000" b="1" dirty="0">
+              <a:rPr lang="en-US" sz="3200" b="1" dirty="0">
                 <a:solidFill>
                   <a:srgbClr val="0EA5E9"/>
                 </a:solidFill>
@@ -1978,7 +1978,7 @@
               </a:rPr>
               <a:t>STUDENT STUDY PLANNER</a:t>
             </a:r>
-            <a:endParaRPr lang="en-US" sz="4000" dirty="0"/>
+            <a:endParaRPr lang="en-US" sz="3200" dirty="0"/>
           </a:p>
         </p:txBody>
       </p:sp>
@@ -1990,8 +1990,8 @@
         </p:nvSpPr>
         <p:spPr>
           <a:xfrm>
-            <a:off x="914400" y="2560320"/>
-            <a:ext cx="10360152" cy="548640"/>
+            <a:off x="457200" y="1645920"/>
+            <a:ext cx="8229600" cy="457200"/>
           </a:xfrm>
           <a:prstGeom prst="rect">
             <a:avLst/>
@@ -2007,7 +2007,7 @@
               <a:buNone/>
             </a:pPr>
             <a:r>
-              <a:rPr lang="en-US" sz="2000" dirty="0">
+              <a:rPr lang="en-US" sz="1600" dirty="0">
                 <a:solidFill>
                   <a:srgbClr val="FFFFFF"/>
                 </a:solidFill>
@@ -2017,7 +2017,7 @@
               </a:rPr>
               <a:t>AWS Cloud Infrastructure &amp; CI/CD Deployment Showcase</a:t>
             </a:r>
-            <a:endParaRPr lang="en-US" sz="2000" dirty="0"/>
+            <a:endParaRPr lang="en-US" sz="1600" dirty="0"/>
           </a:p>
         </p:txBody>
       </p:sp>
@@ -2029,8 +2029,8 @@
         </p:nvSpPr>
         <p:spPr>
           <a:xfrm>
-            <a:off x="914400" y="3200400"/>
-            <a:ext cx="10360152" cy="365760"/>
+            <a:off x="457200" y="2103120"/>
+            <a:ext cx="8229600" cy="274320"/>
           </a:xfrm>
           <a:prstGeom prst="rect">
             <a:avLst/>
@@ -2046,7 +2046,7 @@
               <a:buNone/>
             </a:pPr>
             <a:r>
-              <a:rPr lang="en-US" sz="1400" i="1" dirty="0">
+              <a:rPr lang="en-US" sz="1100" i="1" dirty="0">
                 <a:solidFill>
                   <a:srgbClr val="94A3B8"/>
                 </a:solidFill>
@@ -2056,7 +2056,7 @@
               </a:rPr>
               <a:t>DevOps Capstone Project Presentation — Phase 5</a:t>
             </a:r>
-            <a:endParaRPr lang="en-US" sz="1400" dirty="0"/>
+            <a:endParaRPr lang="en-US" sz="1100" dirty="0"/>
           </a:p>
         </p:txBody>
       </p:sp>
@@ -2068,8 +2068,8 @@
         </p:nvSpPr>
         <p:spPr>
           <a:xfrm>
-            <a:off x="914400" y="4023360"/>
-            <a:ext cx="10360152" cy="274320"/>
+            <a:off x="457200" y="2834640"/>
+            <a:ext cx="8229600" cy="274320"/>
           </a:xfrm>
           <a:prstGeom prst="rect">
             <a:avLst/>
@@ -2085,7 +2085,7 @@
               <a:buNone/>
             </a:pPr>
             <a:r>
-              <a:rPr lang="en-US" sz="1200" b="1" dirty="0">
+              <a:rPr lang="en-US" sz="1000" b="1" dirty="0">
                 <a:solidFill>
                   <a:srgbClr val="94A3B8"/>
                 </a:solidFill>
@@ -2095,7 +2095,7 @@
               </a:rPr>
               <a:t>Azubi Africa Capstone Team:</a:t>
             </a:r>
-            <a:endParaRPr lang="en-US" sz="1200" dirty="0"/>
+            <a:endParaRPr lang="en-US" sz="1000" dirty="0"/>
           </a:p>
         </p:txBody>
       </p:sp>
@@ -2107,8 +2107,8 @@
         </p:nvSpPr>
         <p:spPr>
           <a:xfrm>
-            <a:off x="1065276" y="4389120"/>
-            <a:ext cx="1828800" cy="1005840"/>
+            <a:off x="640080" y="3200400"/>
+            <a:ext cx="1463040" cy="868680"/>
           </a:xfrm>
           <a:prstGeom prst="rect">
             <a:avLst/>
@@ -2132,8 +2132,8 @@
         </p:nvSpPr>
         <p:spPr>
           <a:xfrm>
-            <a:off x="1065276" y="4480560"/>
-            <a:ext cx="1828800" cy="365760"/>
+            <a:off x="640080" y="3246120"/>
+            <a:ext cx="1463040" cy="320040"/>
           </a:xfrm>
           <a:prstGeom prst="rect">
             <a:avLst/>
@@ -2149,7 +2149,7 @@
               <a:buNone/>
             </a:pPr>
             <a:r>
-              <a:rPr lang="en-US" sz="1100" b="1" dirty="0">
+              <a:rPr lang="en-US" sz="900" b="1" dirty="0">
                 <a:solidFill>
                   <a:srgbClr val="FFFFFF"/>
                 </a:solidFill>
@@ -2159,7 +2159,7 @@
               </a:rPr>
               <a:t>Edmund (GeekKwame)</a:t>
             </a:r>
-            <a:endParaRPr lang="en-US" sz="1100" dirty="0"/>
+            <a:endParaRPr lang="en-US" sz="900" dirty="0"/>
           </a:p>
         </p:txBody>
       </p:sp>
@@ -2171,8 +2171,8 @@
         </p:nvSpPr>
         <p:spPr>
           <a:xfrm>
-            <a:off x="1065276" y="4846320"/>
-            <a:ext cx="1828800" cy="365760"/>
+            <a:off x="640080" y="3611880"/>
+            <a:ext cx="1463040" cy="320040"/>
           </a:xfrm>
           <a:prstGeom prst="rect">
             <a:avLst/>
@@ -2188,7 +2188,7 @@
               <a:buNone/>
             </a:pPr>
             <a:r>
-              <a:rPr lang="en-US" sz="900" dirty="0">
+              <a:rPr lang="en-US" sz="800" dirty="0">
                 <a:solidFill>
                   <a:srgbClr val="0EA5E9"/>
                 </a:solidFill>
@@ -2198,7 +2198,7 @@
               </a:rPr>
               <a:t>Infrastructure Lead</a:t>
             </a:r>
-            <a:endParaRPr lang="en-US" sz="900" dirty="0"/>
+            <a:endParaRPr lang="en-US" sz="800" dirty="0"/>
           </a:p>
         </p:txBody>
       </p:sp>
@@ -2210,8 +2210,8 @@
         </p:nvSpPr>
         <p:spPr>
           <a:xfrm>
-            <a:off x="3122676" y="4389120"/>
-            <a:ext cx="1828800" cy="1005840"/>
+            <a:off x="2240280" y="3200400"/>
+            <a:ext cx="1463040" cy="868680"/>
           </a:xfrm>
           <a:prstGeom prst="rect">
             <a:avLst/>
@@ -2235,8 +2235,8 @@
         </p:nvSpPr>
         <p:spPr>
           <a:xfrm>
-            <a:off x="3122676" y="4480560"/>
-            <a:ext cx="1828800" cy="365760"/>
+            <a:off x="2240280" y="3246120"/>
+            <a:ext cx="1463040" cy="320040"/>
           </a:xfrm>
           <a:prstGeom prst="rect">
             <a:avLst/>
@@ -2252,7 +2252,7 @@
               <a:buNone/>
             </a:pPr>
             <a:r>
-              <a:rPr lang="en-US" sz="1100" b="1" dirty="0">
+              <a:rPr lang="en-US" sz="900" b="1" dirty="0">
                 <a:solidFill>
                   <a:srgbClr val="FFFFFF"/>
                 </a:solidFill>
@@ -2262,7 +2262,7 @@
               </a:rPr>
               <a:t>Kwame Opoku</a:t>
             </a:r>
-            <a:endParaRPr lang="en-US" sz="1100" dirty="0"/>
+            <a:endParaRPr lang="en-US" sz="900" dirty="0"/>
           </a:p>
         </p:txBody>
       </p:sp>
@@ -2274,8 +2274,8 @@
         </p:nvSpPr>
         <p:spPr>
           <a:xfrm>
-            <a:off x="3122676" y="4846320"/>
-            <a:ext cx="1828800" cy="365760"/>
+            <a:off x="2240280" y="3611880"/>
+            <a:ext cx="1463040" cy="320040"/>
           </a:xfrm>
           <a:prstGeom prst="rect">
             <a:avLst/>
@@ -2291,7 +2291,7 @@
               <a:buNone/>
             </a:pPr>
             <a:r>
-              <a:rPr lang="en-US" sz="900" dirty="0">
+              <a:rPr lang="en-US" sz="800" dirty="0">
                 <a:solidFill>
                   <a:srgbClr val="0EA5E9"/>
                 </a:solidFill>
@@ -2301,7 +2301,7 @@
               </a:rPr>
               <a:t>DevOps Engineer</a:t>
             </a:r>
-            <a:endParaRPr lang="en-US" sz="900" dirty="0"/>
+            <a:endParaRPr lang="en-US" sz="800" dirty="0"/>
           </a:p>
         </p:txBody>
       </p:sp>
@@ -2313,8 +2313,8 @@
         </p:nvSpPr>
         <p:spPr>
           <a:xfrm>
-            <a:off x="5180076" y="4389120"/>
-            <a:ext cx="1828800" cy="1005840"/>
+            <a:off x="3840480" y="3200400"/>
+            <a:ext cx="1463040" cy="868680"/>
           </a:xfrm>
           <a:prstGeom prst="rect">
             <a:avLst/>
@@ -2338,8 +2338,8 @@
         </p:nvSpPr>
         <p:spPr>
           <a:xfrm>
-            <a:off x="5180076" y="4480560"/>
-            <a:ext cx="1828800" cy="365760"/>
+            <a:off x="3840480" y="3246120"/>
+            <a:ext cx="1463040" cy="320040"/>
           </a:xfrm>
           <a:prstGeom prst="rect">
             <a:avLst/>
@@ -2355,7 +2355,7 @@
               <a:buNone/>
             </a:pPr>
             <a:r>
-              <a:rPr lang="en-US" sz="1100" b="1" dirty="0">
+              <a:rPr lang="en-US" sz="900" b="1" dirty="0">
                 <a:solidFill>
                   <a:srgbClr val="FFFFFF"/>
                 </a:solidFill>
@@ -2365,7 +2365,7 @@
               </a:rPr>
               <a:t>Priscilla</a:t>
             </a:r>
-            <a:endParaRPr lang="en-US" sz="1100" dirty="0"/>
+            <a:endParaRPr lang="en-US" sz="900" dirty="0"/>
           </a:p>
         </p:txBody>
       </p:sp>
@@ -2377,8 +2377,8 @@
         </p:nvSpPr>
         <p:spPr>
           <a:xfrm>
-            <a:off x="5180076" y="4846320"/>
-            <a:ext cx="1828800" cy="365760"/>
+            <a:off x="3840480" y="3611880"/>
+            <a:ext cx="1463040" cy="320040"/>
           </a:xfrm>
           <a:prstGeom prst="rect">
             <a:avLst/>
@@ -2394,7 +2394,7 @@
               <a:buNone/>
             </a:pPr>
             <a:r>
-              <a:rPr lang="en-US" sz="900" dirty="0">
+              <a:rPr lang="en-US" sz="800" dirty="0">
                 <a:solidFill>
                   <a:srgbClr val="0EA5E9"/>
                 </a:solidFill>
@@ -2404,7 +2404,7 @@
               </a:rPr>
               <a:t>DevOps Engineer</a:t>
             </a:r>
-            <a:endParaRPr lang="en-US" sz="900" dirty="0"/>
+            <a:endParaRPr lang="en-US" sz="800" dirty="0"/>
           </a:p>
         </p:txBody>
       </p:sp>
@@ -2416,8 +2416,8 @@
         </p:nvSpPr>
         <p:spPr>
           <a:xfrm>
-            <a:off x="7237476" y="4389120"/>
-            <a:ext cx="1828800" cy="1005840"/>
+            <a:off x="5440680" y="3200400"/>
+            <a:ext cx="1463040" cy="868680"/>
           </a:xfrm>
           <a:prstGeom prst="rect">
             <a:avLst/>
@@ -2441,8 +2441,8 @@
         </p:nvSpPr>
         <p:spPr>
           <a:xfrm>
-            <a:off x="7237476" y="4480560"/>
-            <a:ext cx="1828800" cy="365760"/>
+            <a:off x="5440680" y="3246120"/>
+            <a:ext cx="1463040" cy="320040"/>
           </a:xfrm>
           <a:prstGeom prst="rect">
             <a:avLst/>
@@ -2458,7 +2458,7 @@
               <a:buNone/>
             </a:pPr>
             <a:r>
-              <a:rPr lang="en-US" sz="1100" b="1" dirty="0">
+              <a:rPr lang="en-US" sz="900" b="1" dirty="0">
                 <a:solidFill>
                   <a:srgbClr val="FFFFFF"/>
                 </a:solidFill>
@@ -2468,7 +2468,7 @@
               </a:rPr>
               <a:t>Winnifred</a:t>
             </a:r>
-            <a:endParaRPr lang="en-US" sz="1100" dirty="0"/>
+            <a:endParaRPr lang="en-US" sz="900" dirty="0"/>
           </a:p>
         </p:txBody>
       </p:sp>
@@ -2480,8 +2480,8 @@
         </p:nvSpPr>
         <p:spPr>
           <a:xfrm>
-            <a:off x="7237476" y="4846320"/>
-            <a:ext cx="1828800" cy="365760"/>
+            <a:off x="5440680" y="3611880"/>
+            <a:ext cx="1463040" cy="320040"/>
           </a:xfrm>
           <a:prstGeom prst="rect">
             <a:avLst/>
@@ -2497,7 +2497,7 @@
               <a:buNone/>
             </a:pPr>
             <a:r>
-              <a:rPr lang="en-US" sz="900" dirty="0">
+              <a:rPr lang="en-US" sz="800" dirty="0">
                 <a:solidFill>
                   <a:srgbClr val="0EA5E9"/>
                 </a:solidFill>
@@ -2507,7 +2507,7 @@
               </a:rPr>
               <a:t>DevOps Engineer</a:t>
             </a:r>
-            <a:endParaRPr lang="en-US" sz="900" dirty="0"/>
+            <a:endParaRPr lang="en-US" sz="800" dirty="0"/>
           </a:p>
         </p:txBody>
       </p:sp>
@@ -2519,8 +2519,8 @@
         </p:nvSpPr>
         <p:spPr>
           <a:xfrm>
-            <a:off x="9294876" y="4389120"/>
-            <a:ext cx="1828800" cy="1005840"/>
+            <a:off x="7040880" y="3200400"/>
+            <a:ext cx="1463040" cy="868680"/>
           </a:xfrm>
           <a:prstGeom prst="rect">
             <a:avLst/>
@@ -2544,8 +2544,8 @@
         </p:nvSpPr>
         <p:spPr>
           <a:xfrm>
-            <a:off x="9294876" y="4480560"/>
-            <a:ext cx="1828800" cy="365760"/>
+            <a:off x="7040880" y="3246120"/>
+            <a:ext cx="1463040" cy="320040"/>
           </a:xfrm>
           <a:prstGeom prst="rect">
             <a:avLst/>
@@ -2561,7 +2561,7 @@
               <a:buNone/>
             </a:pPr>
             <a:r>
-              <a:rPr lang="en-US" sz="1100" b="1" dirty="0">
+              <a:rPr lang="en-US" sz="900" b="1" dirty="0">
                 <a:solidFill>
                   <a:srgbClr val="FFFFFF"/>
                 </a:solidFill>
@@ -2571,7 +2571,7 @@
               </a:rPr>
               <a:t>Esther</a:t>
             </a:r>
-            <a:endParaRPr lang="en-US" sz="1100" dirty="0"/>
+            <a:endParaRPr lang="en-US" sz="900" dirty="0"/>
           </a:p>
         </p:txBody>
       </p:sp>
@@ -2583,8 +2583,8 @@
         </p:nvSpPr>
         <p:spPr>
           <a:xfrm>
-            <a:off x="9294876" y="4846320"/>
-            <a:ext cx="1828800" cy="365760"/>
+            <a:off x="7040880" y="3611880"/>
+            <a:ext cx="1463040" cy="320040"/>
           </a:xfrm>
           <a:prstGeom prst="rect">
             <a:avLst/>
@@ -2600,7 +2600,7 @@
               <a:buNone/>
             </a:pPr>
             <a:r>
-              <a:rPr lang="en-US" sz="900" dirty="0">
+              <a:rPr lang="en-US" sz="800" dirty="0">
                 <a:solidFill>
                   <a:srgbClr val="0EA5E9"/>
                 </a:solidFill>
@@ -2610,7 +2610,7 @@
               </a:rPr>
               <a:t>DevOps Engineer</a:t>
             </a:r>
-            <a:endParaRPr lang="en-US" sz="900" dirty="0"/>
+            <a:endParaRPr lang="en-US" sz="800" dirty="0"/>
           </a:p>
         </p:txBody>
       </p:sp>
@@ -2655,23 +2655,23 @@
         <p:spPr>
           <a:xfrm>
             <a:off x="731520" y="365760"/>
-            <a:ext cx="10515600" cy="640080"/>
-          </a:xfrm>
-          <a:prstGeom prst="rect">
-            <a:avLst/>
-          </a:prstGeom>
-          <a:noFill/>
-          <a:ln/>
-        </p:spPr>
-        <p:txBody>
-          <a:bodyPr wrap="square" rtlCol="0" anchor="ctr"/>
-          <a:lstStyle/>
-          <a:p>
-            <a:pPr indent="0" marL="0">
-              <a:buNone/>
-            </a:pPr>
-            <a:r>
-              <a:rPr lang="en-US" sz="2800" b="1" dirty="0">
+            <a:ext cx="7680960" cy="548640"/>
+          </a:xfrm>
+          <a:prstGeom prst="rect">
+            <a:avLst/>
+          </a:prstGeom>
+          <a:noFill/>
+          <a:ln/>
+        </p:spPr>
+        <p:txBody>
+          <a:bodyPr wrap="square" rtlCol="0" anchor="ctr"/>
+          <a:lstStyle/>
+          <a:p>
+            <a:pPr indent="0" marL="0">
+              <a:buNone/>
+            </a:pPr>
+            <a:r>
+              <a:rPr lang="en-US" sz="2400" b="1" dirty="0">
                 <a:solidFill>
                   <a:srgbClr val="1E3A8A"/>
                 </a:solidFill>
@@ -2681,7 +2681,7 @@
               </a:rPr>
               <a:t>Challenges &amp; Resolutions — DevOps &amp; Server</a:t>
             </a:r>
-            <a:endParaRPr lang="en-US" sz="2800" dirty="0"/>
+            <a:endParaRPr lang="en-US" sz="2400" dirty="0"/>
           </a:p>
         </p:txBody>
       </p:sp>
@@ -2693,8 +2693,8 @@
         </p:nvSpPr>
         <p:spPr>
           <a:xfrm>
-            <a:off x="731520" y="1051560"/>
-            <a:ext cx="1371600" cy="45720"/>
+            <a:off x="731520" y="914400"/>
+            <a:ext cx="1371600" cy="36576"/>
           </a:xfrm>
           <a:prstGeom prst="rect">
             <a:avLst/>
@@ -2718,7 +2718,7 @@
         </p:nvSpPr>
         <p:spPr>
           <a:xfrm>
-            <a:off x="731520" y="6400800"/>
+            <a:off x="731520" y="4709160"/>
             <a:ext cx="6400800" cy="274320"/>
           </a:xfrm>
           <a:prstGeom prst="rect">
@@ -2735,7 +2735,7 @@
               <a:buNone/>
             </a:pPr>
             <a:r>
-              <a:rPr lang="en-US" sz="900" dirty="0">
+              <a:rPr lang="en-US" sz="850" dirty="0">
                 <a:solidFill>
                   <a:srgbClr val="94A3B8"/>
                 </a:solidFill>
@@ -2745,7 +2745,7 @@
               </a:rPr>
               <a:t>AWS DevOps Capstone Project  |  Student Study Planner</a:t>
             </a:r>
-            <a:endParaRPr lang="en-US" sz="900" dirty="0"/>
+            <a:endParaRPr lang="en-US" sz="850" dirty="0"/>
           </a:p>
         </p:txBody>
       </p:sp>
@@ -2757,7 +2757,7 @@
         </p:nvSpPr>
         <p:spPr>
           <a:xfrm>
-            <a:off x="10515600" y="6400800"/>
+            <a:off x="7498080" y="4709160"/>
             <a:ext cx="914400" cy="274320"/>
           </a:xfrm>
           <a:prstGeom prst="rect">
@@ -2774,7 +2774,7 @@
               <a:buNone/>
             </a:pPr>
             <a:r>
-              <a:rPr lang="en-US" sz="900" dirty="0">
+              <a:rPr lang="en-US" sz="850" dirty="0">
                 <a:solidFill>
                   <a:srgbClr val="94A3B8"/>
                 </a:solidFill>
@@ -2784,7 +2784,7 @@
               </a:rPr>
               <a:t>{slide_num} / {slide_num}</a:t>
             </a:r>
-            <a:endParaRPr lang="en-US" sz="900" dirty="0"/>
+            <a:endParaRPr lang="en-US" sz="850" dirty="0"/>
           </a:p>
         </p:txBody>
       </p:sp>
@@ -2796,8 +2796,8 @@
         </p:nvSpPr>
         <p:spPr>
           <a:xfrm>
-            <a:off x="731520" y="1371600"/>
-            <a:ext cx="5120640" cy="2194560"/>
+            <a:off x="731520" y="1280160"/>
+            <a:ext cx="3657600" cy="1554480"/>
           </a:xfrm>
           <a:prstGeom prst="rect">
             <a:avLst/>
@@ -2821,8 +2821,8 @@
         </p:nvSpPr>
         <p:spPr>
           <a:xfrm>
-            <a:off x="868680" y="1508760"/>
-            <a:ext cx="274320" cy="274320"/>
+            <a:off x="868680" y="1371600"/>
+            <a:ext cx="228600" cy="228600"/>
           </a:xfrm>
           <a:prstGeom prst="oval">
             <a:avLst/>
@@ -2846,8 +2846,8 @@
         </p:nvSpPr>
         <p:spPr>
           <a:xfrm>
-            <a:off x="868680" y="1527048"/>
-            <a:ext cx="274320" cy="228600"/>
+            <a:off x="868680" y="1380744"/>
+            <a:ext cx="228600" cy="182880"/>
           </a:xfrm>
           <a:prstGeom prst="rect">
             <a:avLst/>
@@ -2863,7 +2863,7 @@
               <a:buNone/>
             </a:pPr>
             <a:r>
-              <a:rPr lang="en-US" sz="1000" b="1" dirty="0">
+              <a:rPr lang="en-US" sz="850" b="1" dirty="0">
                 <a:solidFill>
                   <a:srgbClr val="FFFFFF"/>
                 </a:solidFill>
@@ -2873,7 +2873,7 @@
               </a:rPr>
               <a:t>1</a:t>
             </a:r>
-            <a:endParaRPr lang="en-US" sz="1000" dirty="0"/>
+            <a:endParaRPr lang="en-US" sz="850" dirty="0"/>
           </a:p>
         </p:txBody>
       </p:sp>
@@ -2885,24 +2885,24 @@
         </p:nvSpPr>
         <p:spPr>
           <a:xfrm>
-            <a:off x="1234440" y="1481328"/>
-            <a:ext cx="4480560" cy="320040"/>
-          </a:xfrm>
-          <a:prstGeom prst="rect">
-            <a:avLst/>
-          </a:prstGeom>
-          <a:noFill/>
-          <a:ln/>
-        </p:spPr>
-        <p:txBody>
-          <a:bodyPr wrap="square" rtlCol="0" anchor="ctr"/>
-          <a:lstStyle/>
-          <a:p>
-            <a:pPr indent="0" marL="0">
-              <a:buNone/>
-            </a:pPr>
-            <a:r>
-              <a:rPr lang="en-US" sz="1200" b="1" dirty="0">
+            <a:off x="1143000" y="1353312"/>
+            <a:ext cx="3108960" cy="274320"/>
+          </a:xfrm>
+          <a:prstGeom prst="rect">
+            <a:avLst/>
+          </a:prstGeom>
+          <a:noFill/>
+          <a:ln/>
+        </p:spPr>
+        <p:txBody>
+          <a:bodyPr wrap="square" rtlCol="0" anchor="ctr"/>
+          <a:lstStyle/>
+          <a:p>
+            <a:pPr indent="0" marL="0">
+              <a:buNone/>
+            </a:pPr>
+            <a:r>
+              <a:rPr lang="en-US" sz="950" b="1" dirty="0">
                 <a:solidFill>
                   <a:srgbClr val="991B1B"/>
                 </a:solidFill>
@@ -2912,7 +2912,7 @@
               </a:rPr>
               <a:t>GitHub Actions Workflow Parser Error</a:t>
             </a:r>
-            <a:endParaRPr lang="en-US" sz="1200" dirty="0"/>
+            <a:endParaRPr lang="en-US" sz="950" dirty="0"/>
           </a:p>
         </p:txBody>
       </p:sp>
@@ -2924,24 +2924,24 @@
         </p:nvSpPr>
         <p:spPr>
           <a:xfrm>
-            <a:off x="914400" y="1828800"/>
-            <a:ext cx="4754880" cy="777240"/>
-          </a:xfrm>
-          <a:prstGeom prst="rect">
-            <a:avLst/>
-          </a:prstGeom>
-          <a:noFill/>
-          <a:ln/>
-        </p:spPr>
-        <p:txBody>
-          <a:bodyPr wrap="square" rtlCol="0" anchor="ctr"/>
-          <a:lstStyle/>
-          <a:p>
-            <a:pPr indent="0" marL="0">
-              <a:buNone/>
-            </a:pPr>
-            <a:r>
-              <a:rPr lang="en-US" sz="950" dirty="0">
+            <a:off x="868680" y="1627632"/>
+            <a:ext cx="3383280" cy="548640"/>
+          </a:xfrm>
+          <a:prstGeom prst="rect">
+            <a:avLst/>
+          </a:prstGeom>
+          <a:noFill/>
+          <a:ln/>
+        </p:spPr>
+        <p:txBody>
+          <a:bodyPr wrap="square" rtlCol="0" anchor="ctr"/>
+          <a:lstStyle/>
+          <a:p>
+            <a:pPr indent="0" marL="0">
+              <a:buNone/>
+            </a:pPr>
+            <a:r>
+              <a:rPr lang="en-US" sz="800" dirty="0">
                 <a:solidFill>
                   <a:srgbClr val="334155"/>
                 </a:solidFill>
@@ -2951,7 +2951,7 @@
               </a:rPr>
               <a:t>Root Cause: Indentation syntax bug: on: and jobs: definitions in deploy.yml had 3 leading spaces instead of 0 column boundary, which is invalid YAML syntax.</a:t>
             </a:r>
-            <a:endParaRPr lang="en-US" sz="950" dirty="0"/>
+            <a:endParaRPr lang="en-US" sz="800" dirty="0"/>
           </a:p>
         </p:txBody>
       </p:sp>
@@ -2963,24 +2963,24 @@
         </p:nvSpPr>
         <p:spPr>
           <a:xfrm>
-            <a:off x="914400" y="2697480"/>
-            <a:ext cx="4754880" cy="777240"/>
-          </a:xfrm>
-          <a:prstGeom prst="rect">
-            <a:avLst/>
-          </a:prstGeom>
-          <a:noFill/>
-          <a:ln/>
-        </p:spPr>
-        <p:txBody>
-          <a:bodyPr wrap="square" rtlCol="0" anchor="ctr"/>
-          <a:lstStyle/>
-          <a:p>
-            <a:pPr indent="0" marL="0">
-              <a:buNone/>
-            </a:pPr>
-            <a:r>
-              <a:rPr lang="en-US" sz="950" b="1" dirty="0">
+            <a:off x="868680" y="2240280"/>
+            <a:ext cx="3383280" cy="548640"/>
+          </a:xfrm>
+          <a:prstGeom prst="rect">
+            <a:avLst/>
+          </a:prstGeom>
+          <a:noFill/>
+          <a:ln/>
+        </p:spPr>
+        <p:txBody>
+          <a:bodyPr wrap="square" rtlCol="0" anchor="ctr"/>
+          <a:lstStyle/>
+          <a:p>
+            <a:pPr indent="0" marL="0">
+              <a:buNone/>
+            </a:pPr>
+            <a:r>
+              <a:rPr lang="en-US" sz="800" b="1" dirty="0">
                 <a:solidFill>
                   <a:srgbClr val="166534"/>
                 </a:solidFill>
@@ -2990,7 +2990,7 @@
               </a:rPr>
               <a:t>Resolution: Corrected indentation to meet standard YAML specifications (aligned jobs/on to root). Re-pushed and pipeline successfully initialized.</a:t>
             </a:r>
-            <a:endParaRPr lang="en-US" sz="950" dirty="0"/>
+            <a:endParaRPr lang="en-US" sz="800" dirty="0"/>
           </a:p>
         </p:txBody>
       </p:sp>
@@ -3002,8 +3002,8 @@
         </p:nvSpPr>
         <p:spPr>
           <a:xfrm>
-            <a:off x="6309360" y="1371600"/>
-            <a:ext cx="5120640" cy="2194560"/>
+            <a:off x="4754880" y="1280160"/>
+            <a:ext cx="3657600" cy="1554480"/>
           </a:xfrm>
           <a:prstGeom prst="rect">
             <a:avLst/>
@@ -3027,8 +3027,8 @@
         </p:nvSpPr>
         <p:spPr>
           <a:xfrm>
-            <a:off x="6446520" y="1508760"/>
-            <a:ext cx="274320" cy="274320"/>
+            <a:off x="4892040" y="1371600"/>
+            <a:ext cx="228600" cy="228600"/>
           </a:xfrm>
           <a:prstGeom prst="oval">
             <a:avLst/>
@@ -3052,8 +3052,8 @@
         </p:nvSpPr>
         <p:spPr>
           <a:xfrm>
-            <a:off x="6446520" y="1527048"/>
-            <a:ext cx="274320" cy="228600"/>
+            <a:off x="4892040" y="1380744"/>
+            <a:ext cx="228600" cy="182880"/>
           </a:xfrm>
           <a:prstGeom prst="rect">
             <a:avLst/>
@@ -3069,7 +3069,7 @@
               <a:buNone/>
             </a:pPr>
             <a:r>
-              <a:rPr lang="en-US" sz="1000" b="1" dirty="0">
+              <a:rPr lang="en-US" sz="850" b="1" dirty="0">
                 <a:solidFill>
                   <a:srgbClr val="FFFFFF"/>
                 </a:solidFill>
@@ -3079,7 +3079,7 @@
               </a:rPr>
               <a:t>2</a:t>
             </a:r>
-            <a:endParaRPr lang="en-US" sz="1000" dirty="0"/>
+            <a:endParaRPr lang="en-US" sz="850" dirty="0"/>
           </a:p>
         </p:txBody>
       </p:sp>
@@ -3091,24 +3091,24 @@
         </p:nvSpPr>
         <p:spPr>
           <a:xfrm>
-            <a:off x="6812280" y="1481328"/>
-            <a:ext cx="4480560" cy="320040"/>
-          </a:xfrm>
-          <a:prstGeom prst="rect">
-            <a:avLst/>
-          </a:prstGeom>
-          <a:noFill/>
-          <a:ln/>
-        </p:spPr>
-        <p:txBody>
-          <a:bodyPr wrap="square" rtlCol="0" anchor="ctr"/>
-          <a:lstStyle/>
-          <a:p>
-            <a:pPr indent="0" marL="0">
-              <a:buNone/>
-            </a:pPr>
-            <a:r>
-              <a:rPr lang="en-US" sz="1200" b="1" dirty="0">
+            <a:off x="5166360" y="1353312"/>
+            <a:ext cx="3108960" cy="274320"/>
+          </a:xfrm>
+          <a:prstGeom prst="rect">
+            <a:avLst/>
+          </a:prstGeom>
+          <a:noFill/>
+          <a:ln/>
+        </p:spPr>
+        <p:txBody>
+          <a:bodyPr wrap="square" rtlCol="0" anchor="ctr"/>
+          <a:lstStyle/>
+          <a:p>
+            <a:pPr indent="0" marL="0">
+              <a:buNone/>
+            </a:pPr>
+            <a:r>
+              <a:rPr lang="en-US" sz="950" b="1" dirty="0">
                 <a:solidFill>
                   <a:srgbClr val="991B1B"/>
                 </a:solidFill>
@@ -3118,7 +3118,7 @@
               </a:rPr>
               <a:t>Starter Template Node.js Commands Failure</a:t>
             </a:r>
-            <a:endParaRPr lang="en-US" sz="1200" dirty="0"/>
+            <a:endParaRPr lang="en-US" sz="950" dirty="0"/>
           </a:p>
         </p:txBody>
       </p:sp>
@@ -3130,24 +3130,24 @@
         </p:nvSpPr>
         <p:spPr>
           <a:xfrm>
-            <a:off x="6492240" y="1828800"/>
-            <a:ext cx="4754880" cy="777240"/>
-          </a:xfrm>
-          <a:prstGeom prst="rect">
-            <a:avLst/>
-          </a:prstGeom>
-          <a:noFill/>
-          <a:ln/>
-        </p:spPr>
-        <p:txBody>
-          <a:bodyPr wrap="square" rtlCol="0" anchor="ctr"/>
-          <a:lstStyle/>
-          <a:p>
-            <a:pPr indent="0" marL="0">
-              <a:buNone/>
-            </a:pPr>
-            <a:r>
-              <a:rPr lang="en-US" sz="950" dirty="0">
+            <a:off x="4892040" y="1627632"/>
+            <a:ext cx="3383280" cy="548640"/>
+          </a:xfrm>
+          <a:prstGeom prst="rect">
+            <a:avLst/>
+          </a:prstGeom>
+          <a:noFill/>
+          <a:ln/>
+        </p:spPr>
+        <p:txBody>
+          <a:bodyPr wrap="square" rtlCol="0" anchor="ctr"/>
+          <a:lstStyle/>
+          <a:p>
+            <a:pPr indent="0" marL="0">
+              <a:buNone/>
+            </a:pPr>
+            <a:r>
+              <a:rPr lang="en-US" sz="800" dirty="0">
                 <a:solidFill>
                   <a:srgbClr val="334155"/>
                 </a:solidFill>
@@ -3157,7 +3157,7 @@
               </a:rPr>
               <a:t>Root Cause: The default starter script attempted to run node-specific commands like npm install and pm2 restart on the server. However, our study planner application is a static site that only needs Nginx.</a:t>
             </a:r>
-            <a:endParaRPr lang="en-US" sz="950" dirty="0"/>
+            <a:endParaRPr lang="en-US" sz="800" dirty="0"/>
           </a:p>
         </p:txBody>
       </p:sp>
@@ -3169,24 +3169,24 @@
         </p:nvSpPr>
         <p:spPr>
           <a:xfrm>
-            <a:off x="6492240" y="2697480"/>
-            <a:ext cx="4754880" cy="777240"/>
-          </a:xfrm>
-          <a:prstGeom prst="rect">
-            <a:avLst/>
-          </a:prstGeom>
-          <a:noFill/>
-          <a:ln/>
-        </p:spPr>
-        <p:txBody>
-          <a:bodyPr wrap="square" rtlCol="0" anchor="ctr"/>
-          <a:lstStyle/>
-          <a:p>
-            <a:pPr indent="0" marL="0">
-              <a:buNone/>
-            </a:pPr>
-            <a:r>
-              <a:rPr lang="en-US" sz="950" b="1" dirty="0">
+            <a:off x="4892040" y="2240280"/>
+            <a:ext cx="3383280" cy="548640"/>
+          </a:xfrm>
+          <a:prstGeom prst="rect">
+            <a:avLst/>
+          </a:prstGeom>
+          <a:noFill/>
+          <a:ln/>
+        </p:spPr>
+        <p:txBody>
+          <a:bodyPr wrap="square" rtlCol="0" anchor="ctr"/>
+          <a:lstStyle/>
+          <a:p>
+            <a:pPr indent="0" marL="0">
+              <a:buNone/>
+            </a:pPr>
+            <a:r>
+              <a:rPr lang="en-US" sz="800" b="1" dirty="0">
                 <a:solidFill>
                   <a:srgbClr val="166534"/>
                 </a:solidFill>
@@ -3196,7 +3196,7 @@
               </a:rPr>
               <a:t>Resolution: Replaced node server logic in workflow script with git pull, file copy (cp), directory ownership adjustments (chown), Nginx syntax checks (nginx -t), and zero-downtime reloads.</a:t>
             </a:r>
-            <a:endParaRPr lang="en-US" sz="950" dirty="0"/>
+            <a:endParaRPr lang="en-US" sz="800" dirty="0"/>
           </a:p>
         </p:txBody>
       </p:sp>
@@ -3208,8 +3208,8 @@
         </p:nvSpPr>
         <p:spPr>
           <a:xfrm>
-            <a:off x="731520" y="3840480"/>
-            <a:ext cx="5120640" cy="2194560"/>
+            <a:off x="731520" y="3017520"/>
+            <a:ext cx="3657600" cy="1554480"/>
           </a:xfrm>
           <a:prstGeom prst="rect">
             <a:avLst/>
@@ -3233,8 +3233,8 @@
         </p:nvSpPr>
         <p:spPr>
           <a:xfrm>
-            <a:off x="868680" y="3977640"/>
-            <a:ext cx="274320" cy="274320"/>
+            <a:off x="868680" y="3108960"/>
+            <a:ext cx="228600" cy="228600"/>
           </a:xfrm>
           <a:prstGeom prst="oval">
             <a:avLst/>
@@ -3258,8 +3258,8 @@
         </p:nvSpPr>
         <p:spPr>
           <a:xfrm>
-            <a:off x="868680" y="3995928"/>
-            <a:ext cx="274320" cy="228600"/>
+            <a:off x="868680" y="3118104"/>
+            <a:ext cx="228600" cy="182880"/>
           </a:xfrm>
           <a:prstGeom prst="rect">
             <a:avLst/>
@@ -3275,7 +3275,7 @@
               <a:buNone/>
             </a:pPr>
             <a:r>
-              <a:rPr lang="en-US" sz="1000" b="1" dirty="0">
+              <a:rPr lang="en-US" sz="850" b="1" dirty="0">
                 <a:solidFill>
                   <a:srgbClr val="FFFFFF"/>
                 </a:solidFill>
@@ -3285,7 +3285,7 @@
               </a:rPr>
               <a:t>3</a:t>
             </a:r>
-            <a:endParaRPr lang="en-US" sz="1000" dirty="0"/>
+            <a:endParaRPr lang="en-US" sz="850" dirty="0"/>
           </a:p>
         </p:txBody>
       </p:sp>
@@ -3297,24 +3297,24 @@
         </p:nvSpPr>
         <p:spPr>
           <a:xfrm>
-            <a:off x="1234440" y="3950208"/>
-            <a:ext cx="4480560" cy="320040"/>
-          </a:xfrm>
-          <a:prstGeom prst="rect">
-            <a:avLst/>
-          </a:prstGeom>
-          <a:noFill/>
-          <a:ln/>
-        </p:spPr>
-        <p:txBody>
-          <a:bodyPr wrap="square" rtlCol="0" anchor="ctr"/>
-          <a:lstStyle/>
-          <a:p>
-            <a:pPr indent="0" marL="0">
-              <a:buNone/>
-            </a:pPr>
-            <a:r>
-              <a:rPr lang="en-US" sz="1200" b="1" dirty="0">
+            <a:off x="1143000" y="3090672"/>
+            <a:ext cx="3108960" cy="274320"/>
+          </a:xfrm>
+          <a:prstGeom prst="rect">
+            <a:avLst/>
+          </a:prstGeom>
+          <a:noFill/>
+          <a:ln/>
+        </p:spPr>
+        <p:txBody>
+          <a:bodyPr wrap="square" rtlCol="0" anchor="ctr"/>
+          <a:lstStyle/>
+          <a:p>
+            <a:pPr indent="0" marL="0">
+              <a:buNone/>
+            </a:pPr>
+            <a:r>
+              <a:rPr lang="en-US" sz="950" b="1" dirty="0">
                 <a:solidFill>
                   <a:srgbClr val="991B1B"/>
                 </a:solidFill>
@@ -3324,7 +3324,7 @@
               </a:rPr>
               <a:t>CloudFront 502 Bad Gateway Origin Mismatch</a:t>
             </a:r>
-            <a:endParaRPr lang="en-US" sz="1200" dirty="0"/>
+            <a:endParaRPr lang="en-US" sz="950" dirty="0"/>
           </a:p>
         </p:txBody>
       </p:sp>
@@ -3336,24 +3336,24 @@
         </p:nvSpPr>
         <p:spPr>
           <a:xfrm>
-            <a:off x="914400" y="4297680"/>
-            <a:ext cx="4754880" cy="777240"/>
-          </a:xfrm>
-          <a:prstGeom prst="rect">
-            <a:avLst/>
-          </a:prstGeom>
-          <a:noFill/>
-          <a:ln/>
-        </p:spPr>
-        <p:txBody>
-          <a:bodyPr wrap="square" rtlCol="0" anchor="ctr"/>
-          <a:lstStyle/>
-          <a:p>
-            <a:pPr indent="0" marL="0">
-              <a:buNone/>
-            </a:pPr>
-            <a:r>
-              <a:rPr lang="en-US" sz="950" dirty="0">
+            <a:off x="868680" y="3364992"/>
+            <a:ext cx="3383280" cy="548640"/>
+          </a:xfrm>
+          <a:prstGeom prst="rect">
+            <a:avLst/>
+          </a:prstGeom>
+          <a:noFill/>
+          <a:ln/>
+        </p:spPr>
+        <p:txBody>
+          <a:bodyPr wrap="square" rtlCol="0" anchor="ctr"/>
+          <a:lstStyle/>
+          <a:p>
+            <a:pPr indent="0" marL="0">
+              <a:buNone/>
+            </a:pPr>
+            <a:r>
+              <a:rPr lang="en-US" sz="800" dirty="0">
                 <a:solidFill>
                   <a:srgbClr val="334155"/>
                 </a:solidFill>
@@ -3363,7 +3363,7 @@
               </a:rPr>
               <a:t>Root Cause: CloudFront origin was configured to communicate with the ALB over HTTPS only. However, the ALB was configured with an HTTP listener on port 80, causing connection handshake failures.</a:t>
             </a:r>
-            <a:endParaRPr lang="en-US" sz="950" dirty="0"/>
+            <a:endParaRPr lang="en-US" sz="800" dirty="0"/>
           </a:p>
         </p:txBody>
       </p:sp>
@@ -3375,24 +3375,24 @@
         </p:nvSpPr>
         <p:spPr>
           <a:xfrm>
-            <a:off x="914400" y="5166360"/>
-            <a:ext cx="4754880" cy="777240"/>
-          </a:xfrm>
-          <a:prstGeom prst="rect">
-            <a:avLst/>
-          </a:prstGeom>
-          <a:noFill/>
-          <a:ln/>
-        </p:spPr>
-        <p:txBody>
-          <a:bodyPr wrap="square" rtlCol="0" anchor="ctr"/>
-          <a:lstStyle/>
-          <a:p>
-            <a:pPr indent="0" marL="0">
-              <a:buNone/>
-            </a:pPr>
-            <a:r>
-              <a:rPr lang="en-US" sz="950" b="1" dirty="0">
+            <a:off x="868680" y="3977640"/>
+            <a:ext cx="3383280" cy="548640"/>
+          </a:xfrm>
+          <a:prstGeom prst="rect">
+            <a:avLst/>
+          </a:prstGeom>
+          <a:noFill/>
+          <a:ln/>
+        </p:spPr>
+        <p:txBody>
+          <a:bodyPr wrap="square" rtlCol="0" anchor="ctr"/>
+          <a:lstStyle/>
+          <a:p>
+            <a:pPr indent="0" marL="0">
+              <a:buNone/>
+            </a:pPr>
+            <a:r>
+              <a:rPr lang="en-US" sz="800" b="1" dirty="0">
                 <a:solidFill>
                   <a:srgbClr val="166534"/>
                 </a:solidFill>
@@ -3402,7 +3402,7 @@
               </a:rPr>
               <a:t>Resolution: Updated the CloudFront distribution origin protocol policy to HTTP-Only to match the ALB listener configuration. Traffic forwarded correctly.</a:t>
             </a:r>
-            <a:endParaRPr lang="en-US" sz="950" dirty="0"/>
+            <a:endParaRPr lang="en-US" sz="800" dirty="0"/>
           </a:p>
         </p:txBody>
       </p:sp>
@@ -3414,8 +3414,8 @@
         </p:nvSpPr>
         <p:spPr>
           <a:xfrm>
-            <a:off x="6309360" y="3840480"/>
-            <a:ext cx="5120640" cy="2194560"/>
+            <a:off x="4754880" y="3017520"/>
+            <a:ext cx="3657600" cy="1554480"/>
           </a:xfrm>
           <a:prstGeom prst="rect">
             <a:avLst/>
@@ -3439,8 +3439,8 @@
         </p:nvSpPr>
         <p:spPr>
           <a:xfrm>
-            <a:off x="6446520" y="3977640"/>
-            <a:ext cx="274320" cy="274320"/>
+            <a:off x="4892040" y="3108960"/>
+            <a:ext cx="228600" cy="228600"/>
           </a:xfrm>
           <a:prstGeom prst="oval">
             <a:avLst/>
@@ -3464,8 +3464,8 @@
         </p:nvSpPr>
         <p:spPr>
           <a:xfrm>
-            <a:off x="6446520" y="3995928"/>
-            <a:ext cx="274320" cy="228600"/>
+            <a:off x="4892040" y="3118104"/>
+            <a:ext cx="228600" cy="182880"/>
           </a:xfrm>
           <a:prstGeom prst="rect">
             <a:avLst/>
@@ -3481,7 +3481,7 @@
               <a:buNone/>
             </a:pPr>
             <a:r>
-              <a:rPr lang="en-US" sz="1000" b="1" dirty="0">
+              <a:rPr lang="en-US" sz="850" b="1" dirty="0">
                 <a:solidFill>
                   <a:srgbClr val="FFFFFF"/>
                 </a:solidFill>
@@ -3491,7 +3491,7 @@
               </a:rPr>
               <a:t>4</a:t>
             </a:r>
-            <a:endParaRPr lang="en-US" sz="1000" dirty="0"/>
+            <a:endParaRPr lang="en-US" sz="850" dirty="0"/>
           </a:p>
         </p:txBody>
       </p:sp>
@@ -3503,24 +3503,24 @@
         </p:nvSpPr>
         <p:spPr>
           <a:xfrm>
-            <a:off x="6812280" y="3950208"/>
-            <a:ext cx="4480560" cy="320040"/>
-          </a:xfrm>
-          <a:prstGeom prst="rect">
-            <a:avLst/>
-          </a:prstGeom>
-          <a:noFill/>
-          <a:ln/>
-        </p:spPr>
-        <p:txBody>
-          <a:bodyPr wrap="square" rtlCol="0" anchor="ctr"/>
-          <a:lstStyle/>
-          <a:p>
-            <a:pPr indent="0" marL="0">
-              <a:buNone/>
-            </a:pPr>
-            <a:r>
-              <a:rPr lang="en-US" sz="1200" b="1" dirty="0">
+            <a:off x="5166360" y="3090672"/>
+            <a:ext cx="3108960" cy="274320"/>
+          </a:xfrm>
+          <a:prstGeom prst="rect">
+            <a:avLst/>
+          </a:prstGeom>
+          <a:noFill/>
+          <a:ln/>
+        </p:spPr>
+        <p:txBody>
+          <a:bodyPr wrap="square" rtlCol="0" anchor="ctr"/>
+          <a:lstStyle/>
+          <a:p>
+            <a:pPr indent="0" marL="0">
+              <a:buNone/>
+            </a:pPr>
+            <a:r>
+              <a:rPr lang="en-US" sz="950" b="1" dirty="0">
                 <a:solidFill>
                   <a:srgbClr val="991B1B"/>
                 </a:solidFill>
@@ -3530,7 +3530,7 @@
               </a:rPr>
               <a:t>EC2 Amazon Linux 2023 Base Lacks Git</a:t>
             </a:r>
-            <a:endParaRPr lang="en-US" sz="1200" dirty="0"/>
+            <a:endParaRPr lang="en-US" sz="950" dirty="0"/>
           </a:p>
         </p:txBody>
       </p:sp>
@@ -3542,24 +3542,24 @@
         </p:nvSpPr>
         <p:spPr>
           <a:xfrm>
-            <a:off x="6492240" y="4297680"/>
-            <a:ext cx="4754880" cy="777240"/>
-          </a:xfrm>
-          <a:prstGeom prst="rect">
-            <a:avLst/>
-          </a:prstGeom>
-          <a:noFill/>
-          <a:ln/>
-        </p:spPr>
-        <p:txBody>
-          <a:bodyPr wrap="square" rtlCol="0" anchor="ctr"/>
-          <a:lstStyle/>
-          <a:p>
-            <a:pPr indent="0" marL="0">
-              <a:buNone/>
-            </a:pPr>
-            <a:r>
-              <a:rPr lang="en-US" sz="950" dirty="0">
+            <a:off x="4892040" y="3364992"/>
+            <a:ext cx="3383280" cy="548640"/>
+          </a:xfrm>
+          <a:prstGeom prst="rect">
+            <a:avLst/>
+          </a:prstGeom>
+          <a:noFill/>
+          <a:ln/>
+        </p:spPr>
+        <p:txBody>
+          <a:bodyPr wrap="square" rtlCol="0" anchor="ctr"/>
+          <a:lstStyle/>
+          <a:p>
+            <a:pPr indent="0" marL="0">
+              <a:buNone/>
+            </a:pPr>
+            <a:r>
+              <a:rPr lang="en-US" sz="800" dirty="0">
                 <a:solidFill>
                   <a:srgbClr val="334155"/>
                 </a:solidFill>
@@ -3569,7 +3569,7 @@
               </a:rPr>
               <a:t>Root Cause: Amazon Linux 2023 minimal AMI does not include a Git binary pre-installed. The initial GitHub actions runner failed to pull code from repository.</a:t>
             </a:r>
-            <a:endParaRPr lang="en-US" sz="950" dirty="0"/>
+            <a:endParaRPr lang="en-US" sz="800" dirty="0"/>
           </a:p>
         </p:txBody>
       </p:sp>
@@ -3581,24 +3581,24 @@
         </p:nvSpPr>
         <p:spPr>
           <a:xfrm>
-            <a:off x="6492240" y="5166360"/>
-            <a:ext cx="4754880" cy="777240"/>
-          </a:xfrm>
-          <a:prstGeom prst="rect">
-            <a:avLst/>
-          </a:prstGeom>
-          <a:noFill/>
-          <a:ln/>
-        </p:spPr>
-        <p:txBody>
-          <a:bodyPr wrap="square" rtlCol="0" anchor="ctr"/>
-          <a:lstStyle/>
-          <a:p>
-            <a:pPr indent="0" marL="0">
-              <a:buNone/>
-            </a:pPr>
-            <a:r>
-              <a:rPr lang="en-US" sz="950" b="1" dirty="0">
+            <a:off x="4892040" y="3977640"/>
+            <a:ext cx="3383280" cy="548640"/>
+          </a:xfrm>
+          <a:prstGeom prst="rect">
+            <a:avLst/>
+          </a:prstGeom>
+          <a:noFill/>
+          <a:ln/>
+        </p:spPr>
+        <p:txBody>
+          <a:bodyPr wrap="square" rtlCol="0" anchor="ctr"/>
+          <a:lstStyle/>
+          <a:p>
+            <a:pPr indent="0" marL="0">
+              <a:buNone/>
+            </a:pPr>
+            <a:r>
+              <a:rPr lang="en-US" sz="800" b="1" dirty="0">
                 <a:solidFill>
                   <a:srgbClr val="166534"/>
                 </a:solidFill>
@@ -3608,7 +3608,7 @@
               </a:rPr>
               <a:t>Resolution: Manually logged into the EC2 host and executed sudo dnf install -y git. Performed initial clone, allowing subsequent SSH pulls to run automatically.</a:t>
             </a:r>
-            <a:endParaRPr lang="en-US" sz="950" dirty="0"/>
+            <a:endParaRPr lang="en-US" sz="800" dirty="0"/>
           </a:p>
         </p:txBody>
       </p:sp>
@@ -3653,23 +3653,23 @@
         <p:spPr>
           <a:xfrm>
             <a:off x="731520" y="365760"/>
-            <a:ext cx="10515600" cy="640080"/>
-          </a:xfrm>
-          <a:prstGeom prst="rect">
-            <a:avLst/>
-          </a:prstGeom>
-          <a:noFill/>
-          <a:ln/>
-        </p:spPr>
-        <p:txBody>
-          <a:bodyPr wrap="square" rtlCol="0" anchor="ctr"/>
-          <a:lstStyle/>
-          <a:p>
-            <a:pPr indent="0" marL="0">
-              <a:buNone/>
-            </a:pPr>
-            <a:r>
-              <a:rPr lang="en-US" sz="2800" b="1" dirty="0">
+            <a:ext cx="7680960" cy="548640"/>
+          </a:xfrm>
+          <a:prstGeom prst="rect">
+            <a:avLst/>
+          </a:prstGeom>
+          <a:noFill/>
+          <a:ln/>
+        </p:spPr>
+        <p:txBody>
+          <a:bodyPr wrap="square" rtlCol="0" anchor="ctr"/>
+          <a:lstStyle/>
+          <a:p>
+            <a:pPr indent="0" marL="0">
+              <a:buNone/>
+            </a:pPr>
+            <a:r>
+              <a:rPr lang="en-US" sz="2400" b="1" dirty="0">
                 <a:solidFill>
                   <a:srgbClr val="1E3A8A"/>
                 </a:solidFill>
@@ -3679,7 +3679,7 @@
               </a:rPr>
               <a:t>Challenges &amp; Resolutions — DNS &amp; Security</a:t>
             </a:r>
-            <a:endParaRPr lang="en-US" sz="2800" dirty="0"/>
+            <a:endParaRPr lang="en-US" sz="2400" dirty="0"/>
           </a:p>
         </p:txBody>
       </p:sp>
@@ -3691,8 +3691,8 @@
         </p:nvSpPr>
         <p:spPr>
           <a:xfrm>
-            <a:off x="731520" y="1051560"/>
-            <a:ext cx="1371600" cy="45720"/>
+            <a:off x="731520" y="914400"/>
+            <a:ext cx="1371600" cy="36576"/>
           </a:xfrm>
           <a:prstGeom prst="rect">
             <a:avLst/>
@@ -3716,7 +3716,7 @@
         </p:nvSpPr>
         <p:spPr>
           <a:xfrm>
-            <a:off x="731520" y="6400800"/>
+            <a:off x="731520" y="4709160"/>
             <a:ext cx="6400800" cy="274320"/>
           </a:xfrm>
           <a:prstGeom prst="rect">
@@ -3733,7 +3733,7 @@
               <a:buNone/>
             </a:pPr>
             <a:r>
-              <a:rPr lang="en-US" sz="900" dirty="0">
+              <a:rPr lang="en-US" sz="850" dirty="0">
                 <a:solidFill>
                   <a:srgbClr val="94A3B8"/>
                 </a:solidFill>
@@ -3743,7 +3743,7 @@
               </a:rPr>
               <a:t>AWS DevOps Capstone Project  |  Student Study Planner</a:t>
             </a:r>
-            <a:endParaRPr lang="en-US" sz="900" dirty="0"/>
+            <a:endParaRPr lang="en-US" sz="850" dirty="0"/>
           </a:p>
         </p:txBody>
       </p:sp>
@@ -3755,7 +3755,7 @@
         </p:nvSpPr>
         <p:spPr>
           <a:xfrm>
-            <a:off x="10515600" y="6400800"/>
+            <a:off x="7498080" y="4709160"/>
             <a:ext cx="914400" cy="274320"/>
           </a:xfrm>
           <a:prstGeom prst="rect">
@@ -3772,7 +3772,7 @@
               <a:buNone/>
             </a:pPr>
             <a:r>
-              <a:rPr lang="en-US" sz="900" dirty="0">
+              <a:rPr lang="en-US" sz="850" dirty="0">
                 <a:solidFill>
                   <a:srgbClr val="94A3B8"/>
                 </a:solidFill>
@@ -3782,7 +3782,7 @@
               </a:rPr>
               <a:t>{slide_num} / {slide_num}</a:t>
             </a:r>
-            <a:endParaRPr lang="en-US" sz="900" dirty="0"/>
+            <a:endParaRPr lang="en-US" sz="850" dirty="0"/>
           </a:p>
         </p:txBody>
       </p:sp>
@@ -3794,8 +3794,8 @@
         </p:nvSpPr>
         <p:spPr>
           <a:xfrm>
-            <a:off x="731520" y="1371600"/>
-            <a:ext cx="3337560" cy="4572000"/>
+            <a:off x="736092" y="1280160"/>
+            <a:ext cx="2423160" cy="3200400"/>
           </a:xfrm>
           <a:prstGeom prst="rect">
             <a:avLst/>
@@ -3819,8 +3819,8 @@
         </p:nvSpPr>
         <p:spPr>
           <a:xfrm>
-            <a:off x="868680" y="1508760"/>
-            <a:ext cx="320040" cy="320040"/>
+            <a:off x="873252" y="1417320"/>
+            <a:ext cx="256032" cy="256032"/>
           </a:xfrm>
           <a:prstGeom prst="oval">
             <a:avLst/>
@@ -3844,8 +3844,8 @@
         </p:nvSpPr>
         <p:spPr>
           <a:xfrm>
-            <a:off x="868680" y="1536192"/>
-            <a:ext cx="320040" cy="274320"/>
+            <a:off x="873252" y="1435608"/>
+            <a:ext cx="256032" cy="228600"/>
           </a:xfrm>
           <a:prstGeom prst="rect">
             <a:avLst/>
@@ -3861,7 +3861,7 @@
               <a:buNone/>
             </a:pPr>
             <a:r>
-              <a:rPr lang="en-US" sz="1100" b="1" dirty="0">
+              <a:rPr lang="en-US" sz="850" b="1" dirty="0">
                 <a:solidFill>
                   <a:srgbClr val="FFFFFF"/>
                 </a:solidFill>
@@ -3871,7 +3871,7 @@
               </a:rPr>
               <a:t>5</a:t>
             </a:r>
-            <a:endParaRPr lang="en-US" sz="1100" dirty="0"/>
+            <a:endParaRPr lang="en-US" sz="850" dirty="0"/>
           </a:p>
         </p:txBody>
       </p:sp>
@@ -3883,24 +3883,24 @@
         </p:nvSpPr>
         <p:spPr>
           <a:xfrm>
-            <a:off x="1280160" y="1481328"/>
-            <a:ext cx="2606040" cy="457200"/>
-          </a:xfrm>
-          <a:prstGeom prst="rect">
-            <a:avLst/>
-          </a:prstGeom>
-          <a:noFill/>
-          <a:ln/>
-        </p:spPr>
-        <p:txBody>
-          <a:bodyPr wrap="square" rtlCol="0" anchor="ctr"/>
-          <a:lstStyle/>
-          <a:p>
-            <a:pPr indent="0" marL="0">
-              <a:buNone/>
-            </a:pPr>
-            <a:r>
-              <a:rPr lang="en-US" sz="1200" b="1" dirty="0">
+            <a:off x="1193292" y="1389888"/>
+            <a:ext cx="1874520" cy="347472"/>
+          </a:xfrm>
+          <a:prstGeom prst="rect">
+            <a:avLst/>
+          </a:prstGeom>
+          <a:noFill/>
+          <a:ln/>
+        </p:spPr>
+        <p:txBody>
+          <a:bodyPr wrap="square" rtlCol="0" anchor="ctr"/>
+          <a:lstStyle/>
+          <a:p>
+            <a:pPr indent="0" marL="0">
+              <a:buNone/>
+            </a:pPr>
+            <a:r>
+              <a:rPr lang="en-US" sz="950" b="1" dirty="0">
                 <a:solidFill>
                   <a:srgbClr val="991B1B"/>
                 </a:solidFill>
@@ -3910,7 +3910,7 @@
               </a:rPr>
               <a:t>Domain Apex (@) Resolution Fail</a:t>
             </a:r>
-            <a:endParaRPr lang="en-US" sz="1200" dirty="0"/>
+            <a:endParaRPr lang="en-US" sz="950" dirty="0"/>
           </a:p>
         </p:txBody>
       </p:sp>
@@ -3922,24 +3922,24 @@
         </p:nvSpPr>
         <p:spPr>
           <a:xfrm>
-            <a:off x="914400" y="2011680"/>
-            <a:ext cx="2971800" cy="1828800"/>
-          </a:xfrm>
-          <a:prstGeom prst="rect">
-            <a:avLst/>
-          </a:prstGeom>
-          <a:noFill/>
-          <a:ln/>
-        </p:spPr>
-        <p:txBody>
-          <a:bodyPr wrap="square" rtlCol="0" anchor="ctr"/>
-          <a:lstStyle/>
-          <a:p>
-            <a:pPr indent="0" marL="0">
-              <a:buNone/>
-            </a:pPr>
-            <a:r>
-              <a:rPr lang="en-US" sz="1000" dirty="0">
+            <a:off x="873252" y="1828800"/>
+            <a:ext cx="2148840" cy="1188720"/>
+          </a:xfrm>
+          <a:prstGeom prst="rect">
+            <a:avLst/>
+          </a:prstGeom>
+          <a:noFill/>
+          <a:ln/>
+        </p:spPr>
+        <p:txBody>
+          <a:bodyPr wrap="square" rtlCol="0" anchor="ctr"/>
+          <a:lstStyle/>
+          <a:p>
+            <a:pPr indent="0" marL="0">
+              <a:buNone/>
+            </a:pPr>
+            <a:r>
+              <a:rPr lang="en-US" sz="850" dirty="0">
                 <a:solidFill>
                   <a:srgbClr val="334155"/>
                 </a:solidFill>
@@ -3949,14 +3949,14 @@
               </a:rPr>
               <a:t>Root Cause:</a:t>
             </a:r>
-            <a:endParaRPr lang="en-US" sz="1000" dirty="0"/>
-          </a:p>
-          <a:p>
-            <a:pPr indent="0" marL="0">
-              <a:buNone/>
-            </a:pPr>
-            <a:r>
-              <a:rPr lang="en-US" sz="1000" dirty="0">
+            <a:endParaRPr lang="en-US" sz="850" dirty="0"/>
+          </a:p>
+          <a:p>
+            <a:pPr indent="0" marL="0">
+              <a:buNone/>
+            </a:pPr>
+            <a:r>
+              <a:rPr lang="en-US" sz="850" dirty="0">
                 <a:solidFill>
                   <a:srgbClr val="334155"/>
                 </a:solidFill>
@@ -3966,7 +3966,7 @@
               </a:rPr>
               <a:t>Standard CNAME records cannot be attached directly to domain apex (studentstudyplannerxyz.xyz) according to DNS specs.</a:t>
             </a:r>
-            <a:endParaRPr lang="en-US" sz="1000" dirty="0"/>
+            <a:endParaRPr lang="en-US" sz="850" dirty="0"/>
           </a:p>
         </p:txBody>
       </p:sp>
@@ -3978,24 +3978,24 @@
         </p:nvSpPr>
         <p:spPr>
           <a:xfrm>
-            <a:off x="914400" y="3931920"/>
-            <a:ext cx="2971800" cy="1828800"/>
-          </a:xfrm>
-          <a:prstGeom prst="rect">
-            <a:avLst/>
-          </a:prstGeom>
-          <a:noFill/>
-          <a:ln/>
-        </p:spPr>
-        <p:txBody>
-          <a:bodyPr wrap="square" rtlCol="0" anchor="ctr"/>
-          <a:lstStyle/>
-          <a:p>
-            <a:pPr indent="0" marL="0">
-              <a:buNone/>
-            </a:pPr>
-            <a:r>
-              <a:rPr lang="en-US" sz="1000" b="1" dirty="0">
+            <a:off x="873252" y="3108960"/>
+            <a:ext cx="2148840" cy="1188720"/>
+          </a:xfrm>
+          <a:prstGeom prst="rect">
+            <a:avLst/>
+          </a:prstGeom>
+          <a:noFill/>
+          <a:ln/>
+        </p:spPr>
+        <p:txBody>
+          <a:bodyPr wrap="square" rtlCol="0" anchor="ctr"/>
+          <a:lstStyle/>
+          <a:p>
+            <a:pPr indent="0" marL="0">
+              <a:buNone/>
+            </a:pPr>
+            <a:r>
+              <a:rPr lang="en-US" sz="850" b="1" dirty="0">
                 <a:solidFill>
                   <a:srgbClr val="166534"/>
                 </a:solidFill>
@@ -4005,14 +4005,14 @@
               </a:rPr>
               <a:t>Resolution:</a:t>
             </a:r>
-            <a:endParaRPr lang="en-US" sz="1000" dirty="0"/>
-          </a:p>
-          <a:p>
-            <a:pPr indent="0" marL="0">
-              <a:buNone/>
-            </a:pPr>
-            <a:r>
-              <a:rPr lang="en-US" sz="1000" b="1" dirty="0">
+            <a:endParaRPr lang="en-US" sz="850" dirty="0"/>
+          </a:p>
+          <a:p>
+            <a:pPr indent="0" marL="0">
+              <a:buNone/>
+            </a:pPr>
+            <a:r>
+              <a:rPr lang="en-US" sz="850" b="1" dirty="0">
                 <a:solidFill>
                   <a:srgbClr val="166534"/>
                 </a:solidFill>
@@ -4022,7 +4022,7 @@
               </a:rPr>
               <a:t>Configured an ALIAS record (mapping @ to CloudFront domain) using Namecheap Advanced DNS server settings.</a:t>
             </a:r>
-            <a:endParaRPr lang="en-US" sz="1000" dirty="0"/>
+            <a:endParaRPr lang="en-US" sz="850" dirty="0"/>
           </a:p>
         </p:txBody>
       </p:sp>
@@ -4034,8 +4034,8 @@
         </p:nvSpPr>
         <p:spPr>
           <a:xfrm>
-            <a:off x="4434840" y="1371600"/>
-            <a:ext cx="3337560" cy="4572000"/>
+            <a:off x="3360420" y="1280160"/>
+            <a:ext cx="2423160" cy="3200400"/>
           </a:xfrm>
           <a:prstGeom prst="rect">
             <a:avLst/>
@@ -4059,8 +4059,8 @@
         </p:nvSpPr>
         <p:spPr>
           <a:xfrm>
-            <a:off x="4572000" y="1508760"/>
-            <a:ext cx="320040" cy="320040"/>
+            <a:off x="3497580" y="1417320"/>
+            <a:ext cx="256032" cy="256032"/>
           </a:xfrm>
           <a:prstGeom prst="oval">
             <a:avLst/>
@@ -4084,8 +4084,8 @@
         </p:nvSpPr>
         <p:spPr>
           <a:xfrm>
-            <a:off x="4572000" y="1536192"/>
-            <a:ext cx="320040" cy="274320"/>
+            <a:off x="3497580" y="1435608"/>
+            <a:ext cx="256032" cy="228600"/>
           </a:xfrm>
           <a:prstGeom prst="rect">
             <a:avLst/>
@@ -4101,7 +4101,7 @@
               <a:buNone/>
             </a:pPr>
             <a:r>
-              <a:rPr lang="en-US" sz="1100" b="1" dirty="0">
+              <a:rPr lang="en-US" sz="850" b="1" dirty="0">
                 <a:solidFill>
                   <a:srgbClr val="FFFFFF"/>
                 </a:solidFill>
@@ -4111,7 +4111,7 @@
               </a:rPr>
               <a:t>6</a:t>
             </a:r>
-            <a:endParaRPr lang="en-US" sz="1100" dirty="0"/>
+            <a:endParaRPr lang="en-US" sz="850" dirty="0"/>
           </a:p>
         </p:txBody>
       </p:sp>
@@ -4123,24 +4123,24 @@
         </p:nvSpPr>
         <p:spPr>
           <a:xfrm>
-            <a:off x="4983480" y="1481328"/>
-            <a:ext cx="2606040" cy="457200"/>
-          </a:xfrm>
-          <a:prstGeom prst="rect">
-            <a:avLst/>
-          </a:prstGeom>
-          <a:noFill/>
-          <a:ln/>
-        </p:spPr>
-        <p:txBody>
-          <a:bodyPr wrap="square" rtlCol="0" anchor="ctr"/>
-          <a:lstStyle/>
-          <a:p>
-            <a:pPr indent="0" marL="0">
-              <a:buNone/>
-            </a:pPr>
-            <a:r>
-              <a:rPr lang="en-US" sz="1200" b="1" dirty="0">
+            <a:off x="3817620" y="1389888"/>
+            <a:ext cx="1874520" cy="347472"/>
+          </a:xfrm>
+          <a:prstGeom prst="rect">
+            <a:avLst/>
+          </a:prstGeom>
+          <a:noFill/>
+          <a:ln/>
+        </p:spPr>
+        <p:txBody>
+          <a:bodyPr wrap="square" rtlCol="0" anchor="ctr"/>
+          <a:lstStyle/>
+          <a:p>
+            <a:pPr indent="0" marL="0">
+              <a:buNone/>
+            </a:pPr>
+            <a:r>
+              <a:rPr lang="en-US" sz="950" b="1" dirty="0">
                 <a:solidFill>
                   <a:srgbClr val="991B1B"/>
                 </a:solidFill>
@@ -4150,7 +4150,7 @@
               </a:rPr>
               <a:t>ACM TLS Certificate Stuck in Pending</a:t>
             </a:r>
-            <a:endParaRPr lang="en-US" sz="1200" dirty="0"/>
+            <a:endParaRPr lang="en-US" sz="950" dirty="0"/>
           </a:p>
         </p:txBody>
       </p:sp>
@@ -4162,24 +4162,24 @@
         </p:nvSpPr>
         <p:spPr>
           <a:xfrm>
-            <a:off x="4617720" y="2011680"/>
-            <a:ext cx="2971800" cy="1828800"/>
-          </a:xfrm>
-          <a:prstGeom prst="rect">
-            <a:avLst/>
-          </a:prstGeom>
-          <a:noFill/>
-          <a:ln/>
-        </p:spPr>
-        <p:txBody>
-          <a:bodyPr wrap="square" rtlCol="0" anchor="ctr"/>
-          <a:lstStyle/>
-          <a:p>
-            <a:pPr indent="0" marL="0">
-              <a:buNone/>
-            </a:pPr>
-            <a:r>
-              <a:rPr lang="en-US" sz="1000" dirty="0">
+            <a:off x="3497580" y="1828800"/>
+            <a:ext cx="2148840" cy="1188720"/>
+          </a:xfrm>
+          <a:prstGeom prst="rect">
+            <a:avLst/>
+          </a:prstGeom>
+          <a:noFill/>
+          <a:ln/>
+        </p:spPr>
+        <p:txBody>
+          <a:bodyPr wrap="square" rtlCol="0" anchor="ctr"/>
+          <a:lstStyle/>
+          <a:p>
+            <a:pPr indent="0" marL="0">
+              <a:buNone/>
+            </a:pPr>
+            <a:r>
+              <a:rPr lang="en-US" sz="850" dirty="0">
                 <a:solidFill>
                   <a:srgbClr val="334155"/>
                 </a:solidFill>
@@ -4189,14 +4189,14 @@
               </a:rPr>
               <a:t>Root Cause:</a:t>
             </a:r>
-            <a:endParaRPr lang="en-US" sz="1000" dirty="0"/>
-          </a:p>
-          <a:p>
-            <a:pPr indent="0" marL="0">
-              <a:buNone/>
-            </a:pPr>
-            <a:r>
-              <a:rPr lang="en-US" sz="1000" dirty="0">
+            <a:endParaRPr lang="en-US" sz="850" dirty="0"/>
+          </a:p>
+          <a:p>
+            <a:pPr indent="0" marL="0">
+              <a:buNone/>
+            </a:pPr>
+            <a:r>
+              <a:rPr lang="en-US" sz="850" dirty="0">
                 <a:solidFill>
                   <a:srgbClr val="334155"/>
                 </a:solidFill>
@@ -4206,7 +4206,7 @@
               </a:rPr>
               <a:t>DNS CNAME verification records provided by AWS ACM were not added to domain registrar settings, blocking verification.</a:t>
             </a:r>
-            <a:endParaRPr lang="en-US" sz="1000" dirty="0"/>
+            <a:endParaRPr lang="en-US" sz="850" dirty="0"/>
           </a:p>
         </p:txBody>
       </p:sp>
@@ -4218,24 +4218,24 @@
         </p:nvSpPr>
         <p:spPr>
           <a:xfrm>
-            <a:off x="4617720" y="3931920"/>
-            <a:ext cx="2971800" cy="1828800"/>
-          </a:xfrm>
-          <a:prstGeom prst="rect">
-            <a:avLst/>
-          </a:prstGeom>
-          <a:noFill/>
-          <a:ln/>
-        </p:spPr>
-        <p:txBody>
-          <a:bodyPr wrap="square" rtlCol="0" anchor="ctr"/>
-          <a:lstStyle/>
-          <a:p>
-            <a:pPr indent="0" marL="0">
-              <a:buNone/>
-            </a:pPr>
-            <a:r>
-              <a:rPr lang="en-US" sz="1000" b="1" dirty="0">
+            <a:off x="3497580" y="3108960"/>
+            <a:ext cx="2148840" cy="1188720"/>
+          </a:xfrm>
+          <a:prstGeom prst="rect">
+            <a:avLst/>
+          </a:prstGeom>
+          <a:noFill/>
+          <a:ln/>
+        </p:spPr>
+        <p:txBody>
+          <a:bodyPr wrap="square" rtlCol="0" anchor="ctr"/>
+          <a:lstStyle/>
+          <a:p>
+            <a:pPr indent="0" marL="0">
+              <a:buNone/>
+            </a:pPr>
+            <a:r>
+              <a:rPr lang="en-US" sz="850" b="1" dirty="0">
                 <a:solidFill>
                   <a:srgbClr val="166534"/>
                 </a:solidFill>
@@ -4245,14 +4245,14 @@
               </a:rPr>
               <a:t>Resolution:</a:t>
             </a:r>
-            <a:endParaRPr lang="en-US" sz="1000" dirty="0"/>
-          </a:p>
-          <a:p>
-            <a:pPr indent="0" marL="0">
-              <a:buNone/>
-            </a:pPr>
-            <a:r>
-              <a:rPr lang="en-US" sz="1000" b="1" dirty="0">
+            <a:endParaRPr lang="en-US" sz="850" dirty="0"/>
+          </a:p>
+          <a:p>
+            <a:pPr indent="0" marL="0">
+              <a:buNone/>
+            </a:pPr>
+            <a:r>
+              <a:rPr lang="en-US" sz="850" b="1" dirty="0">
                 <a:solidFill>
                   <a:srgbClr val="166534"/>
                 </a:solidFill>
@@ -4262,7 +4262,7 @@
               </a:rPr>
               <a:t>Copied ACM-generated CNAME validation record names and values and added them to Namecheap DNS records. Issued in 5 minutes.</a:t>
             </a:r>
-            <a:endParaRPr lang="en-US" sz="1000" dirty="0"/>
+            <a:endParaRPr lang="en-US" sz="850" dirty="0"/>
           </a:p>
         </p:txBody>
       </p:sp>
@@ -4274,8 +4274,8 @@
         </p:nvSpPr>
         <p:spPr>
           <a:xfrm>
-            <a:off x="8138160" y="1371600"/>
-            <a:ext cx="3337560" cy="4572000"/>
+            <a:off x="5984748" y="1280160"/>
+            <a:ext cx="2423160" cy="3200400"/>
           </a:xfrm>
           <a:prstGeom prst="rect">
             <a:avLst/>
@@ -4299,8 +4299,8 @@
         </p:nvSpPr>
         <p:spPr>
           <a:xfrm>
-            <a:off x="8275320" y="1508760"/>
-            <a:ext cx="320040" cy="320040"/>
+            <a:off x="6121908" y="1417320"/>
+            <a:ext cx="256032" cy="256032"/>
           </a:xfrm>
           <a:prstGeom prst="oval">
             <a:avLst/>
@@ -4324,8 +4324,8 @@
         </p:nvSpPr>
         <p:spPr>
           <a:xfrm>
-            <a:off x="8275320" y="1536192"/>
-            <a:ext cx="320040" cy="274320"/>
+            <a:off x="6121908" y="1435608"/>
+            <a:ext cx="256032" cy="228600"/>
           </a:xfrm>
           <a:prstGeom prst="rect">
             <a:avLst/>
@@ -4341,7 +4341,7 @@
               <a:buNone/>
             </a:pPr>
             <a:r>
-              <a:rPr lang="en-US" sz="1100" b="1" dirty="0">
+              <a:rPr lang="en-US" sz="850" b="1" dirty="0">
                 <a:solidFill>
                   <a:srgbClr val="FFFFFF"/>
                 </a:solidFill>
@@ -4351,7 +4351,7 @@
               </a:rPr>
               <a:t>7</a:t>
             </a:r>
-            <a:endParaRPr lang="en-US" sz="1100" dirty="0"/>
+            <a:endParaRPr lang="en-US" sz="850" dirty="0"/>
           </a:p>
         </p:txBody>
       </p:sp>
@@ -4363,24 +4363,24 @@
         </p:nvSpPr>
         <p:spPr>
           <a:xfrm>
-            <a:off x="8686800" y="1481328"/>
-            <a:ext cx="2606040" cy="457200"/>
-          </a:xfrm>
-          <a:prstGeom prst="rect">
-            <a:avLst/>
-          </a:prstGeom>
-          <a:noFill/>
-          <a:ln/>
-        </p:spPr>
-        <p:txBody>
-          <a:bodyPr wrap="square" rtlCol="0" anchor="ctr"/>
-          <a:lstStyle/>
-          <a:p>
-            <a:pPr indent="0" marL="0">
-              <a:buNone/>
-            </a:pPr>
-            <a:r>
-              <a:rPr lang="en-US" sz="1200" b="1" dirty="0">
+            <a:off x="6441948" y="1389888"/>
+            <a:ext cx="1874520" cy="347472"/>
+          </a:xfrm>
+          <a:prstGeom prst="rect">
+            <a:avLst/>
+          </a:prstGeom>
+          <a:noFill/>
+          <a:ln/>
+        </p:spPr>
+        <p:txBody>
+          <a:bodyPr wrap="square" rtlCol="0" anchor="ctr"/>
+          <a:lstStyle/>
+          <a:p>
+            <a:pPr indent="0" marL="0">
+              <a:buNone/>
+            </a:pPr>
+            <a:r>
+              <a:rPr lang="en-US" sz="950" b="1" dirty="0">
                 <a:solidFill>
                   <a:srgbClr val="991B1B"/>
                 </a:solidFill>
@@ -4390,7 +4390,7 @@
               </a:rPr>
               <a:t>CloudFront Serving Cache Misses (X-Cache: Miss)</a:t>
             </a:r>
-            <a:endParaRPr lang="en-US" sz="1200" dirty="0"/>
+            <a:endParaRPr lang="en-US" sz="950" dirty="0"/>
           </a:p>
         </p:txBody>
       </p:sp>
@@ -4402,24 +4402,24 @@
         </p:nvSpPr>
         <p:spPr>
           <a:xfrm>
-            <a:off x="8321040" y="2011680"/>
-            <a:ext cx="2971800" cy="1828800"/>
-          </a:xfrm>
-          <a:prstGeom prst="rect">
-            <a:avLst/>
-          </a:prstGeom>
-          <a:noFill/>
-          <a:ln/>
-        </p:spPr>
-        <p:txBody>
-          <a:bodyPr wrap="square" rtlCol="0" anchor="ctr"/>
-          <a:lstStyle/>
-          <a:p>
-            <a:pPr indent="0" marL="0">
-              <a:buNone/>
-            </a:pPr>
-            <a:r>
-              <a:rPr lang="en-US" sz="1000" dirty="0">
+            <a:off x="6121908" y="1828800"/>
+            <a:ext cx="2148840" cy="1188720"/>
+          </a:xfrm>
+          <a:prstGeom prst="rect">
+            <a:avLst/>
+          </a:prstGeom>
+          <a:noFill/>
+          <a:ln/>
+        </p:spPr>
+        <p:txBody>
+          <a:bodyPr wrap="square" rtlCol="0" anchor="ctr"/>
+          <a:lstStyle/>
+          <a:p>
+            <a:pPr indent="0" marL="0">
+              <a:buNone/>
+            </a:pPr>
+            <a:r>
+              <a:rPr lang="en-US" sz="850" dirty="0">
                 <a:solidFill>
                   <a:srgbClr val="334155"/>
                 </a:solidFill>
@@ -4429,14 +4429,14 @@
               </a:rPr>
               <a:t>Root Cause:</a:t>
             </a:r>
-            <a:endParaRPr lang="en-US" sz="1000" dirty="0"/>
-          </a:p>
-          <a:p>
-            <a:pPr indent="0" marL="0">
-              <a:buNone/>
-            </a:pPr>
-            <a:r>
-              <a:rPr lang="en-US" sz="1000" dirty="0">
+            <a:endParaRPr lang="en-US" sz="850" dirty="0"/>
+          </a:p>
+          <a:p>
+            <a:pPr indent="0" marL="0">
+              <a:buNone/>
+            </a:pPr>
+            <a:r>
+              <a:rPr lang="en-US" sz="850" dirty="0">
                 <a:solidFill>
                   <a:srgbClr val="334155"/>
                 </a:solidFill>
@@ -4446,7 +4446,7 @@
               </a:rPr>
               <a:t>Distribution caching configuration was set to CachingDisabled policy during early debugging, preventing edge cache storage.</a:t>
             </a:r>
-            <a:endParaRPr lang="en-US" sz="1000" dirty="0"/>
+            <a:endParaRPr lang="en-US" sz="850" dirty="0"/>
           </a:p>
         </p:txBody>
       </p:sp>
@@ -4458,24 +4458,24 @@
         </p:nvSpPr>
         <p:spPr>
           <a:xfrm>
-            <a:off x="8321040" y="3931920"/>
-            <a:ext cx="2971800" cy="1828800"/>
-          </a:xfrm>
-          <a:prstGeom prst="rect">
-            <a:avLst/>
-          </a:prstGeom>
-          <a:noFill/>
-          <a:ln/>
-        </p:spPr>
-        <p:txBody>
-          <a:bodyPr wrap="square" rtlCol="0" anchor="ctr"/>
-          <a:lstStyle/>
-          <a:p>
-            <a:pPr indent="0" marL="0">
-              <a:buNone/>
-            </a:pPr>
-            <a:r>
-              <a:rPr lang="en-US" sz="1000" b="1" dirty="0">
+            <a:off x="6121908" y="3108960"/>
+            <a:ext cx="2148840" cy="1188720"/>
+          </a:xfrm>
+          <a:prstGeom prst="rect">
+            <a:avLst/>
+          </a:prstGeom>
+          <a:noFill/>
+          <a:ln/>
+        </p:spPr>
+        <p:txBody>
+          <a:bodyPr wrap="square" rtlCol="0" anchor="ctr"/>
+          <a:lstStyle/>
+          <a:p>
+            <a:pPr indent="0" marL="0">
+              <a:buNone/>
+            </a:pPr>
+            <a:r>
+              <a:rPr lang="en-US" sz="850" b="1" dirty="0">
                 <a:solidFill>
                   <a:srgbClr val="166534"/>
                 </a:solidFill>
@@ -4485,14 +4485,14 @@
               </a:rPr>
               <a:t>Resolution:</a:t>
             </a:r>
-            <a:endParaRPr lang="en-US" sz="1000" dirty="0"/>
-          </a:p>
-          <a:p>
-            <a:pPr indent="0" marL="0">
-              <a:buNone/>
-            </a:pPr>
-            <a:r>
-              <a:rPr lang="en-US" sz="1000" b="1" dirty="0">
+            <a:endParaRPr lang="en-US" sz="850" dirty="0"/>
+          </a:p>
+          <a:p>
+            <a:pPr indent="0" marL="0">
+              <a:buNone/>
+            </a:pPr>
+            <a:r>
+              <a:rPr lang="en-US" sz="850" b="1" dirty="0">
                 <a:solidFill>
                   <a:srgbClr val="166534"/>
                 </a:solidFill>
@@ -4502,7 +4502,7 @@
               </a:rPr>
               <a:t>Adjusted default TTL and verified caching behaviors to ensure static assets store on CloudFront edge locations, while dynamic ALB bypasses.</a:t>
             </a:r>
-            <a:endParaRPr lang="en-US" sz="1000" dirty="0"/>
+            <a:endParaRPr lang="en-US" sz="850" dirty="0"/>
           </a:p>
         </p:txBody>
       </p:sp>
@@ -4547,23 +4547,23 @@
         <p:spPr>
           <a:xfrm>
             <a:off x="731520" y="365760"/>
-            <a:ext cx="10515600" cy="640080"/>
-          </a:xfrm>
-          <a:prstGeom prst="rect">
-            <a:avLst/>
-          </a:prstGeom>
-          <a:noFill/>
-          <a:ln/>
-        </p:spPr>
-        <p:txBody>
-          <a:bodyPr wrap="square" rtlCol="0" anchor="ctr"/>
-          <a:lstStyle/>
-          <a:p>
-            <a:pPr indent="0" marL="0">
-              <a:buNone/>
-            </a:pPr>
-            <a:r>
-              <a:rPr lang="en-US" sz="2800" b="1" dirty="0">
+            <a:ext cx="7680960" cy="548640"/>
+          </a:xfrm>
+          <a:prstGeom prst="rect">
+            <a:avLst/>
+          </a:prstGeom>
+          <a:noFill/>
+          <a:ln/>
+        </p:spPr>
+        <p:txBody>
+          <a:bodyPr wrap="square" rtlCol="0" anchor="ctr"/>
+          <a:lstStyle/>
+          <a:p>
+            <a:pPr indent="0" marL="0">
+              <a:buNone/>
+            </a:pPr>
+            <a:r>
+              <a:rPr lang="en-US" sz="2400" b="1" dirty="0">
                 <a:solidFill>
                   <a:srgbClr val="1E3A8A"/>
                 </a:solidFill>
@@ -4573,7 +4573,7 @@
               </a:rPr>
               <a:t>Lessons &amp; Future Enhancements</a:t>
             </a:r>
-            <a:endParaRPr lang="en-US" sz="2800" dirty="0"/>
+            <a:endParaRPr lang="en-US" sz="2400" dirty="0"/>
           </a:p>
         </p:txBody>
       </p:sp>
@@ -4585,8 +4585,8 @@
         </p:nvSpPr>
         <p:spPr>
           <a:xfrm>
-            <a:off x="731520" y="1051560"/>
-            <a:ext cx="1371600" cy="45720"/>
+            <a:off x="731520" y="914400"/>
+            <a:ext cx="1371600" cy="36576"/>
           </a:xfrm>
           <a:prstGeom prst="rect">
             <a:avLst/>
@@ -4610,7 +4610,7 @@
         </p:nvSpPr>
         <p:spPr>
           <a:xfrm>
-            <a:off x="731520" y="6400800"/>
+            <a:off x="731520" y="4709160"/>
             <a:ext cx="6400800" cy="274320"/>
           </a:xfrm>
           <a:prstGeom prst="rect">
@@ -4627,7 +4627,7 @@
               <a:buNone/>
             </a:pPr>
             <a:r>
-              <a:rPr lang="en-US" sz="900" dirty="0">
+              <a:rPr lang="en-US" sz="850" dirty="0">
                 <a:solidFill>
                   <a:srgbClr val="94A3B8"/>
                 </a:solidFill>
@@ -4637,7 +4637,7 @@
               </a:rPr>
               <a:t>AWS DevOps Capstone Project  |  Student Study Planner</a:t>
             </a:r>
-            <a:endParaRPr lang="en-US" sz="900" dirty="0"/>
+            <a:endParaRPr lang="en-US" sz="850" dirty="0"/>
           </a:p>
         </p:txBody>
       </p:sp>
@@ -4649,7 +4649,7 @@
         </p:nvSpPr>
         <p:spPr>
           <a:xfrm>
-            <a:off x="10515600" y="6400800"/>
+            <a:off x="7498080" y="4709160"/>
             <a:ext cx="914400" cy="274320"/>
           </a:xfrm>
           <a:prstGeom prst="rect">
@@ -4666,7 +4666,7 @@
               <a:buNone/>
             </a:pPr>
             <a:r>
-              <a:rPr lang="en-US" sz="900" dirty="0">
+              <a:rPr lang="en-US" sz="850" dirty="0">
                 <a:solidFill>
                   <a:srgbClr val="94A3B8"/>
                 </a:solidFill>
@@ -4676,7 +4676,7 @@
               </a:rPr>
               <a:t>{slide_num} / {slide_num}</a:t>
             </a:r>
-            <a:endParaRPr lang="en-US" sz="900" dirty="0"/>
+            <a:endParaRPr lang="en-US" sz="850" dirty="0"/>
           </a:p>
         </p:txBody>
       </p:sp>
@@ -4688,8 +4688,8 @@
         </p:nvSpPr>
         <p:spPr>
           <a:xfrm>
-            <a:off x="731520" y="1371600"/>
-            <a:ext cx="5120640" cy="4572000"/>
+            <a:off x="731520" y="1188720"/>
+            <a:ext cx="3657600" cy="3291840"/>
           </a:xfrm>
           <a:prstGeom prst="rect">
             <a:avLst/>
@@ -4713,24 +4713,24 @@
         </p:nvSpPr>
         <p:spPr>
           <a:xfrm>
-            <a:off x="1005840" y="1554480"/>
-            <a:ext cx="4572000" cy="365760"/>
-          </a:xfrm>
-          <a:prstGeom prst="rect">
-            <a:avLst/>
-          </a:prstGeom>
-          <a:noFill/>
-          <a:ln/>
-        </p:spPr>
-        <p:txBody>
-          <a:bodyPr wrap="square" rtlCol="0" anchor="ctr"/>
-          <a:lstStyle/>
-          <a:p>
-            <a:pPr indent="0" marL="0">
-              <a:buNone/>
-            </a:pPr>
-            <a:r>
-              <a:rPr lang="en-US" sz="1800" b="1" dirty="0">
+            <a:off x="914400" y="1325880"/>
+            <a:ext cx="3291840" cy="274320"/>
+          </a:xfrm>
+          <a:prstGeom prst="rect">
+            <a:avLst/>
+          </a:prstGeom>
+          <a:noFill/>
+          <a:ln/>
+        </p:spPr>
+        <p:txBody>
+          <a:bodyPr wrap="square" rtlCol="0" anchor="ctr"/>
+          <a:lstStyle/>
+          <a:p>
+            <a:pPr indent="0" marL="0">
+              <a:buNone/>
+            </a:pPr>
+            <a:r>
+              <a:rPr lang="en-US" sz="1400" b="1" dirty="0">
                 <a:solidFill>
                   <a:srgbClr val="1E3A8A"/>
                 </a:solidFill>
@@ -4740,7 +4740,7 @@
               </a:rPr>
               <a:t>WHAT WORKED WELL</a:t>
             </a:r>
-            <a:endParaRPr lang="en-US" sz="1800" dirty="0"/>
+            <a:endParaRPr lang="en-US" sz="1400" dirty="0"/>
           </a:p>
         </p:txBody>
       </p:sp>
@@ -4752,8 +4752,8 @@
         </p:nvSpPr>
         <p:spPr>
           <a:xfrm>
-            <a:off x="1005840" y="2103120"/>
-            <a:ext cx="91440" cy="91440"/>
+            <a:off x="914400" y="1783080"/>
+            <a:ext cx="73152" cy="73152"/>
           </a:xfrm>
           <a:prstGeom prst="rect">
             <a:avLst/>
@@ -4777,24 +4777,24 @@
         </p:nvSpPr>
         <p:spPr>
           <a:xfrm>
-            <a:off x="1188720" y="2011680"/>
-            <a:ext cx="4389120" cy="1188720"/>
-          </a:xfrm>
-          <a:prstGeom prst="rect">
-            <a:avLst/>
-          </a:prstGeom>
-          <a:noFill/>
-          <a:ln/>
-        </p:spPr>
-        <p:txBody>
-          <a:bodyPr wrap="square" rtlCol="0" anchor="ctr"/>
-          <a:lstStyle/>
-          <a:p>
-            <a:pPr indent="0" marL="0">
-              <a:buNone/>
-            </a:pPr>
-            <a:r>
-              <a:rPr lang="en-US" sz="1250" dirty="0">
+            <a:off x="1051560" y="1691640"/>
+            <a:ext cx="3154680" cy="868680"/>
+          </a:xfrm>
+          <a:prstGeom prst="rect">
+            <a:avLst/>
+          </a:prstGeom>
+          <a:noFill/>
+          <a:ln/>
+        </p:spPr>
+        <p:txBody>
+          <a:bodyPr wrap="square" rtlCol="0" anchor="ctr"/>
+          <a:lstStyle/>
+          <a:p>
+            <a:pPr indent="0" marL="0">
+              <a:buNone/>
+            </a:pPr>
+            <a:r>
+              <a:rPr lang="en-US" sz="1000" dirty="0">
                 <a:solidFill>
                   <a:srgbClr val="334155"/>
                 </a:solidFill>
@@ -4804,7 +4804,7 @@
               </a:rPr>
               <a:t>Layered AWS Architecture: Decoupling CDN, Application Load Balancer, and ASG compute nodes protected backend EC2 IPs and isolated layer configurations.</a:t>
             </a:r>
-            <a:endParaRPr lang="en-US" sz="1250" dirty="0"/>
+            <a:endParaRPr lang="en-US" sz="1000" dirty="0"/>
           </a:p>
         </p:txBody>
       </p:sp>
@@ -4816,8 +4816,8 @@
         </p:nvSpPr>
         <p:spPr>
           <a:xfrm>
-            <a:off x="1005840" y="3474720"/>
-            <a:ext cx="91440" cy="91440"/>
+            <a:off x="914400" y="2697480"/>
+            <a:ext cx="73152" cy="73152"/>
           </a:xfrm>
           <a:prstGeom prst="rect">
             <a:avLst/>
@@ -4841,24 +4841,24 @@
         </p:nvSpPr>
         <p:spPr>
           <a:xfrm>
-            <a:off x="1188720" y="3383280"/>
-            <a:ext cx="4389120" cy="1188720"/>
-          </a:xfrm>
-          <a:prstGeom prst="rect">
-            <a:avLst/>
-          </a:prstGeom>
-          <a:noFill/>
-          <a:ln/>
-        </p:spPr>
-        <p:txBody>
-          <a:bodyPr wrap="square" rtlCol="0" anchor="ctr"/>
-          <a:lstStyle/>
-          <a:p>
-            <a:pPr indent="0" marL="0">
-              <a:buNone/>
-            </a:pPr>
-            <a:r>
-              <a:rPr lang="en-US" sz="1250" dirty="0">
+            <a:off x="1051560" y="2606040"/>
+            <a:ext cx="3154680" cy="868680"/>
+          </a:xfrm>
+          <a:prstGeom prst="rect">
+            <a:avLst/>
+          </a:prstGeom>
+          <a:noFill/>
+          <a:ln/>
+        </p:spPr>
+        <p:txBody>
+          <a:bodyPr wrap="square" rtlCol="0" anchor="ctr"/>
+          <a:lstStyle/>
+          <a:p>
+            <a:pPr indent="0" marL="0">
+              <a:buNone/>
+            </a:pPr>
+            <a:r>
+              <a:rPr lang="en-US" sz="1000" dirty="0">
                 <a:solidFill>
                   <a:srgbClr val="334155"/>
                 </a:solidFill>
@@ -4868,7 +4868,7 @@
               </a:rPr>
               <a:t>Active Observability &amp; Budget Guardrails: Budget alerting at $0.01 threshold gave our team high confidence to experiment without worrying about runaway AWS fees.</a:t>
             </a:r>
-            <a:endParaRPr lang="en-US" sz="1250" dirty="0"/>
+            <a:endParaRPr lang="en-US" sz="1000" dirty="0"/>
           </a:p>
         </p:txBody>
       </p:sp>
@@ -4880,8 +4880,8 @@
         </p:nvSpPr>
         <p:spPr>
           <a:xfrm>
-            <a:off x="1005840" y="4846320"/>
-            <a:ext cx="91440" cy="91440"/>
+            <a:off x="914400" y="3611880"/>
+            <a:ext cx="73152" cy="73152"/>
           </a:xfrm>
           <a:prstGeom prst="rect">
             <a:avLst/>
@@ -4905,24 +4905,24 @@
         </p:nvSpPr>
         <p:spPr>
           <a:xfrm>
-            <a:off x="1188720" y="4754880"/>
-            <a:ext cx="4389120" cy="1188720"/>
-          </a:xfrm>
-          <a:prstGeom prst="rect">
-            <a:avLst/>
-          </a:prstGeom>
-          <a:noFill/>
-          <a:ln/>
-        </p:spPr>
-        <p:txBody>
-          <a:bodyPr wrap="square" rtlCol="0" anchor="ctr"/>
-          <a:lstStyle/>
-          <a:p>
-            <a:pPr indent="0" marL="0">
-              <a:buNone/>
-            </a:pPr>
-            <a:r>
-              <a:rPr lang="en-US" sz="1250" dirty="0">
+            <a:off x="1051560" y="3520440"/>
+            <a:ext cx="3154680" cy="868680"/>
+          </a:xfrm>
+          <a:prstGeom prst="rect">
+            <a:avLst/>
+          </a:prstGeom>
+          <a:noFill/>
+          <a:ln/>
+        </p:spPr>
+        <p:txBody>
+          <a:bodyPr wrap="square" rtlCol="0" anchor="ctr"/>
+          <a:lstStyle/>
+          <a:p>
+            <a:pPr indent="0" marL="0">
+              <a:buNone/>
+            </a:pPr>
+            <a:r>
+              <a:rPr lang="en-US" sz="1000" dirty="0">
                 <a:solidFill>
                   <a:srgbClr val="334155"/>
                 </a:solidFill>
@@ -4932,7 +4932,7 @@
               </a:rPr>
               <a:t>CI/CD Pipeline Integration: GitHub Actions workflow automation successfully reduced code update deployment times from 5 minutes to under 30 seconds.</a:t>
             </a:r>
-            <a:endParaRPr lang="en-US" sz="1250" dirty="0"/>
+            <a:endParaRPr lang="en-US" sz="1000" dirty="0"/>
           </a:p>
         </p:txBody>
       </p:sp>
@@ -4944,8 +4944,8 @@
         </p:nvSpPr>
         <p:spPr>
           <a:xfrm>
-            <a:off x="6309360" y="1371600"/>
-            <a:ext cx="5120640" cy="4572000"/>
+            <a:off x="4754880" y="1188720"/>
+            <a:ext cx="3657600" cy="3291840"/>
           </a:xfrm>
           <a:prstGeom prst="rect">
             <a:avLst/>
@@ -4969,24 +4969,24 @@
         </p:nvSpPr>
         <p:spPr>
           <a:xfrm>
-            <a:off x="6583680" y="1554480"/>
-            <a:ext cx="4572000" cy="365760"/>
-          </a:xfrm>
-          <a:prstGeom prst="rect">
-            <a:avLst/>
-          </a:prstGeom>
-          <a:noFill/>
-          <a:ln/>
-        </p:spPr>
-        <p:txBody>
-          <a:bodyPr wrap="square" rtlCol="0" anchor="ctr"/>
-          <a:lstStyle/>
-          <a:p>
-            <a:pPr indent="0" marL="0">
-              <a:buNone/>
-            </a:pPr>
-            <a:r>
-              <a:rPr lang="en-US" sz="1800" b="1" dirty="0">
+            <a:off x="4937760" y="1325880"/>
+            <a:ext cx="3291840" cy="274320"/>
+          </a:xfrm>
+          <a:prstGeom prst="rect">
+            <a:avLst/>
+          </a:prstGeom>
+          <a:noFill/>
+          <a:ln/>
+        </p:spPr>
+        <p:txBody>
+          <a:bodyPr wrap="square" rtlCol="0" anchor="ctr"/>
+          <a:lstStyle/>
+          <a:p>
+            <a:pPr indent="0" marL="0">
+              <a:buNone/>
+            </a:pPr>
+            <a:r>
+              <a:rPr lang="en-US" sz="1400" b="1" dirty="0">
                 <a:solidFill>
                   <a:srgbClr val="1E3A8A"/>
                 </a:solidFill>
@@ -4996,7 +4996,7 @@
               </a:rPr>
               <a:t>WHAT WE WOULD DO DIFFERENTLY</a:t>
             </a:r>
-            <a:endParaRPr lang="en-US" sz="1800" dirty="0"/>
+            <a:endParaRPr lang="en-US" sz="1400" dirty="0"/>
           </a:p>
         </p:txBody>
       </p:sp>
@@ -5008,8 +5008,8 @@
         </p:nvSpPr>
         <p:spPr>
           <a:xfrm>
-            <a:off x="6583680" y="2103120"/>
-            <a:ext cx="91440" cy="91440"/>
+            <a:off x="4937760" y="1783080"/>
+            <a:ext cx="73152" cy="73152"/>
           </a:xfrm>
           <a:prstGeom prst="rect">
             <a:avLst/>
@@ -5033,24 +5033,24 @@
         </p:nvSpPr>
         <p:spPr>
           <a:xfrm>
-            <a:off x="6766560" y="2011680"/>
-            <a:ext cx="4389120" cy="1188720"/>
-          </a:xfrm>
-          <a:prstGeom prst="rect">
-            <a:avLst/>
-          </a:prstGeom>
-          <a:noFill/>
-          <a:ln/>
-        </p:spPr>
-        <p:txBody>
-          <a:bodyPr wrap="square" rtlCol="0" anchor="ctr"/>
-          <a:lstStyle/>
-          <a:p>
-            <a:pPr indent="0" marL="0">
-              <a:buNone/>
-            </a:pPr>
-            <a:r>
-              <a:rPr lang="en-US" sz="1250" dirty="0">
+            <a:off x="5074920" y="1691640"/>
+            <a:ext cx="3154680" cy="868680"/>
+          </a:xfrm>
+          <a:prstGeom prst="rect">
+            <a:avLst/>
+          </a:prstGeom>
+          <a:noFill/>
+          <a:ln/>
+        </p:spPr>
+        <p:txBody>
+          <a:bodyPr wrap="square" rtlCol="0" anchor="ctr"/>
+          <a:lstStyle/>
+          <a:p>
+            <a:pPr indent="0" marL="0">
+              <a:buNone/>
+            </a:pPr>
+            <a:r>
+              <a:rPr lang="en-US" sz="1000" dirty="0">
                 <a:solidFill>
                   <a:srgbClr val="334155"/>
                 </a:solidFill>
@@ -5060,7 +5060,7 @@
               </a:rPr>
               <a:t>Infrastructure as Code (IaC): Transition from Console clicks to writing reusable and versioned Terraform or CloudFormation modules to spawn infrastructures.</a:t>
             </a:r>
-            <a:endParaRPr lang="en-US" sz="1250" dirty="0"/>
+            <a:endParaRPr lang="en-US" sz="1000" dirty="0"/>
           </a:p>
         </p:txBody>
       </p:sp>
@@ -5072,8 +5072,8 @@
         </p:nvSpPr>
         <p:spPr>
           <a:xfrm>
-            <a:off x="6583680" y="3474720"/>
-            <a:ext cx="91440" cy="91440"/>
+            <a:off x="4937760" y="2697480"/>
+            <a:ext cx="73152" cy="73152"/>
           </a:xfrm>
           <a:prstGeom prst="rect">
             <a:avLst/>
@@ -5097,24 +5097,24 @@
         </p:nvSpPr>
         <p:spPr>
           <a:xfrm>
-            <a:off x="6766560" y="3383280"/>
-            <a:ext cx="4389120" cy="1188720"/>
-          </a:xfrm>
-          <a:prstGeom prst="rect">
-            <a:avLst/>
-          </a:prstGeom>
-          <a:noFill/>
-          <a:ln/>
-        </p:spPr>
-        <p:txBody>
-          <a:bodyPr wrap="square" rtlCol="0" anchor="ctr"/>
-          <a:lstStyle/>
-          <a:p>
-            <a:pPr indent="0" marL="0">
-              <a:buNone/>
-            </a:pPr>
-            <a:r>
-              <a:rPr lang="en-US" sz="1250" dirty="0">
+            <a:off x="5074920" y="2606040"/>
+            <a:ext cx="3154680" cy="868680"/>
+          </a:xfrm>
+          <a:prstGeom prst="rect">
+            <a:avLst/>
+          </a:prstGeom>
+          <a:noFill/>
+          <a:ln/>
+        </p:spPr>
+        <p:txBody>
+          <a:bodyPr wrap="square" rtlCol="0" anchor="ctr"/>
+          <a:lstStyle/>
+          <a:p>
+            <a:pPr indent="0" marL="0">
+              <a:buNone/>
+            </a:pPr>
+            <a:r>
+              <a:rPr lang="en-US" sz="1000" dirty="0">
                 <a:solidFill>
                   <a:srgbClr val="334155"/>
                 </a:solidFill>
@@ -5124,7 +5124,7 @@
               </a:rPr>
               <a:t>Containerization &amp; Serverless: Host static app code files on S3 buckets or run compute nodes as AWS ECS Fargate tasks to completely avoid VM server maintenance.</a:t>
             </a:r>
-            <a:endParaRPr lang="en-US" sz="1250" dirty="0"/>
+            <a:endParaRPr lang="en-US" sz="1000" dirty="0"/>
           </a:p>
         </p:txBody>
       </p:sp>
@@ -5136,8 +5136,8 @@
         </p:nvSpPr>
         <p:spPr>
           <a:xfrm>
-            <a:off x="6583680" y="4846320"/>
-            <a:ext cx="91440" cy="91440"/>
+            <a:off x="4937760" y="3611880"/>
+            <a:ext cx="73152" cy="73152"/>
           </a:xfrm>
           <a:prstGeom prst="rect">
             <a:avLst/>
@@ -5161,24 +5161,24 @@
         </p:nvSpPr>
         <p:spPr>
           <a:xfrm>
-            <a:off x="6766560" y="4754880"/>
-            <a:ext cx="4389120" cy="1188720"/>
-          </a:xfrm>
-          <a:prstGeom prst="rect">
-            <a:avLst/>
-          </a:prstGeom>
-          <a:noFill/>
-          <a:ln/>
-        </p:spPr>
-        <p:txBody>
-          <a:bodyPr wrap="square" rtlCol="0" anchor="ctr"/>
-          <a:lstStyle/>
-          <a:p>
-            <a:pPr indent="0" marL="0">
-              <a:buNone/>
-            </a:pPr>
-            <a:r>
-              <a:rPr lang="en-US" sz="1250" dirty="0">
+            <a:off x="5074920" y="3520440"/>
+            <a:ext cx="3154680" cy="868680"/>
+          </a:xfrm>
+          <a:prstGeom prst="rect">
+            <a:avLst/>
+          </a:prstGeom>
+          <a:noFill/>
+          <a:ln/>
+        </p:spPr>
+        <p:txBody>
+          <a:bodyPr wrap="square" rtlCol="0" anchor="ctr"/>
+          <a:lstStyle/>
+          <a:p>
+            <a:pPr indent="0" marL="0">
+              <a:buNone/>
+            </a:pPr>
+            <a:r>
+              <a:rPr lang="en-US" sz="1000" dirty="0">
                 <a:solidFill>
                   <a:srgbClr val="334155"/>
                 </a:solidFill>
@@ -5188,7 +5188,7 @@
               </a:rPr>
               <a:t>RDS Persistent Backend: Connect RDS (PostgreSQL) or DynamoDB tables to synchronize study planner tasks, replacing browser-isolated localStorage.</a:t>
             </a:r>
-            <a:endParaRPr lang="en-US" sz="1250" dirty="0"/>
+            <a:endParaRPr lang="en-US" sz="1000" dirty="0"/>
           </a:p>
         </p:txBody>
       </p:sp>
@@ -5232,8 +5232,8 @@
         </p:nvSpPr>
         <p:spPr>
           <a:xfrm>
-            <a:off x="914400" y="1828800"/>
-            <a:ext cx="10360152" cy="914400"/>
+            <a:off x="457200" y="1371600"/>
+            <a:ext cx="8229600" cy="731520"/>
           </a:xfrm>
           <a:prstGeom prst="rect">
             <a:avLst/>
@@ -5249,7 +5249,7 @@
               <a:buNone/>
             </a:pPr>
             <a:r>
-              <a:rPr lang="en-US" sz="4400" b="1" dirty="0">
+              <a:rPr lang="en-US" sz="3600" b="1" dirty="0">
                 <a:solidFill>
                   <a:srgbClr val="0EA5E9"/>
                 </a:solidFill>
@@ -5259,7 +5259,7 @@
               </a:rPr>
               <a:t>THANK YOU!</a:t>
             </a:r>
-            <a:endParaRPr lang="en-US" sz="4400" dirty="0"/>
+            <a:endParaRPr lang="en-US" sz="3600" dirty="0"/>
           </a:p>
         </p:txBody>
       </p:sp>
@@ -5271,8 +5271,8 @@
         </p:nvSpPr>
         <p:spPr>
           <a:xfrm>
-            <a:off x="914400" y="2743200"/>
-            <a:ext cx="10360152" cy="548640"/>
+            <a:off x="457200" y="2103120"/>
+            <a:ext cx="8229600" cy="457200"/>
           </a:xfrm>
           <a:prstGeom prst="rect">
             <a:avLst/>
@@ -5288,7 +5288,7 @@
               <a:buNone/>
             </a:pPr>
             <a:r>
-              <a:rPr lang="en-US" sz="2000" dirty="0">
+              <a:rPr lang="en-US" sz="1800" dirty="0">
                 <a:solidFill>
                   <a:srgbClr val="FFFFFF"/>
                 </a:solidFill>
@@ -5298,7 +5298,7 @@
               </a:rPr>
               <a:t>Questions &amp; Discussion</a:t>
             </a:r>
-            <a:endParaRPr lang="en-US" sz="2000" dirty="0"/>
+            <a:endParaRPr lang="en-US" sz="1800" dirty="0"/>
           </a:p>
         </p:txBody>
       </p:sp>
@@ -5310,8 +5310,8 @@
         </p:nvSpPr>
         <p:spPr>
           <a:xfrm>
-            <a:off x="3346704" y="3840480"/>
-            <a:ext cx="5486400" cy="1645920"/>
+            <a:off x="2286000" y="2834640"/>
+            <a:ext cx="4572000" cy="1371600"/>
           </a:xfrm>
           <a:prstGeom prst="rect">
             <a:avLst/>
@@ -5335,8 +5335,8 @@
         </p:nvSpPr>
         <p:spPr>
           <a:xfrm>
-            <a:off x="3346704" y="3931920"/>
-            <a:ext cx="5486400" cy="274320"/>
+            <a:off x="2286000" y="2926080"/>
+            <a:ext cx="4572000" cy="228600"/>
           </a:xfrm>
           <a:prstGeom prst="rect">
             <a:avLst/>
@@ -5352,7 +5352,7 @@
               <a:buNone/>
             </a:pPr>
             <a:r>
-              <a:rPr lang="en-US" sz="1100" b="1" dirty="0">
+              <a:rPr lang="en-US" sz="1000" b="1" dirty="0">
                 <a:solidFill>
                   <a:srgbClr val="0EA5E9"/>
                 </a:solidFill>
@@ -5362,7 +5362,7 @@
               </a:rPr>
               <a:t>PROJECT RESOURCES</a:t>
             </a:r>
-            <a:endParaRPr lang="en-US" sz="1100" dirty="0"/>
+            <a:endParaRPr lang="en-US" sz="1000" dirty="0"/>
           </a:p>
         </p:txBody>
       </p:sp>
@@ -5374,8 +5374,8 @@
         </p:nvSpPr>
         <p:spPr>
           <a:xfrm>
-            <a:off x="3529584" y="4251960"/>
-            <a:ext cx="5120640" cy="1097280"/>
+            <a:off x="2468880" y="3200400"/>
+            <a:ext cx="4206240" cy="914400"/>
           </a:xfrm>
           <a:prstGeom prst="rect">
             <a:avLst/>
@@ -5391,7 +5391,7 @@
               <a:buNone/>
             </a:pPr>
             <a:r>
-              <a:rPr lang="en-US" sz="1100" dirty="0">
+              <a:rPr lang="en-US" sz="950" dirty="0">
                 <a:solidFill>
                   <a:srgbClr val="FFFFFF"/>
                 </a:solidFill>
@@ -5401,14 +5401,14 @@
               </a:rPr>
               <a:t>GitHub Repository:</a:t>
             </a:r>
-            <a:endParaRPr lang="en-US" sz="1100" dirty="0"/>
+            <a:endParaRPr lang="en-US" sz="950" dirty="0"/>
           </a:p>
           <a:p>
             <a:pPr algn="ctr" indent="0" marL="0">
               <a:buNone/>
             </a:pPr>
             <a:r>
-              <a:rPr lang="en-US" sz="1100" dirty="0">
+              <a:rPr lang="en-US" sz="950" dirty="0">
                 <a:solidFill>
                   <a:srgbClr val="FFFFFF"/>
                 </a:solidFill>
@@ -5418,20 +5418,20 @@
               </a:rPr>
               <a:t>https://github.com/GeekKwame/aws-capstone-project</a:t>
             </a:r>
-            <a:endParaRPr lang="en-US" sz="1100" dirty="0"/>
+            <a:endParaRPr lang="en-US" sz="950" dirty="0"/>
           </a:p>
           <a:p>
             <a:pPr algn="ctr" indent="0" marL="0">
               <a:buNone/>
             </a:pPr>
-            <a:endParaRPr lang="en-US" sz="1100" dirty="0"/>
+            <a:endParaRPr lang="en-US" sz="950" dirty="0"/>
           </a:p>
           <a:p>
             <a:pPr algn="ctr" indent="0" marL="0">
               <a:buNone/>
             </a:pPr>
             <a:r>
-              <a:rPr lang="en-US" sz="1100" dirty="0">
+              <a:rPr lang="en-US" sz="950" dirty="0">
                 <a:solidFill>
                   <a:srgbClr val="FFFFFF"/>
                 </a:solidFill>
@@ -5441,14 +5441,14 @@
               </a:rPr>
               <a:t>Live Deployment URL:</a:t>
             </a:r>
-            <a:endParaRPr lang="en-US" sz="1100" dirty="0"/>
+            <a:endParaRPr lang="en-US" sz="950" dirty="0"/>
           </a:p>
           <a:p>
             <a:pPr algn="ctr" indent="0" marL="0">
               <a:buNone/>
             </a:pPr>
             <a:r>
-              <a:rPr lang="en-US" sz="1100" dirty="0">
+              <a:rPr lang="en-US" sz="950" dirty="0">
                 <a:solidFill>
                   <a:srgbClr val="FFFFFF"/>
                 </a:solidFill>
@@ -5458,7 +5458,7 @@
               </a:rPr>
               <a:t>https://www.studentstudyplannerxyz.xyz/</a:t>
             </a:r>
-            <a:endParaRPr lang="en-US" sz="1100" dirty="0"/>
+            <a:endParaRPr lang="en-US" sz="950" dirty="0"/>
           </a:p>
         </p:txBody>
       </p:sp>
@@ -5503,23 +5503,23 @@
         <p:spPr>
           <a:xfrm>
             <a:off x="731520" y="365760"/>
-            <a:ext cx="10515600" cy="640080"/>
-          </a:xfrm>
-          <a:prstGeom prst="rect">
-            <a:avLst/>
-          </a:prstGeom>
-          <a:noFill/>
-          <a:ln/>
-        </p:spPr>
-        <p:txBody>
-          <a:bodyPr wrap="square" rtlCol="0" anchor="ctr"/>
-          <a:lstStyle/>
-          <a:p>
-            <a:pPr indent="0" marL="0">
-              <a:buNone/>
-            </a:pPr>
-            <a:r>
-              <a:rPr lang="en-US" sz="2800" b="1" dirty="0">
+            <a:ext cx="7680960" cy="548640"/>
+          </a:xfrm>
+          <a:prstGeom prst="rect">
+            <a:avLst/>
+          </a:prstGeom>
+          <a:noFill/>
+          <a:ln/>
+        </p:spPr>
+        <p:txBody>
+          <a:bodyPr wrap="square" rtlCol="0" anchor="ctr"/>
+          <a:lstStyle/>
+          <a:p>
+            <a:pPr indent="0" marL="0">
+              <a:buNone/>
+            </a:pPr>
+            <a:r>
+              <a:rPr lang="en-US" sz="2400" b="1" dirty="0">
                 <a:solidFill>
                   <a:srgbClr val="1E3A8A"/>
                 </a:solidFill>
@@ -5529,7 +5529,7 @@
               </a:rPr>
               <a:t>Problem &amp; Solution Overview</a:t>
             </a:r>
-            <a:endParaRPr lang="en-US" sz="2800" dirty="0"/>
+            <a:endParaRPr lang="en-US" sz="2400" dirty="0"/>
           </a:p>
         </p:txBody>
       </p:sp>
@@ -5541,8 +5541,8 @@
         </p:nvSpPr>
         <p:spPr>
           <a:xfrm>
-            <a:off x="731520" y="1051560"/>
-            <a:ext cx="1371600" cy="45720"/>
+            <a:off x="731520" y="914400"/>
+            <a:ext cx="1371600" cy="36576"/>
           </a:xfrm>
           <a:prstGeom prst="rect">
             <a:avLst/>
@@ -5566,7 +5566,7 @@
         </p:nvSpPr>
         <p:spPr>
           <a:xfrm>
-            <a:off x="731520" y="6400800"/>
+            <a:off x="731520" y="4709160"/>
             <a:ext cx="6400800" cy="274320"/>
           </a:xfrm>
           <a:prstGeom prst="rect">
@@ -5583,7 +5583,7 @@
               <a:buNone/>
             </a:pPr>
             <a:r>
-              <a:rPr lang="en-US" sz="900" dirty="0">
+              <a:rPr lang="en-US" sz="850" dirty="0">
                 <a:solidFill>
                   <a:srgbClr val="94A3B8"/>
                 </a:solidFill>
@@ -5593,7 +5593,7 @@
               </a:rPr>
               <a:t>AWS DevOps Capstone Project  |  Student Study Planner</a:t>
             </a:r>
-            <a:endParaRPr lang="en-US" sz="900" dirty="0"/>
+            <a:endParaRPr lang="en-US" sz="850" dirty="0"/>
           </a:p>
         </p:txBody>
       </p:sp>
@@ -5605,7 +5605,7 @@
         </p:nvSpPr>
         <p:spPr>
           <a:xfrm>
-            <a:off x="10515600" y="6400800"/>
+            <a:off x="7498080" y="4709160"/>
             <a:ext cx="914400" cy="274320"/>
           </a:xfrm>
           <a:prstGeom prst="rect">
@@ -5622,7 +5622,7 @@
               <a:buNone/>
             </a:pPr>
             <a:r>
-              <a:rPr lang="en-US" sz="900" dirty="0">
+              <a:rPr lang="en-US" sz="850" dirty="0">
                 <a:solidFill>
                   <a:srgbClr val="94A3B8"/>
                 </a:solidFill>
@@ -5632,7 +5632,7 @@
               </a:rPr>
               <a:t>{slide_num} / {slide_num}</a:t>
             </a:r>
-            <a:endParaRPr lang="en-US" sz="900" dirty="0"/>
+            <a:endParaRPr lang="en-US" sz="850" dirty="0"/>
           </a:p>
         </p:txBody>
       </p:sp>
@@ -5644,8 +5644,8 @@
         </p:nvSpPr>
         <p:spPr>
           <a:xfrm>
-            <a:off x="731520" y="1371600"/>
-            <a:ext cx="5120640" cy="4572000"/>
+            <a:off x="731520" y="1188720"/>
+            <a:ext cx="3657600" cy="3291840"/>
           </a:xfrm>
           <a:prstGeom prst="rect">
             <a:avLst/>
@@ -5669,24 +5669,24 @@
         </p:nvSpPr>
         <p:spPr>
           <a:xfrm>
-            <a:off x="1005840" y="1554480"/>
-            <a:ext cx="4572000" cy="365760"/>
-          </a:xfrm>
-          <a:prstGeom prst="rect">
-            <a:avLst/>
-          </a:prstGeom>
-          <a:noFill/>
-          <a:ln/>
-        </p:spPr>
-        <p:txBody>
-          <a:bodyPr wrap="square" rtlCol="0" anchor="ctr"/>
-          <a:lstStyle/>
-          <a:p>
-            <a:pPr indent="0" marL="0">
-              <a:buNone/>
-            </a:pPr>
-            <a:r>
-              <a:rPr lang="en-US" sz="1800" b="1" dirty="0">
+            <a:off x="914400" y="1325880"/>
+            <a:ext cx="3291840" cy="274320"/>
+          </a:xfrm>
+          <a:prstGeom prst="rect">
+            <a:avLst/>
+          </a:prstGeom>
+          <a:noFill/>
+          <a:ln/>
+        </p:spPr>
+        <p:txBody>
+          <a:bodyPr wrap="square" rtlCol="0" anchor="ctr"/>
+          <a:lstStyle/>
+          <a:p>
+            <a:pPr indent="0" marL="0">
+              <a:buNone/>
+            </a:pPr>
+            <a:r>
+              <a:rPr lang="en-US" sz="1400" b="1" dirty="0">
                 <a:solidFill>
                   <a:srgbClr val="991B1B"/>
                 </a:solidFill>
@@ -5696,7 +5696,7 @@
               </a:rPr>
               <a:t>THE ACADEMIC PROBLEM</a:t>
             </a:r>
-            <a:endParaRPr lang="en-US" sz="1800" dirty="0"/>
+            <a:endParaRPr lang="en-US" sz="1400" dirty="0"/>
           </a:p>
         </p:txBody>
       </p:sp>
@@ -5708,8 +5708,8 @@
         </p:nvSpPr>
         <p:spPr>
           <a:xfrm>
-            <a:off x="1005840" y="2103120"/>
-            <a:ext cx="91440" cy="91440"/>
+            <a:off x="914400" y="1783080"/>
+            <a:ext cx="73152" cy="73152"/>
           </a:xfrm>
           <a:prstGeom prst="rect">
             <a:avLst/>
@@ -5733,24 +5733,24 @@
         </p:nvSpPr>
         <p:spPr>
           <a:xfrm>
-            <a:off x="1188720" y="2011680"/>
-            <a:ext cx="4389120" cy="1005840"/>
-          </a:xfrm>
-          <a:prstGeom prst="rect">
-            <a:avLst/>
-          </a:prstGeom>
-          <a:noFill/>
-          <a:ln/>
-        </p:spPr>
-        <p:txBody>
-          <a:bodyPr wrap="square" rtlCol="0" anchor="ctr"/>
-          <a:lstStyle/>
-          <a:p>
-            <a:pPr indent="0" marL="0">
-              <a:buNone/>
-            </a:pPr>
-            <a:r>
-              <a:rPr lang="en-US" sz="1300" dirty="0">
+            <a:off x="1051560" y="1691640"/>
+            <a:ext cx="3154680" cy="777240"/>
+          </a:xfrm>
+          <a:prstGeom prst="rect">
+            <a:avLst/>
+          </a:prstGeom>
+          <a:noFill/>
+          <a:ln/>
+        </p:spPr>
+        <p:txBody>
+          <a:bodyPr wrap="square" rtlCol="0" anchor="ctr"/>
+          <a:lstStyle/>
+          <a:p>
+            <a:pPr indent="0" marL="0">
+              <a:buNone/>
+            </a:pPr>
+            <a:r>
+              <a:rPr lang="en-US" sz="1050" dirty="0">
                 <a:solidFill>
                   <a:srgbClr val="334155"/>
                 </a:solidFill>
@@ -5758,9 +5758,9 @@
                 <a:ea typeface="Segoe UI" pitchFamily="34" charset="-122"/>
                 <a:cs typeface="Segoe UI" pitchFamily="34" charset="-120"/>
               </a:rPr>
-              <a:t>Academic Overload: Students struggle to organize tasks, courses, and deadlines across multiple subjects.</a:t>
-            </a:r>
-            <a:endParaRPr lang="en-US" sz="1300" dirty="0"/>
+              <a:t>Academic Overload: Students juggle multiple courses, assignments, and study tasks without structured pathways.</a:t>
+            </a:r>
+            <a:endParaRPr lang="en-US" sz="1050" dirty="0"/>
           </a:p>
         </p:txBody>
       </p:sp>
@@ -5772,8 +5772,8 @@
         </p:nvSpPr>
         <p:spPr>
           <a:xfrm>
-            <a:off x="1005840" y="3291840"/>
-            <a:ext cx="91440" cy="91440"/>
+            <a:off x="914400" y="2651760"/>
+            <a:ext cx="73152" cy="73152"/>
           </a:xfrm>
           <a:prstGeom prst="rect">
             <a:avLst/>
@@ -5797,24 +5797,24 @@
         </p:nvSpPr>
         <p:spPr>
           <a:xfrm>
-            <a:off x="1188720" y="3200400"/>
-            <a:ext cx="4389120" cy="1005840"/>
-          </a:xfrm>
-          <a:prstGeom prst="rect">
-            <a:avLst/>
-          </a:prstGeom>
-          <a:noFill/>
-          <a:ln/>
-        </p:spPr>
-        <p:txBody>
-          <a:bodyPr wrap="square" rtlCol="0" anchor="ctr"/>
-          <a:lstStyle/>
-          <a:p>
-            <a:pPr indent="0" marL="0">
-              <a:buNone/>
-            </a:pPr>
-            <a:r>
-              <a:rPr lang="en-US" sz="1300" dirty="0">
+            <a:off x="1051560" y="2560320"/>
+            <a:ext cx="3154680" cy="777240"/>
+          </a:xfrm>
+          <a:prstGeom prst="rect">
+            <a:avLst/>
+          </a:prstGeom>
+          <a:noFill/>
+          <a:ln/>
+        </p:spPr>
+        <p:txBody>
+          <a:bodyPr wrap="square" rtlCol="0" anchor="ctr"/>
+          <a:lstStyle/>
+          <a:p>
+            <a:pPr indent="0" marL="0">
+              <a:buNone/>
+            </a:pPr>
+            <a:r>
+              <a:rPr lang="en-US" sz="1050" dirty="0">
                 <a:solidFill>
                   <a:srgbClr val="334155"/>
                 </a:solidFill>
@@ -5824,7 +5824,7 @@
               </a:rPr>
               <a:t>Generic Tool Deficit: Existing general-purpose productivity apps lack academic context (priorities, subject tags).</a:t>
             </a:r>
-            <a:endParaRPr lang="en-US" sz="1300" dirty="0"/>
+            <a:endParaRPr lang="en-US" sz="1050" dirty="0"/>
           </a:p>
         </p:txBody>
       </p:sp>
@@ -5836,8 +5836,8 @@
         </p:nvSpPr>
         <p:spPr>
           <a:xfrm>
-            <a:off x="1005840" y="4480560"/>
-            <a:ext cx="91440" cy="91440"/>
+            <a:off x="914400" y="3520440"/>
+            <a:ext cx="73152" cy="73152"/>
           </a:xfrm>
           <a:prstGeom prst="rect">
             <a:avLst/>
@@ -5861,24 +5861,24 @@
         </p:nvSpPr>
         <p:spPr>
           <a:xfrm>
-            <a:off x="1188720" y="4389120"/>
-            <a:ext cx="4389120" cy="1005840"/>
-          </a:xfrm>
-          <a:prstGeom prst="rect">
-            <a:avLst/>
-          </a:prstGeom>
-          <a:noFill/>
-          <a:ln/>
-        </p:spPr>
-        <p:txBody>
-          <a:bodyPr wrap="square" rtlCol="0" anchor="ctr"/>
-          <a:lstStyle/>
-          <a:p>
-            <a:pPr indent="0" marL="0">
-              <a:buNone/>
-            </a:pPr>
-            <a:r>
-              <a:rPr lang="en-US" sz="1300" dirty="0">
+            <a:off x="1051560" y="3429000"/>
+            <a:ext cx="3154680" cy="777240"/>
+          </a:xfrm>
+          <a:prstGeom prst="rect">
+            <a:avLst/>
+          </a:prstGeom>
+          <a:noFill/>
+          <a:ln/>
+        </p:spPr>
+        <p:txBody>
+          <a:bodyPr wrap="square" rtlCol="0" anchor="ctr"/>
+          <a:lstStyle/>
+          <a:p>
+            <a:pPr indent="0" marL="0">
+              <a:buNone/>
+            </a:pPr>
+            <a:r>
+              <a:rPr lang="en-US" sz="1050" dirty="0">
                 <a:solidFill>
                   <a:srgbClr val="334155"/>
                 </a:solidFill>
@@ -5888,7 +5888,7 @@
               </a:rPr>
               <a:t>High Friction &amp; Loss: Paper planners are easily lost; heavyweight digital tools have steep learning curves.</a:t>
             </a:r>
-            <a:endParaRPr lang="en-US" sz="1300" dirty="0"/>
+            <a:endParaRPr lang="en-US" sz="1050" dirty="0"/>
           </a:p>
         </p:txBody>
       </p:sp>
@@ -5900,8 +5900,8 @@
         </p:nvSpPr>
         <p:spPr>
           <a:xfrm>
-            <a:off x="6309360" y="1371600"/>
-            <a:ext cx="5120640" cy="4572000"/>
+            <a:off x="4754880" y="1188720"/>
+            <a:ext cx="3657600" cy="3291840"/>
           </a:xfrm>
           <a:prstGeom prst="rect">
             <a:avLst/>
@@ -5925,24 +5925,24 @@
         </p:nvSpPr>
         <p:spPr>
           <a:xfrm>
-            <a:off x="6583680" y="1554480"/>
-            <a:ext cx="4572000" cy="365760"/>
-          </a:xfrm>
-          <a:prstGeom prst="rect">
-            <a:avLst/>
-          </a:prstGeom>
-          <a:noFill/>
-          <a:ln/>
-        </p:spPr>
-        <p:txBody>
-          <a:bodyPr wrap="square" rtlCol="0" anchor="ctr"/>
-          <a:lstStyle/>
-          <a:p>
-            <a:pPr indent="0" marL="0">
-              <a:buNone/>
-            </a:pPr>
-            <a:r>
-              <a:rPr lang="en-US" sz="1800" b="1" dirty="0">
+            <a:off x="4937760" y="1325880"/>
+            <a:ext cx="3291840" cy="274320"/>
+          </a:xfrm>
+          <a:prstGeom prst="rect">
+            <a:avLst/>
+          </a:prstGeom>
+          <a:noFill/>
+          <a:ln/>
+        </p:spPr>
+        <p:txBody>
+          <a:bodyPr wrap="square" rtlCol="0" anchor="ctr"/>
+          <a:lstStyle/>
+          <a:p>
+            <a:pPr indent="0" marL="0">
+              <a:buNone/>
+            </a:pPr>
+            <a:r>
+              <a:rPr lang="en-US" sz="1400" b="1" dirty="0">
                 <a:solidFill>
                   <a:srgbClr val="166534"/>
                 </a:solidFill>
@@ -5952,7 +5952,7 @@
               </a:rPr>
               <a:t>OUR PURPOSE-BUILT SOLUTION</a:t>
             </a:r>
-            <a:endParaRPr lang="en-US" sz="1800" dirty="0"/>
+            <a:endParaRPr lang="en-US" sz="1400" dirty="0"/>
           </a:p>
         </p:txBody>
       </p:sp>
@@ -5964,8 +5964,8 @@
         </p:nvSpPr>
         <p:spPr>
           <a:xfrm>
-            <a:off x="6583680" y="2103120"/>
-            <a:ext cx="91440" cy="91440"/>
+            <a:off x="4937760" y="1783080"/>
+            <a:ext cx="73152" cy="73152"/>
           </a:xfrm>
           <a:prstGeom prst="rect">
             <a:avLst/>
@@ -5989,24 +5989,24 @@
         </p:nvSpPr>
         <p:spPr>
           <a:xfrm>
-            <a:off x="6766560" y="2011680"/>
-            <a:ext cx="4389120" cy="1005840"/>
-          </a:xfrm>
-          <a:prstGeom prst="rect">
-            <a:avLst/>
-          </a:prstGeom>
-          <a:noFill/>
-          <a:ln/>
-        </p:spPr>
-        <p:txBody>
-          <a:bodyPr wrap="square" rtlCol="0" anchor="ctr"/>
-          <a:lstStyle/>
-          <a:p>
-            <a:pPr indent="0" marL="0">
-              <a:buNone/>
-            </a:pPr>
-            <a:r>
-              <a:rPr lang="en-US" sz="1300" dirty="0">
+            <a:off x="5074920" y="1691640"/>
+            <a:ext cx="3154680" cy="777240"/>
+          </a:xfrm>
+          <a:prstGeom prst="rect">
+            <a:avLst/>
+          </a:prstGeom>
+          <a:noFill/>
+          <a:ln/>
+        </p:spPr>
+        <p:txBody>
+          <a:bodyPr wrap="square" rtlCol="0" anchor="ctr"/>
+          <a:lstStyle/>
+          <a:p>
+            <a:pPr indent="0" marL="0">
+              <a:buNone/>
+            </a:pPr>
+            <a:r>
+              <a:rPr lang="en-US" sz="1050" dirty="0">
                 <a:solidFill>
                   <a:srgbClr val="334155"/>
                 </a:solidFill>
@@ -6016,7 +6016,7 @@
               </a:rPr>
               <a:t>Frictionless Task Management: Create tasks with key academic metadata (subjects, custom priorities, due dates).</a:t>
             </a:r>
-            <a:endParaRPr lang="en-US" sz="1300" dirty="0"/>
+            <a:endParaRPr lang="en-US" sz="1050" dirty="0"/>
           </a:p>
         </p:txBody>
       </p:sp>
@@ -6028,8 +6028,8 @@
         </p:nvSpPr>
         <p:spPr>
           <a:xfrm>
-            <a:off x="6583680" y="3291840"/>
-            <a:ext cx="91440" cy="91440"/>
+            <a:off x="4937760" y="2651760"/>
+            <a:ext cx="73152" cy="73152"/>
           </a:xfrm>
           <a:prstGeom prst="rect">
             <a:avLst/>
@@ -6053,24 +6053,24 @@
         </p:nvSpPr>
         <p:spPr>
           <a:xfrm>
-            <a:off x="6766560" y="3200400"/>
-            <a:ext cx="4389120" cy="1005840"/>
-          </a:xfrm>
-          <a:prstGeom prst="rect">
-            <a:avLst/>
-          </a:prstGeom>
-          <a:noFill/>
-          <a:ln/>
-        </p:spPr>
-        <p:txBody>
-          <a:bodyPr wrap="square" rtlCol="0" anchor="ctr"/>
-          <a:lstStyle/>
-          <a:p>
-            <a:pPr indent="0" marL="0">
-              <a:buNone/>
-            </a:pPr>
-            <a:r>
-              <a:rPr lang="en-US" sz="1300" dirty="0">
+            <a:off x="5074920" y="2560320"/>
+            <a:ext cx="3154680" cy="777240"/>
+          </a:xfrm>
+          <a:prstGeom prst="rect">
+            <a:avLst/>
+          </a:prstGeom>
+          <a:noFill/>
+          <a:ln/>
+        </p:spPr>
+        <p:txBody>
+          <a:bodyPr wrap="square" rtlCol="0" anchor="ctr"/>
+          <a:lstStyle/>
+          <a:p>
+            <a:pPr indent="0" marL="0">
+              <a:buNone/>
+            </a:pPr>
+            <a:r>
+              <a:rPr lang="en-US" sz="1050" dirty="0">
                 <a:solidFill>
                   <a:srgbClr val="334155"/>
                 </a:solidFill>
@@ -6080,7 +6080,7 @@
               </a:rPr>
               <a:t>Motivating Feedback Loop: Dynamic progress bars track completions; randomized motivational quotes refresh on load.</a:t>
             </a:r>
-            <a:endParaRPr lang="en-US" sz="1300" dirty="0"/>
+            <a:endParaRPr lang="en-US" sz="1050" dirty="0"/>
           </a:p>
         </p:txBody>
       </p:sp>
@@ -6092,8 +6092,8 @@
         </p:nvSpPr>
         <p:spPr>
           <a:xfrm>
-            <a:off x="6583680" y="4480560"/>
-            <a:ext cx="91440" cy="91440"/>
+            <a:off x="4937760" y="3520440"/>
+            <a:ext cx="73152" cy="73152"/>
           </a:xfrm>
           <a:prstGeom prst="rect">
             <a:avLst/>
@@ -6117,24 +6117,24 @@
         </p:nvSpPr>
         <p:spPr>
           <a:xfrm>
-            <a:off x="6766560" y="4389120"/>
-            <a:ext cx="4389120" cy="1005840"/>
-          </a:xfrm>
-          <a:prstGeom prst="rect">
-            <a:avLst/>
-          </a:prstGeom>
-          <a:noFill/>
-          <a:ln/>
-        </p:spPr>
-        <p:txBody>
-          <a:bodyPr wrap="square" rtlCol="0" anchor="ctr"/>
-          <a:lstStyle/>
-          <a:p>
-            <a:pPr indent="0" marL="0">
-              <a:buNone/>
-            </a:pPr>
-            <a:r>
-              <a:rPr lang="en-US" sz="1300" dirty="0">
+            <a:off x="5074920" y="3429000"/>
+            <a:ext cx="3154680" cy="777240"/>
+          </a:xfrm>
+          <a:prstGeom prst="rect">
+            <a:avLst/>
+          </a:prstGeom>
+          <a:noFill/>
+          <a:ln/>
+        </p:spPr>
+        <p:txBody>
+          <a:bodyPr wrap="square" rtlCol="0" anchor="ctr"/>
+          <a:lstStyle/>
+          <a:p>
+            <a:pPr indent="0" marL="0">
+              <a:buNone/>
+            </a:pPr>
+            <a:r>
+              <a:rPr lang="en-US" sz="1050" dirty="0">
                 <a:solidFill>
                   <a:srgbClr val="334155"/>
                 </a:solidFill>
@@ -6144,7 +6144,7 @@
               </a:rPr>
               <a:t>Resilient Client State: Client-side storage (localStorage) allows full offline usage with zero load latency.</a:t>
             </a:r>
-            <a:endParaRPr lang="en-US" sz="1300" dirty="0"/>
+            <a:endParaRPr lang="en-US" sz="1050" dirty="0"/>
           </a:p>
         </p:txBody>
       </p:sp>
@@ -6189,23 +6189,23 @@
         <p:spPr>
           <a:xfrm>
             <a:off x="731520" y="365760"/>
-            <a:ext cx="10515600" cy="640080"/>
-          </a:xfrm>
-          <a:prstGeom prst="rect">
-            <a:avLst/>
-          </a:prstGeom>
-          <a:noFill/>
-          <a:ln/>
-        </p:spPr>
-        <p:txBody>
-          <a:bodyPr wrap="square" rtlCol="0" anchor="ctr"/>
-          <a:lstStyle/>
-          <a:p>
-            <a:pPr indent="0" marL="0">
-              <a:buNone/>
-            </a:pPr>
-            <a:r>
-              <a:rPr lang="en-US" sz="2800" b="1" dirty="0">
+            <a:ext cx="7680960" cy="548640"/>
+          </a:xfrm>
+          <a:prstGeom prst="rect">
+            <a:avLst/>
+          </a:prstGeom>
+          <a:noFill/>
+          <a:ln/>
+        </p:spPr>
+        <p:txBody>
+          <a:bodyPr wrap="square" rtlCol="0" anchor="ctr"/>
+          <a:lstStyle/>
+          <a:p>
+            <a:pPr indent="0" marL="0">
+              <a:buNone/>
+            </a:pPr>
+            <a:r>
+              <a:rPr lang="en-US" sz="2400" b="1" dirty="0">
                 <a:solidFill>
                   <a:srgbClr val="1E3A8A"/>
                 </a:solidFill>
@@ -6215,7 +6215,7 @@
               </a:rPr>
               <a:t>Traffic Flow: Client to Web Origin</a:t>
             </a:r>
-            <a:endParaRPr lang="en-US" sz="2800" dirty="0"/>
+            <a:endParaRPr lang="en-US" sz="2400" dirty="0"/>
           </a:p>
         </p:txBody>
       </p:sp>
@@ -6227,8 +6227,8 @@
         </p:nvSpPr>
         <p:spPr>
           <a:xfrm>
-            <a:off x="731520" y="1051560"/>
-            <a:ext cx="1371600" cy="45720"/>
+            <a:off x="731520" y="914400"/>
+            <a:ext cx="1371600" cy="36576"/>
           </a:xfrm>
           <a:prstGeom prst="rect">
             <a:avLst/>
@@ -6252,7 +6252,7 @@
         </p:nvSpPr>
         <p:spPr>
           <a:xfrm>
-            <a:off x="731520" y="6400800"/>
+            <a:off x="731520" y="4709160"/>
             <a:ext cx="6400800" cy="274320"/>
           </a:xfrm>
           <a:prstGeom prst="rect">
@@ -6269,7 +6269,7 @@
               <a:buNone/>
             </a:pPr>
             <a:r>
-              <a:rPr lang="en-US" sz="900" dirty="0">
+              <a:rPr lang="en-US" sz="850" dirty="0">
                 <a:solidFill>
                   <a:srgbClr val="94A3B8"/>
                 </a:solidFill>
@@ -6279,7 +6279,7 @@
               </a:rPr>
               <a:t>AWS DevOps Capstone Project  |  Student Study Planner</a:t>
             </a:r>
-            <a:endParaRPr lang="en-US" sz="900" dirty="0"/>
+            <a:endParaRPr lang="en-US" sz="850" dirty="0"/>
           </a:p>
         </p:txBody>
       </p:sp>
@@ -6291,7 +6291,7 @@
         </p:nvSpPr>
         <p:spPr>
           <a:xfrm>
-            <a:off x="10515600" y="6400800"/>
+            <a:off x="7498080" y="4709160"/>
             <a:ext cx="914400" cy="274320"/>
           </a:xfrm>
           <a:prstGeom prst="rect">
@@ -6308,7 +6308,7 @@
               <a:buNone/>
             </a:pPr>
             <a:r>
-              <a:rPr lang="en-US" sz="900" dirty="0">
+              <a:rPr lang="en-US" sz="850" dirty="0">
                 <a:solidFill>
                   <a:srgbClr val="94A3B8"/>
                 </a:solidFill>
@@ -6318,7 +6318,7 @@
               </a:rPr>
               <a:t>{slide_num} / {slide_num}</a:t>
             </a:r>
-            <a:endParaRPr lang="en-US" sz="900" dirty="0"/>
+            <a:endParaRPr lang="en-US" sz="850" dirty="0"/>
           </a:p>
         </p:txBody>
       </p:sp>
@@ -6330,8 +6330,8 @@
         </p:nvSpPr>
         <p:spPr>
           <a:xfrm>
-            <a:off x="731520" y="1463040"/>
-            <a:ext cx="2423160" cy="3840480"/>
+            <a:off x="822960" y="1280160"/>
+            <a:ext cx="1737360" cy="3200400"/>
           </a:xfrm>
           <a:prstGeom prst="rect">
             <a:avLst/>
@@ -6355,8 +6355,8 @@
         </p:nvSpPr>
         <p:spPr>
           <a:xfrm>
-            <a:off x="1737360" y="1737360"/>
-            <a:ext cx="411480" cy="411480"/>
+            <a:off x="1508760" y="1463040"/>
+            <a:ext cx="365760" cy="365760"/>
           </a:xfrm>
           <a:prstGeom prst="oval">
             <a:avLst/>
@@ -6380,8 +6380,8 @@
         </p:nvSpPr>
         <p:spPr>
           <a:xfrm>
-            <a:off x="1737360" y="1783080"/>
-            <a:ext cx="411480" cy="365760"/>
+            <a:off x="1508760" y="1490472"/>
+            <a:ext cx="365760" cy="274320"/>
           </a:xfrm>
           <a:prstGeom prst="rect">
             <a:avLst/>
@@ -6397,7 +6397,7 @@
               <a:buNone/>
             </a:pPr>
             <a:r>
-              <a:rPr lang="en-US" sz="1600" b="1" dirty="0">
+              <a:rPr lang="en-US" sz="1200" b="1" dirty="0">
                 <a:solidFill>
                   <a:srgbClr val="FFFFFF"/>
                 </a:solidFill>
@@ -6407,7 +6407,7 @@
               </a:rPr>
               <a:t>1</a:t>
             </a:r>
-            <a:endParaRPr lang="en-US" sz="1600" dirty="0"/>
+            <a:endParaRPr lang="en-US" sz="1200" dirty="0"/>
           </a:p>
         </p:txBody>
       </p:sp>
@@ -6419,8 +6419,8 @@
         </p:nvSpPr>
         <p:spPr>
           <a:xfrm>
-            <a:off x="822960" y="2377440"/>
-            <a:ext cx="2240280" cy="457200"/>
+            <a:off x="914400" y="1920240"/>
+            <a:ext cx="1554480" cy="365760"/>
           </a:xfrm>
           <a:prstGeom prst="rect">
             <a:avLst/>
@@ -6436,7 +6436,7 @@
               <a:buNone/>
             </a:pPr>
             <a:r>
-              <a:rPr lang="en-US" sz="1400" b="1" dirty="0">
+              <a:rPr lang="en-US" sz="1100" b="1" dirty="0">
                 <a:solidFill>
                   <a:srgbClr val="1E3A8A"/>
                 </a:solidFill>
@@ -6444,9 +6444,9 @@
                 <a:ea typeface="Segoe UI" pitchFamily="34" charset="-122"/>
                 <a:cs typeface="Segoe UI" pitchFamily="34" charset="-120"/>
               </a:rPr>
-              <a:t>DNS &amp; Edge Caching</a:t>
-            </a:r>
-            <a:endParaRPr lang="en-US" sz="1400" dirty="0"/>
+              <a:t>DNS &amp; Edge</a:t>
+            </a:r>
+            <a:endParaRPr lang="en-US" sz="1100" dirty="0"/>
           </a:p>
         </p:txBody>
       </p:sp>
@@ -6458,8 +6458,8 @@
         </p:nvSpPr>
         <p:spPr>
           <a:xfrm>
-            <a:off x="868680" y="2926080"/>
-            <a:ext cx="2148840" cy="2103120"/>
+            <a:off x="914400" y="2377440"/>
+            <a:ext cx="1554480" cy="1920240"/>
           </a:xfrm>
           <a:prstGeom prst="rect">
             <a:avLst/>
@@ -6475,7 +6475,7 @@
               <a:buNone/>
             </a:pPr>
             <a:r>
-              <a:rPr lang="en-US" sz="1100" dirty="0">
+              <a:rPr lang="en-US" sz="900" dirty="0">
                 <a:solidFill>
                   <a:srgbClr val="334155"/>
                 </a:solidFill>
@@ -6485,7 +6485,7 @@
               </a:rPr>
               <a:t>Namecheap DNS routes apex and www requests. CloudFront CDN serves cached static assets globally at 400+ Edge locations, reducing latency.</a:t>
             </a:r>
-            <a:endParaRPr lang="en-US" sz="1100" dirty="0"/>
+            <a:endParaRPr lang="en-US" sz="900" dirty="0"/>
           </a:p>
         </p:txBody>
       </p:sp>
@@ -6497,8 +6497,8 @@
         </p:nvSpPr>
         <p:spPr>
           <a:xfrm>
-            <a:off x="3200400" y="3291840"/>
-            <a:ext cx="137160" cy="18288"/>
+            <a:off x="2596896" y="2743200"/>
+            <a:ext cx="109728" cy="18288"/>
           </a:xfrm>
           <a:prstGeom prst="rect">
             <a:avLst/>
@@ -6522,8 +6522,8 @@
         </p:nvSpPr>
         <p:spPr>
           <a:xfrm>
-            <a:off x="3383280" y="1463040"/>
-            <a:ext cx="2423160" cy="3840480"/>
+            <a:off x="2743200" y="1280160"/>
+            <a:ext cx="1737360" cy="3200400"/>
           </a:xfrm>
           <a:prstGeom prst="rect">
             <a:avLst/>
@@ -6547,8 +6547,8 @@
         </p:nvSpPr>
         <p:spPr>
           <a:xfrm>
-            <a:off x="4389120" y="1737360"/>
-            <a:ext cx="411480" cy="411480"/>
+            <a:off x="3429000" y="1463040"/>
+            <a:ext cx="365760" cy="365760"/>
           </a:xfrm>
           <a:prstGeom prst="oval">
             <a:avLst/>
@@ -6572,8 +6572,8 @@
         </p:nvSpPr>
         <p:spPr>
           <a:xfrm>
-            <a:off x="4389120" y="1783080"/>
-            <a:ext cx="411480" cy="365760"/>
+            <a:off x="3429000" y="1490472"/>
+            <a:ext cx="365760" cy="274320"/>
           </a:xfrm>
           <a:prstGeom prst="rect">
             <a:avLst/>
@@ -6589,7 +6589,7 @@
               <a:buNone/>
             </a:pPr>
             <a:r>
-              <a:rPr lang="en-US" sz="1600" b="1" dirty="0">
+              <a:rPr lang="en-US" sz="1200" b="1" dirty="0">
                 <a:solidFill>
                   <a:srgbClr val="FFFFFF"/>
                 </a:solidFill>
@@ -6599,7 +6599,7 @@
               </a:rPr>
               <a:t>2</a:t>
             </a:r>
-            <a:endParaRPr lang="en-US" sz="1600" dirty="0"/>
+            <a:endParaRPr lang="en-US" sz="1200" dirty="0"/>
           </a:p>
         </p:txBody>
       </p:sp>
@@ -6611,8 +6611,8 @@
         </p:nvSpPr>
         <p:spPr>
           <a:xfrm>
-            <a:off x="3474720" y="2377440"/>
-            <a:ext cx="2240280" cy="457200"/>
+            <a:off x="2834640" y="1920240"/>
+            <a:ext cx="1554480" cy="365760"/>
           </a:xfrm>
           <a:prstGeom prst="rect">
             <a:avLst/>
@@ -6628,7 +6628,7 @@
               <a:buNone/>
             </a:pPr>
             <a:r>
-              <a:rPr lang="en-US" sz="1400" b="1" dirty="0">
+              <a:rPr lang="en-US" sz="1100" b="1" dirty="0">
                 <a:solidFill>
                   <a:srgbClr val="1E3A8A"/>
                 </a:solidFill>
@@ -6638,7 +6638,7 @@
               </a:rPr>
               <a:t>Load Balancing</a:t>
             </a:r>
-            <a:endParaRPr lang="en-US" sz="1400" dirty="0"/>
+            <a:endParaRPr lang="en-US" sz="1100" dirty="0"/>
           </a:p>
         </p:txBody>
       </p:sp>
@@ -6650,8 +6650,8 @@
         </p:nvSpPr>
         <p:spPr>
           <a:xfrm>
-            <a:off x="3520440" y="2926080"/>
-            <a:ext cx="2148840" cy="2103120"/>
+            <a:off x="2834640" y="2377440"/>
+            <a:ext cx="1554480" cy="1920240"/>
           </a:xfrm>
           <a:prstGeom prst="rect">
             <a:avLst/>
@@ -6667,7 +6667,7 @@
               <a:buNone/>
             </a:pPr>
             <a:r>
-              <a:rPr lang="en-US" sz="1100" dirty="0">
+              <a:rPr lang="en-US" sz="900" dirty="0">
                 <a:solidFill>
                   <a:srgbClr val="334155"/>
                 </a:solidFill>
@@ -6677,7 +6677,7 @@
               </a:rPr>
               <a:t>CloudFront forwards cache misses to the Application Load Balancer (ALB). ALB terminates HTTP and runs health checks.</a:t>
             </a:r>
-            <a:endParaRPr lang="en-US" sz="1100" dirty="0"/>
+            <a:endParaRPr lang="en-US" sz="900" dirty="0"/>
           </a:p>
         </p:txBody>
       </p:sp>
@@ -6689,8 +6689,8 @@
         </p:nvSpPr>
         <p:spPr>
           <a:xfrm>
-            <a:off x="5852160" y="3291840"/>
-            <a:ext cx="137160" cy="18288"/>
+            <a:off x="4517136" y="2743200"/>
+            <a:ext cx="109728" cy="18288"/>
           </a:xfrm>
           <a:prstGeom prst="rect">
             <a:avLst/>
@@ -6714,8 +6714,8 @@
         </p:nvSpPr>
         <p:spPr>
           <a:xfrm>
-            <a:off x="6035040" y="1463040"/>
-            <a:ext cx="2423160" cy="3840480"/>
+            <a:off x="4663440" y="1280160"/>
+            <a:ext cx="1737360" cy="3200400"/>
           </a:xfrm>
           <a:prstGeom prst="rect">
             <a:avLst/>
@@ -6739,8 +6739,8 @@
         </p:nvSpPr>
         <p:spPr>
           <a:xfrm>
-            <a:off x="7040880" y="1737360"/>
-            <a:ext cx="411480" cy="411480"/>
+            <a:off x="5349240" y="1463040"/>
+            <a:ext cx="365760" cy="365760"/>
           </a:xfrm>
           <a:prstGeom prst="oval">
             <a:avLst/>
@@ -6764,8 +6764,8 @@
         </p:nvSpPr>
         <p:spPr>
           <a:xfrm>
-            <a:off x="7040880" y="1783080"/>
-            <a:ext cx="411480" cy="365760"/>
+            <a:off x="5349240" y="1490472"/>
+            <a:ext cx="365760" cy="274320"/>
           </a:xfrm>
           <a:prstGeom prst="rect">
             <a:avLst/>
@@ -6781,7 +6781,7 @@
               <a:buNone/>
             </a:pPr>
             <a:r>
-              <a:rPr lang="en-US" sz="1600" b="1" dirty="0">
+              <a:rPr lang="en-US" sz="1200" b="1" dirty="0">
                 <a:solidFill>
                   <a:srgbClr val="FFFFFF"/>
                 </a:solidFill>
@@ -6791,7 +6791,7 @@
               </a:rPr>
               <a:t>3</a:t>
             </a:r>
-            <a:endParaRPr lang="en-US" sz="1600" dirty="0"/>
+            <a:endParaRPr lang="en-US" sz="1200" dirty="0"/>
           </a:p>
         </p:txBody>
       </p:sp>
@@ -6803,8 +6803,8 @@
         </p:nvSpPr>
         <p:spPr>
           <a:xfrm>
-            <a:off x="6126480" y="2377440"/>
-            <a:ext cx="2240280" cy="457200"/>
+            <a:off x="4754880" y="1920240"/>
+            <a:ext cx="1554480" cy="365760"/>
           </a:xfrm>
           <a:prstGeom prst="rect">
             <a:avLst/>
@@ -6820,7 +6820,7 @@
               <a:buNone/>
             </a:pPr>
             <a:r>
-              <a:rPr lang="en-US" sz="1400" b="1" dirty="0">
+              <a:rPr lang="en-US" sz="1100" b="1" dirty="0">
                 <a:solidFill>
                   <a:srgbClr val="1E3A8A"/>
                 </a:solidFill>
@@ -6830,7 +6830,7 @@
               </a:rPr>
               <a:t>Auto Scaling</a:t>
             </a:r>
-            <a:endParaRPr lang="en-US" sz="1400" dirty="0"/>
+            <a:endParaRPr lang="en-US" sz="1100" dirty="0"/>
           </a:p>
         </p:txBody>
       </p:sp>
@@ -6842,8 +6842,8 @@
         </p:nvSpPr>
         <p:spPr>
           <a:xfrm>
-            <a:off x="6172200" y="2926080"/>
-            <a:ext cx="2148840" cy="2103120"/>
+            <a:off x="4754880" y="2377440"/>
+            <a:ext cx="1554480" cy="1920240"/>
           </a:xfrm>
           <a:prstGeom prst="rect">
             <a:avLst/>
@@ -6859,7 +6859,7 @@
               <a:buNone/>
             </a:pPr>
             <a:r>
-              <a:rPr lang="en-US" sz="1100" dirty="0">
+              <a:rPr lang="en-US" sz="900" dirty="0">
                 <a:solidFill>
                   <a:srgbClr val="334155"/>
                 </a:solidFill>
@@ -6869,7 +6869,7 @@
               </a:rPr>
               <a:t>The ASG maintains a cluster (1-3 nodes) in private subnets, dynamically scaling up/down in response to traffic load.</a:t>
             </a:r>
-            <a:endParaRPr lang="en-US" sz="1100" dirty="0"/>
+            <a:endParaRPr lang="en-US" sz="900" dirty="0"/>
           </a:p>
         </p:txBody>
       </p:sp>
@@ -6881,8 +6881,8 @@
         </p:nvSpPr>
         <p:spPr>
           <a:xfrm>
-            <a:off x="8503920" y="3291840"/>
-            <a:ext cx="137160" cy="18288"/>
+            <a:off x="6437376" y="2743200"/>
+            <a:ext cx="109728" cy="18288"/>
           </a:xfrm>
           <a:prstGeom prst="rect">
             <a:avLst/>
@@ -6906,8 +6906,8 @@
         </p:nvSpPr>
         <p:spPr>
           <a:xfrm>
-            <a:off x="8686800" y="1463040"/>
-            <a:ext cx="2423160" cy="3840480"/>
+            <a:off x="6583680" y="1280160"/>
+            <a:ext cx="1737360" cy="3200400"/>
           </a:xfrm>
           <a:prstGeom prst="rect">
             <a:avLst/>
@@ -6931,8 +6931,8 @@
         </p:nvSpPr>
         <p:spPr>
           <a:xfrm>
-            <a:off x="9692640" y="1737360"/>
-            <a:ext cx="411480" cy="411480"/>
+            <a:off x="7269480" y="1463040"/>
+            <a:ext cx="365760" cy="365760"/>
           </a:xfrm>
           <a:prstGeom prst="oval">
             <a:avLst/>
@@ -6956,8 +6956,8 @@
         </p:nvSpPr>
         <p:spPr>
           <a:xfrm>
-            <a:off x="9692640" y="1783080"/>
-            <a:ext cx="411480" cy="365760"/>
+            <a:off x="7269480" y="1490472"/>
+            <a:ext cx="365760" cy="274320"/>
           </a:xfrm>
           <a:prstGeom prst="rect">
             <a:avLst/>
@@ -6973,7 +6973,7 @@
               <a:buNone/>
             </a:pPr>
             <a:r>
-              <a:rPr lang="en-US" sz="1600" b="1" dirty="0">
+              <a:rPr lang="en-US" sz="1200" b="1" dirty="0">
                 <a:solidFill>
                   <a:srgbClr val="FFFFFF"/>
                 </a:solidFill>
@@ -6983,7 +6983,7 @@
               </a:rPr>
               <a:t>4</a:t>
             </a:r>
-            <a:endParaRPr lang="en-US" sz="1600" dirty="0"/>
+            <a:endParaRPr lang="en-US" sz="1200" dirty="0"/>
           </a:p>
         </p:txBody>
       </p:sp>
@@ -6995,8 +6995,8 @@
         </p:nvSpPr>
         <p:spPr>
           <a:xfrm>
-            <a:off x="8778240" y="2377440"/>
-            <a:ext cx="2240280" cy="457200"/>
+            <a:off x="6675120" y="1920240"/>
+            <a:ext cx="1554480" cy="365760"/>
           </a:xfrm>
           <a:prstGeom prst="rect">
             <a:avLst/>
@@ -7012,7 +7012,7 @@
               <a:buNone/>
             </a:pPr>
             <a:r>
-              <a:rPr lang="en-US" sz="1400" b="1" dirty="0">
+              <a:rPr lang="en-US" sz="1100" b="1" dirty="0">
                 <a:solidFill>
                   <a:srgbClr val="1E3A8A"/>
                 </a:solidFill>
@@ -7022,7 +7022,7 @@
               </a:rPr>
               <a:t>EC2 &amp; Nginx</a:t>
             </a:r>
-            <a:endParaRPr lang="en-US" sz="1400" dirty="0"/>
+            <a:endParaRPr lang="en-US" sz="1100" dirty="0"/>
           </a:p>
         </p:txBody>
       </p:sp>
@@ -7034,8 +7034,8 @@
         </p:nvSpPr>
         <p:spPr>
           <a:xfrm>
-            <a:off x="8823960" y="2926080"/>
-            <a:ext cx="2148840" cy="2103120"/>
+            <a:off x="6675120" y="2377440"/>
+            <a:ext cx="1554480" cy="1920240"/>
           </a:xfrm>
           <a:prstGeom prst="rect">
             <a:avLst/>
@@ -7051,7 +7051,7 @@
               <a:buNone/>
             </a:pPr>
             <a:r>
-              <a:rPr lang="en-US" sz="1100" dirty="0">
+              <a:rPr lang="en-US" sz="900" dirty="0">
                 <a:solidFill>
                   <a:srgbClr val="334155"/>
                 </a:solidFill>
@@ -7061,7 +7061,7 @@
               </a:rPr>
               <a:t>EC2 t3.micro nodes running Nginx serve the core HTML, CSS, and JS web app files locally and securely.</a:t>
             </a:r>
-            <a:endParaRPr lang="en-US" sz="1100" dirty="0"/>
+            <a:endParaRPr lang="en-US" sz="900" dirty="0"/>
           </a:p>
         </p:txBody>
       </p:sp>
@@ -7106,23 +7106,23 @@
         <p:spPr>
           <a:xfrm>
             <a:off x="731520" y="365760"/>
-            <a:ext cx="10515600" cy="640080"/>
-          </a:xfrm>
-          <a:prstGeom prst="rect">
-            <a:avLst/>
-          </a:prstGeom>
-          <a:noFill/>
-          <a:ln/>
-        </p:spPr>
-        <p:txBody>
-          <a:bodyPr wrap="square" rtlCol="0" anchor="ctr"/>
-          <a:lstStyle/>
-          <a:p>
-            <a:pPr indent="0" marL="0">
-              <a:buNone/>
-            </a:pPr>
-            <a:r>
-              <a:rPr lang="en-US" sz="2800" b="1" dirty="0">
+            <a:ext cx="7680960" cy="548640"/>
+          </a:xfrm>
+          <a:prstGeom prst="rect">
+            <a:avLst/>
+          </a:prstGeom>
+          <a:noFill/>
+          <a:ln/>
+        </p:spPr>
+        <p:txBody>
+          <a:bodyPr wrap="square" rtlCol="0" anchor="ctr"/>
+          <a:lstStyle/>
+          <a:p>
+            <a:pPr indent="0" marL="0">
+              <a:buNone/>
+            </a:pPr>
+            <a:r>
+              <a:rPr lang="en-US" sz="2400" b="1" dirty="0">
                 <a:solidFill>
                   <a:srgbClr val="1E3A8A"/>
                 </a:solidFill>
@@ -7132,7 +7132,7 @@
               </a:rPr>
               <a:t>Infrastructure Architecture Diagram</a:t>
             </a:r>
-            <a:endParaRPr lang="en-US" sz="2800" dirty="0"/>
+            <a:endParaRPr lang="en-US" sz="2400" dirty="0"/>
           </a:p>
         </p:txBody>
       </p:sp>
@@ -7144,8 +7144,8 @@
         </p:nvSpPr>
         <p:spPr>
           <a:xfrm>
-            <a:off x="731520" y="1051560"/>
-            <a:ext cx="1371600" cy="45720"/>
+            <a:off x="731520" y="914400"/>
+            <a:ext cx="1371600" cy="36576"/>
           </a:xfrm>
           <a:prstGeom prst="rect">
             <a:avLst/>
@@ -7169,7 +7169,7 @@
         </p:nvSpPr>
         <p:spPr>
           <a:xfrm>
-            <a:off x="731520" y="6400800"/>
+            <a:off x="731520" y="4709160"/>
             <a:ext cx="6400800" cy="274320"/>
           </a:xfrm>
           <a:prstGeom prst="rect">
@@ -7186,7 +7186,7 @@
               <a:buNone/>
             </a:pPr>
             <a:r>
-              <a:rPr lang="en-US" sz="900" dirty="0">
+              <a:rPr lang="en-US" sz="850" dirty="0">
                 <a:solidFill>
                   <a:srgbClr val="94A3B8"/>
                 </a:solidFill>
@@ -7196,7 +7196,7 @@
               </a:rPr>
               <a:t>AWS DevOps Capstone Project  |  Student Study Planner</a:t>
             </a:r>
-            <a:endParaRPr lang="en-US" sz="900" dirty="0"/>
+            <a:endParaRPr lang="en-US" sz="850" dirty="0"/>
           </a:p>
         </p:txBody>
       </p:sp>
@@ -7208,7 +7208,7 @@
         </p:nvSpPr>
         <p:spPr>
           <a:xfrm>
-            <a:off x="10515600" y="6400800"/>
+            <a:off x="7498080" y="4709160"/>
             <a:ext cx="914400" cy="274320"/>
           </a:xfrm>
           <a:prstGeom prst="rect">
@@ -7225,7 +7225,7 @@
               <a:buNone/>
             </a:pPr>
             <a:r>
-              <a:rPr lang="en-US" sz="900" dirty="0">
+              <a:rPr lang="en-US" sz="850" dirty="0">
                 <a:solidFill>
                   <a:srgbClr val="94A3B8"/>
                 </a:solidFill>
@@ -7235,7 +7235,7 @@
               </a:rPr>
               <a:t>{slide_num} / {slide_num}</a:t>
             </a:r>
-            <a:endParaRPr lang="en-US" sz="900" dirty="0"/>
+            <a:endParaRPr lang="en-US" sz="850" dirty="0"/>
           </a:p>
         </p:txBody>
       </p:sp>
@@ -7255,8 +7255,8 @@
         </p:blipFill>
         <p:spPr>
           <a:xfrm>
-            <a:off x="3072384" y="1280160"/>
-            <a:ext cx="6035040" cy="5029200"/>
+            <a:off x="2542032" y="1188720"/>
+            <a:ext cx="4059936" cy="3383280"/>
           </a:xfrm>
           <a:prstGeom prst="rect">
             <a:avLst/>
@@ -7304,23 +7304,23 @@
         <p:spPr>
           <a:xfrm>
             <a:off x="731520" y="365760"/>
-            <a:ext cx="10515600" cy="640080"/>
-          </a:xfrm>
-          <a:prstGeom prst="rect">
-            <a:avLst/>
-          </a:prstGeom>
-          <a:noFill/>
-          <a:ln/>
-        </p:spPr>
-        <p:txBody>
-          <a:bodyPr wrap="square" rtlCol="0" anchor="ctr"/>
-          <a:lstStyle/>
-          <a:p>
-            <a:pPr indent="0" marL="0">
-              <a:buNone/>
-            </a:pPr>
-            <a:r>
-              <a:rPr lang="en-US" sz="2800" b="1" dirty="0">
+            <a:ext cx="7680960" cy="548640"/>
+          </a:xfrm>
+          <a:prstGeom prst="rect">
+            <a:avLst/>
+          </a:prstGeom>
+          <a:noFill/>
+          <a:ln/>
+        </p:spPr>
+        <p:txBody>
+          <a:bodyPr wrap="square" rtlCol="0" anchor="ctr"/>
+          <a:lstStyle/>
+          <a:p>
+            <a:pPr indent="0" marL="0">
+              <a:buNone/>
+            </a:pPr>
+            <a:r>
+              <a:rPr lang="en-US" sz="2400" b="1" dirty="0">
                 <a:solidFill>
                   <a:srgbClr val="1E3A8A"/>
                 </a:solidFill>
@@ -7330,7 +7330,7 @@
               </a:rPr>
               <a:t>Security Hardening &amp; Decisions</a:t>
             </a:r>
-            <a:endParaRPr lang="en-US" sz="2800" dirty="0"/>
+            <a:endParaRPr lang="en-US" sz="2400" dirty="0"/>
           </a:p>
         </p:txBody>
       </p:sp>
@@ -7342,8 +7342,8 @@
         </p:nvSpPr>
         <p:spPr>
           <a:xfrm>
-            <a:off x="731520" y="1051560"/>
-            <a:ext cx="1371600" cy="45720"/>
+            <a:off x="731520" y="914400"/>
+            <a:ext cx="1371600" cy="36576"/>
           </a:xfrm>
           <a:prstGeom prst="rect">
             <a:avLst/>
@@ -7367,7 +7367,7 @@
         </p:nvSpPr>
         <p:spPr>
           <a:xfrm>
-            <a:off x="731520" y="6400800"/>
+            <a:off x="731520" y="4709160"/>
             <a:ext cx="6400800" cy="274320"/>
           </a:xfrm>
           <a:prstGeom prst="rect">
@@ -7384,7 +7384,7 @@
               <a:buNone/>
             </a:pPr>
             <a:r>
-              <a:rPr lang="en-US" sz="900" dirty="0">
+              <a:rPr lang="en-US" sz="850" dirty="0">
                 <a:solidFill>
                   <a:srgbClr val="94A3B8"/>
                 </a:solidFill>
@@ -7394,7 +7394,7 @@
               </a:rPr>
               <a:t>AWS DevOps Capstone Project  |  Student Study Planner</a:t>
             </a:r>
-            <a:endParaRPr lang="en-US" sz="900" dirty="0"/>
+            <a:endParaRPr lang="en-US" sz="850" dirty="0"/>
           </a:p>
         </p:txBody>
       </p:sp>
@@ -7406,7 +7406,7 @@
         </p:nvSpPr>
         <p:spPr>
           <a:xfrm>
-            <a:off x="10515600" y="6400800"/>
+            <a:off x="7498080" y="4709160"/>
             <a:ext cx="914400" cy="274320"/>
           </a:xfrm>
           <a:prstGeom prst="rect">
@@ -7423,7 +7423,7 @@
               <a:buNone/>
             </a:pPr>
             <a:r>
-              <a:rPr lang="en-US" sz="900" dirty="0">
+              <a:rPr lang="en-US" sz="850" dirty="0">
                 <a:solidFill>
                   <a:srgbClr val="94A3B8"/>
                 </a:solidFill>
@@ -7433,7 +7433,7 @@
               </a:rPr>
               <a:t>{slide_num} / {slide_num}</a:t>
             </a:r>
-            <a:endParaRPr lang="en-US" sz="900" dirty="0"/>
+            <a:endParaRPr lang="en-US" sz="850" dirty="0"/>
           </a:p>
         </p:txBody>
       </p:sp>
@@ -7445,8 +7445,8 @@
         </p:nvSpPr>
         <p:spPr>
           <a:xfrm>
-            <a:off x="731520" y="1371600"/>
-            <a:ext cx="5120640" cy="2194560"/>
+            <a:off x="731520" y="1280160"/>
+            <a:ext cx="3657600" cy="1554480"/>
           </a:xfrm>
           <a:prstGeom prst="rect">
             <a:avLst/>
@@ -7470,24 +7470,24 @@
         </p:nvSpPr>
         <p:spPr>
           <a:xfrm>
-            <a:off x="914400" y="1508760"/>
-            <a:ext cx="4754880" cy="365760"/>
-          </a:xfrm>
-          <a:prstGeom prst="rect">
-            <a:avLst/>
-          </a:prstGeom>
-          <a:noFill/>
-          <a:ln/>
-        </p:spPr>
-        <p:txBody>
-          <a:bodyPr wrap="square" rtlCol="0" anchor="ctr"/>
-          <a:lstStyle/>
-          <a:p>
-            <a:pPr indent="0" marL="0">
-              <a:buNone/>
-            </a:pPr>
-            <a:r>
-              <a:rPr lang="en-US" sz="1400" b="1" dirty="0">
+            <a:off x="868680" y="1371600"/>
+            <a:ext cx="3383280" cy="274320"/>
+          </a:xfrm>
+          <a:prstGeom prst="rect">
+            <a:avLst/>
+          </a:prstGeom>
+          <a:noFill/>
+          <a:ln/>
+        </p:spPr>
+        <p:txBody>
+          <a:bodyPr wrap="square" rtlCol="0" anchor="ctr"/>
+          <a:lstStyle/>
+          <a:p>
+            <a:pPr indent="0" marL="0">
+              <a:buNone/>
+            </a:pPr>
+            <a:r>
+              <a:rPr lang="en-US" sz="1100" b="1" dirty="0">
                 <a:solidFill>
                   <a:srgbClr val="1E3A8A"/>
                 </a:solidFill>
@@ -7497,7 +7497,7 @@
               </a:rPr>
               <a:t>Identity &amp; Access Management (IAM)</a:t>
             </a:r>
-            <a:endParaRPr lang="en-US" sz="1400" dirty="0"/>
+            <a:endParaRPr lang="en-US" sz="1100" dirty="0"/>
           </a:p>
         </p:txBody>
       </p:sp>
@@ -7509,8 +7509,8 @@
         </p:nvSpPr>
         <p:spPr>
           <a:xfrm>
-            <a:off x="1005840" y="2011680"/>
-            <a:ext cx="54864" cy="54864"/>
+            <a:off x="914400" y="1691640"/>
+            <a:ext cx="45720" cy="45720"/>
           </a:xfrm>
           <a:prstGeom prst="rect">
             <a:avLst/>
@@ -7534,24 +7534,24 @@
         </p:nvSpPr>
         <p:spPr>
           <a:xfrm>
-            <a:off x="1143000" y="1920240"/>
-            <a:ext cx="4480560" cy="457200"/>
-          </a:xfrm>
-          <a:prstGeom prst="rect">
-            <a:avLst/>
-          </a:prstGeom>
-          <a:noFill/>
-          <a:ln/>
-        </p:spPr>
-        <p:txBody>
-          <a:bodyPr wrap="square" rtlCol="0" anchor="ctr"/>
-          <a:lstStyle/>
-          <a:p>
-            <a:pPr indent="0" marL="0">
-              <a:buNone/>
-            </a:pPr>
-            <a:r>
-              <a:rPr lang="en-US" sz="1050" dirty="0">
+            <a:off x="1005840" y="1627632"/>
+            <a:ext cx="3246120" cy="347472"/>
+          </a:xfrm>
+          <a:prstGeom prst="rect">
+            <a:avLst/>
+          </a:prstGeom>
+          <a:noFill/>
+          <a:ln/>
+        </p:spPr>
+        <p:txBody>
+          <a:bodyPr wrap="square" rtlCol="0" anchor="ctr"/>
+          <a:lstStyle/>
+          <a:p>
+            <a:pPr indent="0" marL="0">
+              <a:buNone/>
+            </a:pPr>
+            <a:r>
+              <a:rPr lang="en-US" sz="850" dirty="0">
                 <a:solidFill>
                   <a:srgbClr val="334155"/>
                 </a:solidFill>
@@ -7561,7 +7561,7 @@
               </a:rPr>
               <a:t>Group-based access control via AWS CloudCapstoneTeam group.</a:t>
             </a:r>
-            <a:endParaRPr lang="en-US" sz="1050" dirty="0"/>
+            <a:endParaRPr lang="en-US" sz="850" dirty="0"/>
           </a:p>
         </p:txBody>
       </p:sp>
@@ -7573,8 +7573,8 @@
         </p:nvSpPr>
         <p:spPr>
           <a:xfrm>
-            <a:off x="1005840" y="2487168"/>
-            <a:ext cx="54864" cy="54864"/>
+            <a:off x="914400" y="2057400"/>
+            <a:ext cx="45720" cy="45720"/>
           </a:xfrm>
           <a:prstGeom prst="rect">
             <a:avLst/>
@@ -7598,24 +7598,24 @@
         </p:nvSpPr>
         <p:spPr>
           <a:xfrm>
-            <a:off x="1143000" y="2395728"/>
-            <a:ext cx="4480560" cy="457200"/>
-          </a:xfrm>
-          <a:prstGeom prst="rect">
-            <a:avLst/>
-          </a:prstGeom>
-          <a:noFill/>
-          <a:ln/>
-        </p:spPr>
-        <p:txBody>
-          <a:bodyPr wrap="square" rtlCol="0" anchor="ctr"/>
-          <a:lstStyle/>
-          <a:p>
-            <a:pPr indent="0" marL="0">
-              <a:buNone/>
-            </a:pPr>
-            <a:r>
-              <a:rPr lang="en-US" sz="1050" dirty="0">
+            <a:off x="1005840" y="1993392"/>
+            <a:ext cx="3246120" cy="347472"/>
+          </a:xfrm>
+          <a:prstGeom prst="rect">
+            <a:avLst/>
+          </a:prstGeom>
+          <a:noFill/>
+          <a:ln/>
+        </p:spPr>
+        <p:txBody>
+          <a:bodyPr wrap="square" rtlCol="0" anchor="ctr"/>
+          <a:lstStyle/>
+          <a:p>
+            <a:pPr indent="0" marL="0">
+              <a:buNone/>
+            </a:pPr>
+            <a:r>
+              <a:rPr lang="en-US" sz="850" dirty="0">
                 <a:solidFill>
                   <a:srgbClr val="334155"/>
                 </a:solidFill>
@@ -7625,7 +7625,7 @@
               </a:rPr>
               <a:t>Principle of least privilege: six scoped AWS-managed policies instead of root/administrator privileges.</a:t>
             </a:r>
-            <a:endParaRPr lang="en-US" sz="1050" dirty="0"/>
+            <a:endParaRPr lang="en-US" sz="850" dirty="0"/>
           </a:p>
         </p:txBody>
       </p:sp>
@@ -7637,8 +7637,8 @@
         </p:nvSpPr>
         <p:spPr>
           <a:xfrm>
-            <a:off x="1005840" y="2962656"/>
-            <a:ext cx="54864" cy="54864"/>
+            <a:off x="914400" y="2423160"/>
+            <a:ext cx="45720" cy="45720"/>
           </a:xfrm>
           <a:prstGeom prst="rect">
             <a:avLst/>
@@ -7662,24 +7662,24 @@
         </p:nvSpPr>
         <p:spPr>
           <a:xfrm>
-            <a:off x="1143000" y="2871216"/>
-            <a:ext cx="4480560" cy="457200"/>
-          </a:xfrm>
-          <a:prstGeom prst="rect">
-            <a:avLst/>
-          </a:prstGeom>
-          <a:noFill/>
-          <a:ln/>
-        </p:spPr>
-        <p:txBody>
-          <a:bodyPr wrap="square" rtlCol="0" anchor="ctr"/>
-          <a:lstStyle/>
-          <a:p>
-            <a:pPr indent="0" marL="0">
-              <a:buNone/>
-            </a:pPr>
-            <a:r>
-              <a:rPr lang="en-US" sz="1050" dirty="0">
+            <a:off x="1005840" y="2359152"/>
+            <a:ext cx="3246120" cy="347472"/>
+          </a:xfrm>
+          <a:prstGeom prst="rect">
+            <a:avLst/>
+          </a:prstGeom>
+          <a:noFill/>
+          <a:ln/>
+        </p:spPr>
+        <p:txBody>
+          <a:bodyPr wrap="square" rtlCol="0" anchor="ctr"/>
+          <a:lstStyle/>
+          <a:p>
+            <a:pPr indent="0" marL="0">
+              <a:buNone/>
+            </a:pPr>
+            <a:r>
+              <a:rPr lang="en-US" sz="850" dirty="0">
                 <a:solidFill>
                   <a:srgbClr val="334155"/>
                 </a:solidFill>
@@ -7689,7 +7689,7 @@
               </a:rPr>
               <a:t>No programmatic credentials in source control; kept in local config.</a:t>
             </a:r>
-            <a:endParaRPr lang="en-US" sz="1050" dirty="0"/>
+            <a:endParaRPr lang="en-US" sz="850" dirty="0"/>
           </a:p>
         </p:txBody>
       </p:sp>
@@ -7701,8 +7701,8 @@
         </p:nvSpPr>
         <p:spPr>
           <a:xfrm>
-            <a:off x="6309360" y="1371600"/>
-            <a:ext cx="5120640" cy="2194560"/>
+            <a:off x="4754880" y="1280160"/>
+            <a:ext cx="3657600" cy="1554480"/>
           </a:xfrm>
           <a:prstGeom prst="rect">
             <a:avLst/>
@@ -7726,24 +7726,24 @@
         </p:nvSpPr>
         <p:spPr>
           <a:xfrm>
-            <a:off x="6492240" y="1508760"/>
-            <a:ext cx="4754880" cy="365760"/>
-          </a:xfrm>
-          <a:prstGeom prst="rect">
-            <a:avLst/>
-          </a:prstGeom>
-          <a:noFill/>
-          <a:ln/>
-        </p:spPr>
-        <p:txBody>
-          <a:bodyPr wrap="square" rtlCol="0" anchor="ctr"/>
-          <a:lstStyle/>
-          <a:p>
-            <a:pPr indent="0" marL="0">
-              <a:buNone/>
-            </a:pPr>
-            <a:r>
-              <a:rPr lang="en-US" sz="1400" b="1" dirty="0">
+            <a:off x="4892040" y="1371600"/>
+            <a:ext cx="3383280" cy="274320"/>
+          </a:xfrm>
+          <a:prstGeom prst="rect">
+            <a:avLst/>
+          </a:prstGeom>
+          <a:noFill/>
+          <a:ln/>
+        </p:spPr>
+        <p:txBody>
+          <a:bodyPr wrap="square" rtlCol="0" anchor="ctr"/>
+          <a:lstStyle/>
+          <a:p>
+            <a:pPr indent="0" marL="0">
+              <a:buNone/>
+            </a:pPr>
+            <a:r>
+              <a:rPr lang="en-US" sz="1100" b="1" dirty="0">
                 <a:solidFill>
                   <a:srgbClr val="1E3A8A"/>
                 </a:solidFill>
@@ -7753,7 +7753,7 @@
               </a:rPr>
               <a:t>Network Segregation</a:t>
             </a:r>
-            <a:endParaRPr lang="en-US" sz="1400" dirty="0"/>
+            <a:endParaRPr lang="en-US" sz="1100" dirty="0"/>
           </a:p>
         </p:txBody>
       </p:sp>
@@ -7765,8 +7765,8 @@
         </p:nvSpPr>
         <p:spPr>
           <a:xfrm>
-            <a:off x="6583680" y="2011680"/>
-            <a:ext cx="54864" cy="54864"/>
+            <a:off x="4937760" y="1691640"/>
+            <a:ext cx="45720" cy="45720"/>
           </a:xfrm>
           <a:prstGeom prst="rect">
             <a:avLst/>
@@ -7790,24 +7790,24 @@
         </p:nvSpPr>
         <p:spPr>
           <a:xfrm>
-            <a:off x="6720840" y="1920240"/>
-            <a:ext cx="4480560" cy="457200"/>
-          </a:xfrm>
-          <a:prstGeom prst="rect">
-            <a:avLst/>
-          </a:prstGeom>
-          <a:noFill/>
-          <a:ln/>
-        </p:spPr>
-        <p:txBody>
-          <a:bodyPr wrap="square" rtlCol="0" anchor="ctr"/>
-          <a:lstStyle/>
-          <a:p>
-            <a:pPr indent="0" marL="0">
-              <a:buNone/>
-            </a:pPr>
-            <a:r>
-              <a:rPr lang="en-US" sz="1050" dirty="0">
+            <a:off x="5029200" y="1627632"/>
+            <a:ext cx="3246120" cy="347472"/>
+          </a:xfrm>
+          <a:prstGeom prst="rect">
+            <a:avLst/>
+          </a:prstGeom>
+          <a:noFill/>
+          <a:ln/>
+        </p:spPr>
+        <p:txBody>
+          <a:bodyPr wrap="square" rtlCol="0" anchor="ctr"/>
+          <a:lstStyle/>
+          <a:p>
+            <a:pPr indent="0" marL="0">
+              <a:buNone/>
+            </a:pPr>
+            <a:r>
+              <a:rPr lang="en-US" sz="850" dirty="0">
                 <a:solidFill>
                   <a:srgbClr val="334155"/>
                 </a:solidFill>
@@ -7817,7 +7817,7 @@
               </a:rPr>
               <a:t>EC2 Security Groups restrict ingress strictly to HTTP/HTTPS.</a:t>
             </a:r>
-            <a:endParaRPr lang="en-US" sz="1050" dirty="0"/>
+            <a:endParaRPr lang="en-US" sz="850" dirty="0"/>
           </a:p>
         </p:txBody>
       </p:sp>
@@ -7829,8 +7829,8 @@
         </p:nvSpPr>
         <p:spPr>
           <a:xfrm>
-            <a:off x="6583680" y="2487168"/>
-            <a:ext cx="54864" cy="54864"/>
+            <a:off x="4937760" y="2057400"/>
+            <a:ext cx="45720" cy="45720"/>
           </a:xfrm>
           <a:prstGeom prst="rect">
             <a:avLst/>
@@ -7854,24 +7854,24 @@
         </p:nvSpPr>
         <p:spPr>
           <a:xfrm>
-            <a:off x="6720840" y="2395728"/>
-            <a:ext cx="4480560" cy="457200"/>
-          </a:xfrm>
-          <a:prstGeom prst="rect">
-            <a:avLst/>
-          </a:prstGeom>
-          <a:noFill/>
-          <a:ln/>
-        </p:spPr>
-        <p:txBody>
-          <a:bodyPr wrap="square" rtlCol="0" anchor="ctr"/>
-          <a:lstStyle/>
-          <a:p>
-            <a:pPr indent="0" marL="0">
-              <a:buNone/>
-            </a:pPr>
-            <a:r>
-              <a:rPr lang="en-US" sz="1050" dirty="0">
+            <a:off x="5029200" y="1993392"/>
+            <a:ext cx="3246120" cy="347472"/>
+          </a:xfrm>
+          <a:prstGeom prst="rect">
+            <a:avLst/>
+          </a:prstGeom>
+          <a:noFill/>
+          <a:ln/>
+        </p:spPr>
+        <p:txBody>
+          <a:bodyPr wrap="square" rtlCol="0" anchor="ctr"/>
+          <a:lstStyle/>
+          <a:p>
+            <a:pPr indent="0" marL="0">
+              <a:buNone/>
+            </a:pPr>
+            <a:r>
+              <a:rPr lang="en-US" sz="850" dirty="0">
                 <a:solidFill>
                   <a:srgbClr val="334155"/>
                 </a:solidFill>
@@ -7881,7 +7881,7 @@
               </a:rPr>
               <a:t>SSH access is restricted to eddie-key.pem and not publicly open.</a:t>
             </a:r>
-            <a:endParaRPr lang="en-US" sz="1050" dirty="0"/>
+            <a:endParaRPr lang="en-US" sz="850" dirty="0"/>
           </a:p>
         </p:txBody>
       </p:sp>
@@ -7893,8 +7893,8 @@
         </p:nvSpPr>
         <p:spPr>
           <a:xfrm>
-            <a:off x="6583680" y="2962656"/>
-            <a:ext cx="54864" cy="54864"/>
+            <a:off x="4937760" y="2423160"/>
+            <a:ext cx="45720" cy="45720"/>
           </a:xfrm>
           <a:prstGeom prst="rect">
             <a:avLst/>
@@ -7918,24 +7918,24 @@
         </p:nvSpPr>
         <p:spPr>
           <a:xfrm>
-            <a:off x="6720840" y="2871216"/>
-            <a:ext cx="4480560" cy="457200"/>
-          </a:xfrm>
-          <a:prstGeom prst="rect">
-            <a:avLst/>
-          </a:prstGeom>
-          <a:noFill/>
-          <a:ln/>
-        </p:spPr>
-        <p:txBody>
-          <a:bodyPr wrap="square" rtlCol="0" anchor="ctr"/>
-          <a:lstStyle/>
-          <a:p>
-            <a:pPr indent="0" marL="0">
-              <a:buNone/>
-            </a:pPr>
-            <a:r>
-              <a:rPr lang="en-US" sz="1050" dirty="0">
+            <a:off x="5029200" y="2359152"/>
+            <a:ext cx="3246120" cy="347472"/>
+          </a:xfrm>
+          <a:prstGeom prst="rect">
+            <a:avLst/>
+          </a:prstGeom>
+          <a:noFill/>
+          <a:ln/>
+        </p:spPr>
+        <p:txBody>
+          <a:bodyPr wrap="square" rtlCol="0" anchor="ctr"/>
+          <a:lstStyle/>
+          <a:p>
+            <a:pPr indent="0" marL="0">
+              <a:buNone/>
+            </a:pPr>
+            <a:r>
+              <a:rPr lang="en-US" sz="850" dirty="0">
                 <a:solidFill>
                   <a:srgbClr val="334155"/>
                 </a:solidFill>
@@ -7945,7 +7945,7 @@
               </a:rPr>
               <a:t>Isolated target groups ensure only ALB can communicate directly with the backend nodes.</a:t>
             </a:r>
-            <a:endParaRPr lang="en-US" sz="1050" dirty="0"/>
+            <a:endParaRPr lang="en-US" sz="850" dirty="0"/>
           </a:p>
         </p:txBody>
       </p:sp>
@@ -7957,8 +7957,8 @@
         </p:nvSpPr>
         <p:spPr>
           <a:xfrm>
-            <a:off x="731520" y="3840480"/>
-            <a:ext cx="5120640" cy="2194560"/>
+            <a:off x="731520" y="3017520"/>
+            <a:ext cx="3657600" cy="1554480"/>
           </a:xfrm>
           <a:prstGeom prst="rect">
             <a:avLst/>
@@ -7982,24 +7982,24 @@
         </p:nvSpPr>
         <p:spPr>
           <a:xfrm>
-            <a:off x="914400" y="3977640"/>
-            <a:ext cx="4754880" cy="365760"/>
-          </a:xfrm>
-          <a:prstGeom prst="rect">
-            <a:avLst/>
-          </a:prstGeom>
-          <a:noFill/>
-          <a:ln/>
-        </p:spPr>
-        <p:txBody>
-          <a:bodyPr wrap="square" rtlCol="0" anchor="ctr"/>
-          <a:lstStyle/>
-          <a:p>
-            <a:pPr indent="0" marL="0">
-              <a:buNone/>
-            </a:pPr>
-            <a:r>
-              <a:rPr lang="en-US" sz="1400" b="1" dirty="0">
+            <a:off x="868680" y="3108960"/>
+            <a:ext cx="3383280" cy="274320"/>
+          </a:xfrm>
+          <a:prstGeom prst="rect">
+            <a:avLst/>
+          </a:prstGeom>
+          <a:noFill/>
+          <a:ln/>
+        </p:spPr>
+        <p:txBody>
+          <a:bodyPr wrap="square" rtlCol="0" anchor="ctr"/>
+          <a:lstStyle/>
+          <a:p>
+            <a:pPr indent="0" marL="0">
+              <a:buNone/>
+            </a:pPr>
+            <a:r>
+              <a:rPr lang="en-US" sz="1100" b="1" dirty="0">
                 <a:solidFill>
                   <a:srgbClr val="1E3A8A"/>
                 </a:solidFill>
@@ -8009,7 +8009,7 @@
               </a:rPr>
               <a:t>Transport Security</a:t>
             </a:r>
-            <a:endParaRPr lang="en-US" sz="1400" dirty="0"/>
+            <a:endParaRPr lang="en-US" sz="1100" dirty="0"/>
           </a:p>
         </p:txBody>
       </p:sp>
@@ -8021,8 +8021,8 @@
         </p:nvSpPr>
         <p:spPr>
           <a:xfrm>
-            <a:off x="1005840" y="4480560"/>
-            <a:ext cx="54864" cy="54864"/>
+            <a:off x="914400" y="3429000"/>
+            <a:ext cx="45720" cy="45720"/>
           </a:xfrm>
           <a:prstGeom prst="rect">
             <a:avLst/>
@@ -8046,24 +8046,24 @@
         </p:nvSpPr>
         <p:spPr>
           <a:xfrm>
-            <a:off x="1143000" y="4389120"/>
-            <a:ext cx="4480560" cy="457200"/>
-          </a:xfrm>
-          <a:prstGeom prst="rect">
-            <a:avLst/>
-          </a:prstGeom>
-          <a:noFill/>
-          <a:ln/>
-        </p:spPr>
-        <p:txBody>
-          <a:bodyPr wrap="square" rtlCol="0" anchor="ctr"/>
-          <a:lstStyle/>
-          <a:p>
-            <a:pPr indent="0" marL="0">
-              <a:buNone/>
-            </a:pPr>
-            <a:r>
-              <a:rPr lang="en-US" sz="1050" dirty="0">
+            <a:off x="1005840" y="3364992"/>
+            <a:ext cx="3246120" cy="347472"/>
+          </a:xfrm>
+          <a:prstGeom prst="rect">
+            <a:avLst/>
+          </a:prstGeom>
+          <a:noFill/>
+          <a:ln/>
+        </p:spPr>
+        <p:txBody>
+          <a:bodyPr wrap="square" rtlCol="0" anchor="ctr"/>
+          <a:lstStyle/>
+          <a:p>
+            <a:pPr indent="0" marL="0">
+              <a:buNone/>
+            </a:pPr>
+            <a:r>
+              <a:rPr lang="en-US" sz="850" dirty="0">
                 <a:solidFill>
                   <a:srgbClr val="334155"/>
                 </a:solidFill>
@@ -8073,7 +8073,7 @@
               </a:rPr>
               <a:t>Enforced HTTPS across the entire network.</a:t>
             </a:r>
-            <a:endParaRPr lang="en-US" sz="1050" dirty="0"/>
+            <a:endParaRPr lang="en-US" sz="850" dirty="0"/>
           </a:p>
         </p:txBody>
       </p:sp>
@@ -8085,8 +8085,8 @@
         </p:nvSpPr>
         <p:spPr>
           <a:xfrm>
-            <a:off x="1005840" y="4956048"/>
-            <a:ext cx="54864" cy="54864"/>
+            <a:off x="914400" y="3794760"/>
+            <a:ext cx="45720" cy="45720"/>
           </a:xfrm>
           <a:prstGeom prst="rect">
             <a:avLst/>
@@ -8110,24 +8110,24 @@
         </p:nvSpPr>
         <p:spPr>
           <a:xfrm>
-            <a:off x="1143000" y="4864608"/>
-            <a:ext cx="4480560" cy="457200"/>
-          </a:xfrm>
-          <a:prstGeom prst="rect">
-            <a:avLst/>
-          </a:prstGeom>
-          <a:noFill/>
-          <a:ln/>
-        </p:spPr>
-        <p:txBody>
-          <a:bodyPr wrap="square" rtlCol="0" anchor="ctr"/>
-          <a:lstStyle/>
-          <a:p>
-            <a:pPr indent="0" marL="0">
-              <a:buNone/>
-            </a:pPr>
-            <a:r>
-              <a:rPr lang="en-US" sz="1050" dirty="0">
+            <a:off x="1005840" y="3730752"/>
+            <a:ext cx="3246120" cy="347472"/>
+          </a:xfrm>
+          <a:prstGeom prst="rect">
+            <a:avLst/>
+          </a:prstGeom>
+          <a:noFill/>
+          <a:ln/>
+        </p:spPr>
+        <p:txBody>
+          <a:bodyPr wrap="square" rtlCol="0" anchor="ctr"/>
+          <a:lstStyle/>
+          <a:p>
+            <a:pPr indent="0" marL="0">
+              <a:buNone/>
+            </a:pPr>
+            <a:r>
+              <a:rPr lang="en-US" sz="850" dirty="0">
                 <a:solidFill>
                   <a:srgbClr val="334155"/>
                 </a:solidFill>
@@ -8137,7 +8137,7 @@
               </a:rPr>
               <a:t>CloudFront handles HTTP -&gt; HTTPS redirection automatically.</a:t>
             </a:r>
-            <a:endParaRPr lang="en-US" sz="1050" dirty="0"/>
+            <a:endParaRPr lang="en-US" sz="850" dirty="0"/>
           </a:p>
         </p:txBody>
       </p:sp>
@@ -8149,8 +8149,8 @@
         </p:nvSpPr>
         <p:spPr>
           <a:xfrm>
-            <a:off x="1005840" y="5431536"/>
-            <a:ext cx="54864" cy="54864"/>
+            <a:off x="914400" y="4160520"/>
+            <a:ext cx="45720" cy="45720"/>
           </a:xfrm>
           <a:prstGeom prst="rect">
             <a:avLst/>
@@ -8174,24 +8174,24 @@
         </p:nvSpPr>
         <p:spPr>
           <a:xfrm>
-            <a:off x="1143000" y="5340096"/>
-            <a:ext cx="4480560" cy="457200"/>
-          </a:xfrm>
-          <a:prstGeom prst="rect">
-            <a:avLst/>
-          </a:prstGeom>
-          <a:noFill/>
-          <a:ln/>
-        </p:spPr>
-        <p:txBody>
-          <a:bodyPr wrap="square" rtlCol="0" anchor="ctr"/>
-          <a:lstStyle/>
-          <a:p>
-            <a:pPr indent="0" marL="0">
-              <a:buNone/>
-            </a:pPr>
-            <a:r>
-              <a:rPr lang="en-US" sz="1050" dirty="0">
+            <a:off x="1005840" y="4096512"/>
+            <a:ext cx="3246120" cy="347472"/>
+          </a:xfrm>
+          <a:prstGeom prst="rect">
+            <a:avLst/>
+          </a:prstGeom>
+          <a:noFill/>
+          <a:ln/>
+        </p:spPr>
+        <p:txBody>
+          <a:bodyPr wrap="square" rtlCol="0" anchor="ctr"/>
+          <a:lstStyle/>
+          <a:p>
+            <a:pPr indent="0" marL="0">
+              <a:buNone/>
+            </a:pPr>
+            <a:r>
+              <a:rPr lang="en-US" sz="850" dirty="0">
                 <a:solidFill>
                   <a:srgbClr val="334155"/>
                 </a:solidFill>
@@ -8201,7 +8201,7 @@
               </a:rPr>
               <a:t>AWS Certificate Manager (ACM) provisions DNS-validated TLS certificates with automated renewals.</a:t>
             </a:r>
-            <a:endParaRPr lang="en-US" sz="1050" dirty="0"/>
+            <a:endParaRPr lang="en-US" sz="850" dirty="0"/>
           </a:p>
         </p:txBody>
       </p:sp>
@@ -8213,8 +8213,8 @@
         </p:nvSpPr>
         <p:spPr>
           <a:xfrm>
-            <a:off x="6309360" y="3840480"/>
-            <a:ext cx="5120640" cy="2194560"/>
+            <a:off x="4754880" y="3017520"/>
+            <a:ext cx="3657600" cy="1554480"/>
           </a:xfrm>
           <a:prstGeom prst="rect">
             <a:avLst/>
@@ -8238,24 +8238,24 @@
         </p:nvSpPr>
         <p:spPr>
           <a:xfrm>
-            <a:off x="6492240" y="3977640"/>
-            <a:ext cx="4754880" cy="365760"/>
-          </a:xfrm>
-          <a:prstGeom prst="rect">
-            <a:avLst/>
-          </a:prstGeom>
-          <a:noFill/>
-          <a:ln/>
-        </p:spPr>
-        <p:txBody>
-          <a:bodyPr wrap="square" rtlCol="0" anchor="ctr"/>
-          <a:lstStyle/>
-          <a:p>
-            <a:pPr indent="0" marL="0">
-              <a:buNone/>
-            </a:pPr>
-            <a:r>
-              <a:rPr lang="en-US" sz="1400" b="1" dirty="0">
+            <a:off x="4892040" y="3108960"/>
+            <a:ext cx="3383280" cy="274320"/>
+          </a:xfrm>
+          <a:prstGeom prst="rect">
+            <a:avLst/>
+          </a:prstGeom>
+          <a:noFill/>
+          <a:ln/>
+        </p:spPr>
+        <p:txBody>
+          <a:bodyPr wrap="square" rtlCol="0" anchor="ctr"/>
+          <a:lstStyle/>
+          <a:p>
+            <a:pPr indent="0" marL="0">
+              <a:buNone/>
+            </a:pPr>
+            <a:r>
+              <a:rPr lang="en-US" sz="1100" b="1" dirty="0">
                 <a:solidFill>
                   <a:srgbClr val="1E3A8A"/>
                 </a:solidFill>
@@ -8265,7 +8265,7 @@
               </a:rPr>
               <a:t>CI/CD &amp; Observability Secrets</a:t>
             </a:r>
-            <a:endParaRPr lang="en-US" sz="1400" dirty="0"/>
+            <a:endParaRPr lang="en-US" sz="1100" dirty="0"/>
           </a:p>
         </p:txBody>
       </p:sp>
@@ -8277,8 +8277,8 @@
         </p:nvSpPr>
         <p:spPr>
           <a:xfrm>
-            <a:off x="6583680" y="4480560"/>
-            <a:ext cx="54864" cy="54864"/>
+            <a:off x="4937760" y="3429000"/>
+            <a:ext cx="45720" cy="45720"/>
           </a:xfrm>
           <a:prstGeom prst="rect">
             <a:avLst/>
@@ -8302,24 +8302,24 @@
         </p:nvSpPr>
         <p:spPr>
           <a:xfrm>
-            <a:off x="6720840" y="4389120"/>
-            <a:ext cx="4480560" cy="457200"/>
-          </a:xfrm>
-          <a:prstGeom prst="rect">
-            <a:avLst/>
-          </a:prstGeom>
-          <a:noFill/>
-          <a:ln/>
-        </p:spPr>
-        <p:txBody>
-          <a:bodyPr wrap="square" rtlCol="0" anchor="ctr"/>
-          <a:lstStyle/>
-          <a:p>
-            <a:pPr indent="0" marL="0">
-              <a:buNone/>
-            </a:pPr>
-            <a:r>
-              <a:rPr lang="en-US" sz="1050" dirty="0">
+            <a:off x="5029200" y="3364992"/>
+            <a:ext cx="3246120" cy="347472"/>
+          </a:xfrm>
+          <a:prstGeom prst="rect">
+            <a:avLst/>
+          </a:prstGeom>
+          <a:noFill/>
+          <a:ln/>
+        </p:spPr>
+        <p:txBody>
+          <a:bodyPr wrap="square" rtlCol="0" anchor="ctr"/>
+          <a:lstStyle/>
+          <a:p>
+            <a:pPr indent="0" marL="0">
+              <a:buNone/>
+            </a:pPr>
+            <a:r>
+              <a:rPr lang="en-US" sz="850" dirty="0">
                 <a:solidFill>
                   <a:srgbClr val="334155"/>
                 </a:solidFill>
@@ -8329,7 +8329,7 @@
               </a:rPr>
               <a:t>Deployment credentials stored securely as encrypted GitHub Secrets.</a:t>
             </a:r>
-            <a:endParaRPr lang="en-US" sz="1050" dirty="0"/>
+            <a:endParaRPr lang="en-US" sz="850" dirty="0"/>
           </a:p>
         </p:txBody>
       </p:sp>
@@ -8341,8 +8341,8 @@
         </p:nvSpPr>
         <p:spPr>
           <a:xfrm>
-            <a:off x="6583680" y="4956048"/>
-            <a:ext cx="54864" cy="54864"/>
+            <a:off x="4937760" y="3794760"/>
+            <a:ext cx="45720" cy="45720"/>
           </a:xfrm>
           <a:prstGeom prst="rect">
             <a:avLst/>
@@ -8366,24 +8366,24 @@
         </p:nvSpPr>
         <p:spPr>
           <a:xfrm>
-            <a:off x="6720840" y="4864608"/>
-            <a:ext cx="4480560" cy="457200"/>
-          </a:xfrm>
-          <a:prstGeom prst="rect">
-            <a:avLst/>
-          </a:prstGeom>
-          <a:noFill/>
-          <a:ln/>
-        </p:spPr>
-        <p:txBody>
-          <a:bodyPr wrap="square" rtlCol="0" anchor="ctr"/>
-          <a:lstStyle/>
-          <a:p>
-            <a:pPr indent="0" marL="0">
-              <a:buNone/>
-            </a:pPr>
-            <a:r>
-              <a:rPr lang="en-US" sz="1050" dirty="0">
+            <a:off x="5029200" y="3730752"/>
+            <a:ext cx="3246120" cy="347472"/>
+          </a:xfrm>
+          <a:prstGeom prst="rect">
+            <a:avLst/>
+          </a:prstGeom>
+          <a:noFill/>
+          <a:ln/>
+        </p:spPr>
+        <p:txBody>
+          <a:bodyPr wrap="square" rtlCol="0" anchor="ctr"/>
+          <a:lstStyle/>
+          <a:p>
+            <a:pPr indent="0" marL="0">
+              <a:buNone/>
+            </a:pPr>
+            <a:r>
+              <a:rPr lang="en-US" sz="850" dirty="0">
                 <a:solidFill>
                   <a:srgbClr val="334155"/>
                 </a:solidFill>
@@ -8393,7 +8393,7 @@
               </a:rPr>
               <a:t>AWS Budgets Free-Tier alert at $0.01 prevents unexpected charges.</a:t>
             </a:r>
-            <a:endParaRPr lang="en-US" sz="1050" dirty="0"/>
+            <a:endParaRPr lang="en-US" sz="850" dirty="0"/>
           </a:p>
         </p:txBody>
       </p:sp>
@@ -8405,8 +8405,8 @@
         </p:nvSpPr>
         <p:spPr>
           <a:xfrm>
-            <a:off x="6583680" y="5431536"/>
-            <a:ext cx="54864" cy="54864"/>
+            <a:off x="4937760" y="4160520"/>
+            <a:ext cx="45720" cy="45720"/>
           </a:xfrm>
           <a:prstGeom prst="rect">
             <a:avLst/>
@@ -8430,24 +8430,24 @@
         </p:nvSpPr>
         <p:spPr>
           <a:xfrm>
-            <a:off x="6720840" y="5340096"/>
-            <a:ext cx="4480560" cy="457200"/>
-          </a:xfrm>
-          <a:prstGeom prst="rect">
-            <a:avLst/>
-          </a:prstGeom>
-          <a:noFill/>
-          <a:ln/>
-        </p:spPr>
-        <p:txBody>
-          <a:bodyPr wrap="square" rtlCol="0" anchor="ctr"/>
-          <a:lstStyle/>
-          <a:p>
-            <a:pPr indent="0" marL="0">
-              <a:buNone/>
-            </a:pPr>
-            <a:r>
-              <a:rPr lang="en-US" sz="1050" dirty="0">
+            <a:off x="5029200" y="4096512"/>
+            <a:ext cx="3246120" cy="347472"/>
+          </a:xfrm>
+          <a:prstGeom prst="rect">
+            <a:avLst/>
+          </a:prstGeom>
+          <a:noFill/>
+          <a:ln/>
+        </p:spPr>
+        <p:txBody>
+          <a:bodyPr wrap="square" rtlCol="0" anchor="ctr"/>
+          <a:lstStyle/>
+          <a:p>
+            <a:pPr indent="0" marL="0">
+              <a:buNone/>
+            </a:pPr>
+            <a:r>
+              <a:rPr lang="en-US" sz="850" dirty="0">
                 <a:solidFill>
                   <a:srgbClr val="334155"/>
                 </a:solidFill>
@@ -8457,7 +8457,7 @@
               </a:rPr>
               <a:t>Nginx logs streamed to CloudWatch for active auditing and retention.</a:t>
             </a:r>
-            <a:endParaRPr lang="en-US" sz="1050" dirty="0"/>
+            <a:endParaRPr lang="en-US" sz="850" dirty="0"/>
           </a:p>
         </p:txBody>
       </p:sp>
@@ -8502,23 +8502,23 @@
         <p:spPr>
           <a:xfrm>
             <a:off x="731520" y="365760"/>
-            <a:ext cx="10515600" cy="640080"/>
-          </a:xfrm>
-          <a:prstGeom prst="rect">
-            <a:avLst/>
-          </a:prstGeom>
-          <a:noFill/>
-          <a:ln/>
-        </p:spPr>
-        <p:txBody>
-          <a:bodyPr wrap="square" rtlCol="0" anchor="ctr"/>
-          <a:lstStyle/>
-          <a:p>
-            <a:pPr indent="0" marL="0">
-              <a:buNone/>
-            </a:pPr>
-            <a:r>
-              <a:rPr lang="en-US" sz="2800" b="1" dirty="0">
+            <a:ext cx="7680960" cy="548640"/>
+          </a:xfrm>
+          <a:prstGeom prst="rect">
+            <a:avLst/>
+          </a:prstGeom>
+          <a:noFill/>
+          <a:ln/>
+        </p:spPr>
+        <p:txBody>
+          <a:bodyPr wrap="square" rtlCol="0" anchor="ctr"/>
+          <a:lstStyle/>
+          <a:p>
+            <a:pPr indent="0" marL="0">
+              <a:buNone/>
+            </a:pPr>
+            <a:r>
+              <a:rPr lang="en-US" sz="2400" b="1" dirty="0">
                 <a:solidFill>
                   <a:srgbClr val="1E3A8A"/>
                 </a:solidFill>
@@ -8528,7 +8528,7 @@
               </a:rPr>
               <a:t>Continuous Integration &amp; Deployment (CI/CD)</a:t>
             </a:r>
-            <a:endParaRPr lang="en-US" sz="2800" dirty="0"/>
+            <a:endParaRPr lang="en-US" sz="2400" dirty="0"/>
           </a:p>
         </p:txBody>
       </p:sp>
@@ -8540,8 +8540,8 @@
         </p:nvSpPr>
         <p:spPr>
           <a:xfrm>
-            <a:off x="731520" y="1051560"/>
-            <a:ext cx="1371600" cy="45720"/>
+            <a:off x="731520" y="914400"/>
+            <a:ext cx="1371600" cy="36576"/>
           </a:xfrm>
           <a:prstGeom prst="rect">
             <a:avLst/>
@@ -8565,7 +8565,7 @@
         </p:nvSpPr>
         <p:spPr>
           <a:xfrm>
-            <a:off x="731520" y="6400800"/>
+            <a:off x="731520" y="4709160"/>
             <a:ext cx="6400800" cy="274320"/>
           </a:xfrm>
           <a:prstGeom prst="rect">
@@ -8582,7 +8582,7 @@
               <a:buNone/>
             </a:pPr>
             <a:r>
-              <a:rPr lang="en-US" sz="900" dirty="0">
+              <a:rPr lang="en-US" sz="850" dirty="0">
                 <a:solidFill>
                   <a:srgbClr val="94A3B8"/>
                 </a:solidFill>
@@ -8592,7 +8592,7 @@
               </a:rPr>
               <a:t>AWS DevOps Capstone Project  |  Student Study Planner</a:t>
             </a:r>
-            <a:endParaRPr lang="en-US" sz="900" dirty="0"/>
+            <a:endParaRPr lang="en-US" sz="850" dirty="0"/>
           </a:p>
         </p:txBody>
       </p:sp>
@@ -8604,7 +8604,7 @@
         </p:nvSpPr>
         <p:spPr>
           <a:xfrm>
-            <a:off x="10515600" y="6400800"/>
+            <a:off x="7498080" y="4709160"/>
             <a:ext cx="914400" cy="274320"/>
           </a:xfrm>
           <a:prstGeom prst="rect">
@@ -8621,7 +8621,7 @@
               <a:buNone/>
             </a:pPr>
             <a:r>
-              <a:rPr lang="en-US" sz="900" dirty="0">
+              <a:rPr lang="en-US" sz="850" dirty="0">
                 <a:solidFill>
                   <a:srgbClr val="94A3B8"/>
                 </a:solidFill>
@@ -8631,7 +8631,7 @@
               </a:rPr>
               <a:t>{slide_num} / {slide_num}</a:t>
             </a:r>
-            <a:endParaRPr lang="en-US" sz="900" dirty="0"/>
+            <a:endParaRPr lang="en-US" sz="850" dirty="0"/>
           </a:p>
         </p:txBody>
       </p:sp>
@@ -8643,24 +8643,24 @@
         </p:nvSpPr>
         <p:spPr>
           <a:xfrm>
-            <a:off x="731520" y="1371600"/>
-            <a:ext cx="5120640" cy="365760"/>
-          </a:xfrm>
-          <a:prstGeom prst="rect">
-            <a:avLst/>
-          </a:prstGeom>
-          <a:noFill/>
-          <a:ln/>
-        </p:spPr>
-        <p:txBody>
-          <a:bodyPr wrap="square" rtlCol="0" anchor="ctr"/>
-          <a:lstStyle/>
-          <a:p>
-            <a:pPr indent="0" marL="0">
-              <a:buNone/>
-            </a:pPr>
-            <a:r>
-              <a:rPr lang="en-US" sz="1600" b="1" dirty="0">
+            <a:off x="731520" y="1188720"/>
+            <a:ext cx="3657600" cy="274320"/>
+          </a:xfrm>
+          <a:prstGeom prst="rect">
+            <a:avLst/>
+          </a:prstGeom>
+          <a:noFill/>
+          <a:ln/>
+        </p:spPr>
+        <p:txBody>
+          <a:bodyPr wrap="square" rtlCol="0" anchor="ctr"/>
+          <a:lstStyle/>
+          <a:p>
+            <a:pPr indent="0" marL="0">
+              <a:buNone/>
+            </a:pPr>
+            <a:r>
+              <a:rPr lang="en-US" sz="1300" b="1" dirty="0">
                 <a:solidFill>
                   <a:srgbClr val="1E3A8A"/>
                 </a:solidFill>
@@ -8670,7 +8670,7 @@
               </a:rPr>
               <a:t>DEPLOYMENT PIPELINE FLOW</a:t>
             </a:r>
-            <a:endParaRPr lang="en-US" sz="1600" dirty="0"/>
+            <a:endParaRPr lang="en-US" sz="1300" dirty="0"/>
           </a:p>
         </p:txBody>
       </p:sp>
@@ -8682,8 +8682,8 @@
         </p:nvSpPr>
         <p:spPr>
           <a:xfrm>
-            <a:off x="731520" y="1828800"/>
-            <a:ext cx="5120640" cy="868680"/>
+            <a:off x="731520" y="1554480"/>
+            <a:ext cx="3657600" cy="640080"/>
           </a:xfrm>
           <a:prstGeom prst="rect">
             <a:avLst/>
@@ -8707,24 +8707,24 @@
         </p:nvSpPr>
         <p:spPr>
           <a:xfrm>
-            <a:off x="914400" y="1874520"/>
-            <a:ext cx="4754880" cy="777240"/>
-          </a:xfrm>
-          <a:prstGeom prst="rect">
-            <a:avLst/>
-          </a:prstGeom>
-          <a:noFill/>
-          <a:ln/>
-        </p:spPr>
-        <p:txBody>
-          <a:bodyPr wrap="square" rtlCol="0" anchor="ctr"/>
-          <a:lstStyle/>
-          <a:p>
-            <a:pPr indent="0" marL="0">
-              <a:buNone/>
-            </a:pPr>
-            <a:r>
-              <a:rPr lang="en-US" sz="1100" dirty="0">
+            <a:off x="822960" y="1572768"/>
+            <a:ext cx="3474720" cy="594360"/>
+          </a:xfrm>
+          <a:prstGeom prst="rect">
+            <a:avLst/>
+          </a:prstGeom>
+          <a:noFill/>
+          <a:ln/>
+        </p:spPr>
+        <p:txBody>
+          <a:bodyPr wrap="square" rtlCol="0" anchor="ctr"/>
+          <a:lstStyle/>
+          <a:p>
+            <a:pPr indent="0" marL="0">
+              <a:buNone/>
+            </a:pPr>
+            <a:r>
+              <a:rPr lang="en-US" sz="850" dirty="0">
                 <a:solidFill>
                   <a:srgbClr val="334155"/>
                 </a:solidFill>
@@ -8734,7 +8734,7 @@
               </a:rPr>
               <a:t>1. Code Push: Developer pushes changes to the main branch.</a:t>
             </a:r>
-            <a:endParaRPr lang="en-US" sz="1100" dirty="0"/>
+            <a:endParaRPr lang="en-US" sz="850" dirty="0"/>
           </a:p>
         </p:txBody>
       </p:sp>
@@ -8746,8 +8746,8 @@
         </p:nvSpPr>
         <p:spPr>
           <a:xfrm>
-            <a:off x="731520" y="2834640"/>
-            <a:ext cx="5120640" cy="868680"/>
+            <a:off x="731520" y="2286000"/>
+            <a:ext cx="3657600" cy="640080"/>
           </a:xfrm>
           <a:prstGeom prst="rect">
             <a:avLst/>
@@ -8771,24 +8771,24 @@
         </p:nvSpPr>
         <p:spPr>
           <a:xfrm>
-            <a:off x="914400" y="2880360"/>
-            <a:ext cx="4754880" cy="777240"/>
-          </a:xfrm>
-          <a:prstGeom prst="rect">
-            <a:avLst/>
-          </a:prstGeom>
-          <a:noFill/>
-          <a:ln/>
-        </p:spPr>
-        <p:txBody>
-          <a:bodyPr wrap="square" rtlCol="0" anchor="ctr"/>
-          <a:lstStyle/>
-          <a:p>
-            <a:pPr indent="0" marL="0">
-              <a:buNone/>
-            </a:pPr>
-            <a:r>
-              <a:rPr lang="en-US" sz="1100" dirty="0">
+            <a:off x="822960" y="2304288"/>
+            <a:ext cx="3474720" cy="594360"/>
+          </a:xfrm>
+          <a:prstGeom prst="rect">
+            <a:avLst/>
+          </a:prstGeom>
+          <a:noFill/>
+          <a:ln/>
+        </p:spPr>
+        <p:txBody>
+          <a:bodyPr wrap="square" rtlCol="0" anchor="ctr"/>
+          <a:lstStyle/>
+          <a:p>
+            <a:pPr indent="0" marL="0">
+              <a:buNone/>
+            </a:pPr>
+            <a:r>
+              <a:rPr lang="en-US" sz="850" dirty="0">
                 <a:solidFill>
                   <a:srgbClr val="334155"/>
                 </a:solidFill>
@@ -8798,7 +8798,7 @@
               </a:rPr>
               <a:t>2. Pipeline Trigger: GitHub Actions runner reads .github/workflows/deploy.yml.</a:t>
             </a:r>
-            <a:endParaRPr lang="en-US" sz="1100" dirty="0"/>
+            <a:endParaRPr lang="en-US" sz="850" dirty="0"/>
           </a:p>
         </p:txBody>
       </p:sp>
@@ -8810,8 +8810,8 @@
         </p:nvSpPr>
         <p:spPr>
           <a:xfrm>
-            <a:off x="731520" y="3840480"/>
-            <a:ext cx="5120640" cy="868680"/>
+            <a:off x="731520" y="3017520"/>
+            <a:ext cx="3657600" cy="640080"/>
           </a:xfrm>
           <a:prstGeom prst="rect">
             <a:avLst/>
@@ -8835,24 +8835,24 @@
         </p:nvSpPr>
         <p:spPr>
           <a:xfrm>
-            <a:off x="914400" y="3886200"/>
-            <a:ext cx="4754880" cy="777240"/>
-          </a:xfrm>
-          <a:prstGeom prst="rect">
-            <a:avLst/>
-          </a:prstGeom>
-          <a:noFill/>
-          <a:ln/>
-        </p:spPr>
-        <p:txBody>
-          <a:bodyPr wrap="square" rtlCol="0" anchor="ctr"/>
-          <a:lstStyle/>
-          <a:p>
-            <a:pPr indent="0" marL="0">
-              <a:buNone/>
-            </a:pPr>
-            <a:r>
-              <a:rPr lang="en-US" sz="1100" dirty="0">
+            <a:off x="822960" y="3035808"/>
+            <a:ext cx="3474720" cy="594360"/>
+          </a:xfrm>
+          <a:prstGeom prst="rect">
+            <a:avLst/>
+          </a:prstGeom>
+          <a:noFill/>
+          <a:ln/>
+        </p:spPr>
+        <p:txBody>
+          <a:bodyPr wrap="square" rtlCol="0" anchor="ctr"/>
+          <a:lstStyle/>
+          <a:p>
+            <a:pPr indent="0" marL="0">
+              <a:buNone/>
+            </a:pPr>
+            <a:r>
+              <a:rPr lang="en-US" sz="850" dirty="0">
                 <a:solidFill>
                   <a:srgbClr val="334155"/>
                 </a:solidFill>
@@ -8862,7 +8862,7 @@
               </a:rPr>
               <a:t>3. Remote SSH: Secure login to EC2 instance using appleboy/ssh-action.</a:t>
             </a:r>
-            <a:endParaRPr lang="en-US" sz="1100" dirty="0"/>
+            <a:endParaRPr lang="en-US" sz="850" dirty="0"/>
           </a:p>
         </p:txBody>
       </p:sp>
@@ -8874,8 +8874,8 @@
         </p:nvSpPr>
         <p:spPr>
           <a:xfrm>
-            <a:off x="731520" y="4846320"/>
-            <a:ext cx="5120640" cy="868680"/>
+            <a:off x="731520" y="3749040"/>
+            <a:ext cx="3657600" cy="640080"/>
           </a:xfrm>
           <a:prstGeom prst="rect">
             <a:avLst/>
@@ -8899,24 +8899,24 @@
         </p:nvSpPr>
         <p:spPr>
           <a:xfrm>
-            <a:off x="914400" y="4892040"/>
-            <a:ext cx="4754880" cy="777240"/>
-          </a:xfrm>
-          <a:prstGeom prst="rect">
-            <a:avLst/>
-          </a:prstGeom>
-          <a:noFill/>
-          <a:ln/>
-        </p:spPr>
-        <p:txBody>
-          <a:bodyPr wrap="square" rtlCol="0" anchor="ctr"/>
-          <a:lstStyle/>
-          <a:p>
-            <a:pPr indent="0" marL="0">
-              <a:buNone/>
-            </a:pPr>
-            <a:r>
-              <a:rPr lang="en-US" sz="1100" dirty="0">
+            <a:off x="822960" y="3767328"/>
+            <a:ext cx="3474720" cy="594360"/>
+          </a:xfrm>
+          <a:prstGeom prst="rect">
+            <a:avLst/>
+          </a:prstGeom>
+          <a:noFill/>
+          <a:ln/>
+        </p:spPr>
+        <p:txBody>
+          <a:bodyPr wrap="square" rtlCol="0" anchor="ctr"/>
+          <a:lstStyle/>
+          <a:p>
+            <a:pPr indent="0" marL="0">
+              <a:buNone/>
+            </a:pPr>
+            <a:r>
+              <a:rPr lang="en-US" sz="850" dirty="0">
                 <a:solidFill>
                   <a:srgbClr val="334155"/>
                 </a:solidFill>
@@ -8926,7 +8926,7 @@
               </a:rPr>
               <a:t>4. Deploy Script: Runs git pull, copies files, checks nginx -t, and reloads Nginx.</a:t>
             </a:r>
-            <a:endParaRPr lang="en-US" sz="1100" dirty="0"/>
+            <a:endParaRPr lang="en-US" sz="850" dirty="0"/>
           </a:p>
         </p:txBody>
       </p:sp>
@@ -8938,24 +8938,24 @@
         </p:nvSpPr>
         <p:spPr>
           <a:xfrm>
-            <a:off x="6309360" y="1371600"/>
-            <a:ext cx="5120640" cy="365760"/>
-          </a:xfrm>
-          <a:prstGeom prst="rect">
-            <a:avLst/>
-          </a:prstGeom>
-          <a:noFill/>
-          <a:ln/>
-        </p:spPr>
-        <p:txBody>
-          <a:bodyPr wrap="square" rtlCol="0" anchor="ctr"/>
-          <a:lstStyle/>
-          <a:p>
-            <a:pPr indent="0" marL="0">
-              <a:buNone/>
-            </a:pPr>
-            <a:r>
-              <a:rPr lang="en-US" sz="1600" b="1" dirty="0">
+            <a:off x="4754880" y="1188720"/>
+            <a:ext cx="3657600" cy="274320"/>
+          </a:xfrm>
+          <a:prstGeom prst="rect">
+            <a:avLst/>
+          </a:prstGeom>
+          <a:noFill/>
+          <a:ln/>
+        </p:spPr>
+        <p:txBody>
+          <a:bodyPr wrap="square" rtlCol="0" anchor="ctr"/>
+          <a:lstStyle/>
+          <a:p>
+            <a:pPr indent="0" marL="0">
+              <a:buNone/>
+            </a:pPr>
+            <a:r>
+              <a:rPr lang="en-US" sz="1300" b="1" dirty="0">
                 <a:solidFill>
                   <a:srgbClr val="1E3A8A"/>
                 </a:solidFill>
@@ -8965,7 +8965,7 @@
               </a:rPr>
               <a:t>PIPELINE ADVANTAGES &amp; SECURITY</a:t>
             </a:r>
-            <a:endParaRPr lang="en-US" sz="1600" dirty="0"/>
+            <a:endParaRPr lang="en-US" sz="1300" dirty="0"/>
           </a:p>
         </p:txBody>
       </p:sp>
@@ -8977,8 +8977,8 @@
         </p:nvSpPr>
         <p:spPr>
           <a:xfrm>
-            <a:off x="6309360" y="1828800"/>
-            <a:ext cx="5120640" cy="1234440"/>
+            <a:off x="4754880" y="1554480"/>
+            <a:ext cx="3657600" cy="868680"/>
           </a:xfrm>
           <a:prstGeom prst="rect">
             <a:avLst/>
@@ -9002,24 +9002,24 @@
         </p:nvSpPr>
         <p:spPr>
           <a:xfrm>
-            <a:off x="6492240" y="1874520"/>
-            <a:ext cx="4754880" cy="320040"/>
-          </a:xfrm>
-          <a:prstGeom prst="rect">
-            <a:avLst/>
-          </a:prstGeom>
-          <a:noFill/>
-          <a:ln/>
-        </p:spPr>
-        <p:txBody>
-          <a:bodyPr wrap="square" rtlCol="0" anchor="ctr"/>
-          <a:lstStyle/>
-          <a:p>
-            <a:pPr indent="0" marL="0">
-              <a:buNone/>
-            </a:pPr>
-            <a:r>
-              <a:rPr lang="en-US" sz="1300" b="1" dirty="0">
+            <a:off x="4846320" y="1572768"/>
+            <a:ext cx="3474720" cy="228600"/>
+          </a:xfrm>
+          <a:prstGeom prst="rect">
+            <a:avLst/>
+          </a:prstGeom>
+          <a:noFill/>
+          <a:ln/>
+        </p:spPr>
+        <p:txBody>
+          <a:bodyPr wrap="square" rtlCol="0" anchor="ctr"/>
+          <a:lstStyle/>
+          <a:p>
+            <a:pPr indent="0" marL="0">
+              <a:buNone/>
+            </a:pPr>
+            <a:r>
+              <a:rPr lang="en-US" sz="1000" b="1" dirty="0">
                 <a:solidFill>
                   <a:srgbClr val="1E3A8A"/>
                 </a:solidFill>
@@ -9029,7 +9029,7 @@
               </a:rPr>
               <a:t>Security-First</a:t>
             </a:r>
-            <a:endParaRPr lang="en-US" sz="1300" dirty="0"/>
+            <a:endParaRPr lang="en-US" sz="1000" dirty="0"/>
           </a:p>
         </p:txBody>
       </p:sp>
@@ -9041,24 +9041,24 @@
         </p:nvSpPr>
         <p:spPr>
           <a:xfrm>
-            <a:off x="6492240" y="2194560"/>
-            <a:ext cx="4754880" cy="822960"/>
-          </a:xfrm>
-          <a:prstGeom prst="rect">
-            <a:avLst/>
-          </a:prstGeom>
-          <a:noFill/>
-          <a:ln/>
-        </p:spPr>
-        <p:txBody>
-          <a:bodyPr wrap="square" rtlCol="0" anchor="ctr"/>
-          <a:lstStyle/>
-          <a:p>
-            <a:pPr indent="0" marL="0">
-              <a:buNone/>
-            </a:pPr>
-            <a:r>
-              <a:rPr lang="en-US" sz="1050" dirty="0">
+            <a:off x="4846320" y="1783080"/>
+            <a:ext cx="3474720" cy="621792"/>
+          </a:xfrm>
+          <a:prstGeom prst="rect">
+            <a:avLst/>
+          </a:prstGeom>
+          <a:noFill/>
+          <a:ln/>
+        </p:spPr>
+        <p:txBody>
+          <a:bodyPr wrap="square" rtlCol="0" anchor="ctr"/>
+          <a:lstStyle/>
+          <a:p>
+            <a:pPr indent="0" marL="0">
+              <a:buNone/>
+            </a:pPr>
+            <a:r>
+              <a:rPr lang="en-US" sz="850" dirty="0">
                 <a:solidFill>
                   <a:srgbClr val="334155"/>
                 </a:solidFill>
@@ -9068,7 +9068,7 @@
               </a:rPr>
               <a:t>All deployment keys (SSH Private Key, Host IP, and Username) are stored encrypted in GitHub Secrets; no credentials ever touch the repository.</a:t>
             </a:r>
-            <a:endParaRPr lang="en-US" sz="1050" dirty="0"/>
+            <a:endParaRPr lang="en-US" sz="850" dirty="0"/>
           </a:p>
         </p:txBody>
       </p:sp>
@@ -9080,8 +9080,8 @@
         </p:nvSpPr>
         <p:spPr>
           <a:xfrm>
-            <a:off x="6309360" y="3200400"/>
-            <a:ext cx="5120640" cy="1234440"/>
+            <a:off x="4754880" y="2514600"/>
+            <a:ext cx="3657600" cy="868680"/>
           </a:xfrm>
           <a:prstGeom prst="rect">
             <a:avLst/>
@@ -9105,24 +9105,24 @@
         </p:nvSpPr>
         <p:spPr>
           <a:xfrm>
-            <a:off x="6492240" y="3246120"/>
-            <a:ext cx="4754880" cy="320040"/>
-          </a:xfrm>
-          <a:prstGeom prst="rect">
-            <a:avLst/>
-          </a:prstGeom>
-          <a:noFill/>
-          <a:ln/>
-        </p:spPr>
-        <p:txBody>
-          <a:bodyPr wrap="square" rtlCol="0" anchor="ctr"/>
-          <a:lstStyle/>
-          <a:p>
-            <a:pPr indent="0" marL="0">
-              <a:buNone/>
-            </a:pPr>
-            <a:r>
-              <a:rPr lang="en-US" sz="1300" b="1" dirty="0">
+            <a:off x="4846320" y="2532888"/>
+            <a:ext cx="3474720" cy="228600"/>
+          </a:xfrm>
+          <a:prstGeom prst="rect">
+            <a:avLst/>
+          </a:prstGeom>
+          <a:noFill/>
+          <a:ln/>
+        </p:spPr>
+        <p:txBody>
+          <a:bodyPr wrap="square" rtlCol="0" anchor="ctr"/>
+          <a:lstStyle/>
+          <a:p>
+            <a:pPr indent="0" marL="0">
+              <a:buNone/>
+            </a:pPr>
+            <a:r>
+              <a:rPr lang="en-US" sz="1000" b="1" dirty="0">
                 <a:solidFill>
                   <a:srgbClr val="1E3A8A"/>
                 </a:solidFill>
@@ -9132,7 +9132,7 @@
               </a:rPr>
               <a:t>Zero Downtime</a:t>
             </a:r>
-            <a:endParaRPr lang="en-US" sz="1300" dirty="0"/>
+            <a:endParaRPr lang="en-US" sz="1000" dirty="0"/>
           </a:p>
         </p:txBody>
       </p:sp>
@@ -9144,24 +9144,24 @@
         </p:nvSpPr>
         <p:spPr>
           <a:xfrm>
-            <a:off x="6492240" y="3566160"/>
-            <a:ext cx="4754880" cy="822960"/>
-          </a:xfrm>
-          <a:prstGeom prst="rect">
-            <a:avLst/>
-          </a:prstGeom>
-          <a:noFill/>
-          <a:ln/>
-        </p:spPr>
-        <p:txBody>
-          <a:bodyPr wrap="square" rtlCol="0" anchor="ctr"/>
-          <a:lstStyle/>
-          <a:p>
-            <a:pPr indent="0" marL="0">
-              <a:buNone/>
-            </a:pPr>
-            <a:r>
-              <a:rPr lang="en-US" sz="1050" dirty="0">
+            <a:off x="4846320" y="2743200"/>
+            <a:ext cx="3474720" cy="621792"/>
+          </a:xfrm>
+          <a:prstGeom prst="rect">
+            <a:avLst/>
+          </a:prstGeom>
+          <a:noFill/>
+          <a:ln/>
+        </p:spPr>
+        <p:txBody>
+          <a:bodyPr wrap="square" rtlCol="0" anchor="ctr"/>
+          <a:lstStyle/>
+          <a:p>
+            <a:pPr indent="0" marL="0">
+              <a:buNone/>
+            </a:pPr>
+            <a:r>
+              <a:rPr lang="en-US" sz="850" dirty="0">
                 <a:solidFill>
                   <a:srgbClr val="334155"/>
                 </a:solidFill>
@@ -9171,7 +9171,7 @@
               </a:rPr>
               <a:t>Nginx reloads its configuration dynamically in milliseconds, meaning active users experience no connection loss or server interruptions.</a:t>
             </a:r>
-            <a:endParaRPr lang="en-US" sz="1050" dirty="0"/>
+            <a:endParaRPr lang="en-US" sz="850" dirty="0"/>
           </a:p>
         </p:txBody>
       </p:sp>
@@ -9183,8 +9183,8 @@
         </p:nvSpPr>
         <p:spPr>
           <a:xfrm>
-            <a:off x="6309360" y="4572000"/>
-            <a:ext cx="5120640" cy="1234440"/>
+            <a:off x="4754880" y="3474720"/>
+            <a:ext cx="3657600" cy="868680"/>
           </a:xfrm>
           <a:prstGeom prst="rect">
             <a:avLst/>
@@ -9208,24 +9208,24 @@
         </p:nvSpPr>
         <p:spPr>
           <a:xfrm>
-            <a:off x="6492240" y="4617720"/>
-            <a:ext cx="4754880" cy="320040"/>
-          </a:xfrm>
-          <a:prstGeom prst="rect">
-            <a:avLst/>
-          </a:prstGeom>
-          <a:noFill/>
-          <a:ln/>
-        </p:spPr>
-        <p:txBody>
-          <a:bodyPr wrap="square" rtlCol="0" anchor="ctr"/>
-          <a:lstStyle/>
-          <a:p>
-            <a:pPr indent="0" marL="0">
-              <a:buNone/>
-            </a:pPr>
-            <a:r>
-              <a:rPr lang="en-US" sz="1300" b="1" dirty="0">
+            <a:off x="4846320" y="3493008"/>
+            <a:ext cx="3474720" cy="228600"/>
+          </a:xfrm>
+          <a:prstGeom prst="rect">
+            <a:avLst/>
+          </a:prstGeom>
+          <a:noFill/>
+          <a:ln/>
+        </p:spPr>
+        <p:txBody>
+          <a:bodyPr wrap="square" rtlCol="0" anchor="ctr"/>
+          <a:lstStyle/>
+          <a:p>
+            <a:pPr indent="0" marL="0">
+              <a:buNone/>
+            </a:pPr>
+            <a:r>
+              <a:rPr lang="en-US" sz="1000" b="1" dirty="0">
                 <a:solidFill>
                   <a:srgbClr val="1E3A8A"/>
                 </a:solidFill>
@@ -9235,7 +9235,7 @@
               </a:rPr>
               <a:t>Consistency &amp; Reliability</a:t>
             </a:r>
-            <a:endParaRPr lang="en-US" sz="1300" dirty="0"/>
+            <a:endParaRPr lang="en-US" sz="1000" dirty="0"/>
           </a:p>
         </p:txBody>
       </p:sp>
@@ -9247,24 +9247,24 @@
         </p:nvSpPr>
         <p:spPr>
           <a:xfrm>
-            <a:off x="6492240" y="4937760"/>
-            <a:ext cx="4754880" cy="822960"/>
-          </a:xfrm>
-          <a:prstGeom prst="rect">
-            <a:avLst/>
-          </a:prstGeom>
-          <a:noFill/>
-          <a:ln/>
-        </p:spPr>
-        <p:txBody>
-          <a:bodyPr wrap="square" rtlCol="0" anchor="ctr"/>
-          <a:lstStyle/>
-          <a:p>
-            <a:pPr indent="0" marL="0">
-              <a:buNone/>
-            </a:pPr>
-            <a:r>
-              <a:rPr lang="en-US" sz="1050" dirty="0">
+            <a:off x="4846320" y="3703320"/>
+            <a:ext cx="3474720" cy="621792"/>
+          </a:xfrm>
+          <a:prstGeom prst="rect">
+            <a:avLst/>
+          </a:prstGeom>
+          <a:noFill/>
+          <a:ln/>
+        </p:spPr>
+        <p:txBody>
+          <a:bodyPr wrap="square" rtlCol="0" anchor="ctr"/>
+          <a:lstStyle/>
+          <a:p>
+            <a:pPr indent="0" marL="0">
+              <a:buNone/>
+            </a:pPr>
+            <a:r>
+              <a:rPr lang="en-US" sz="850" dirty="0">
                 <a:solidFill>
                   <a:srgbClr val="334155"/>
                 </a:solidFill>
@@ -9274,7 +9274,7 @@
               </a:rPr>
               <a:t>Eliminates human error from manual file transfer processes. The server state matches the main branch state exactly after every run.</a:t>
             </a:r>
-            <a:endParaRPr lang="en-US" sz="1050" dirty="0"/>
+            <a:endParaRPr lang="en-US" sz="850" dirty="0"/>
           </a:p>
         </p:txBody>
       </p:sp>
@@ -9319,23 +9319,23 @@
         <p:spPr>
           <a:xfrm>
             <a:off x="731520" y="365760"/>
-            <a:ext cx="10515600" cy="640080"/>
-          </a:xfrm>
-          <a:prstGeom prst="rect">
-            <a:avLst/>
-          </a:prstGeom>
-          <a:noFill/>
-          <a:ln/>
-        </p:spPr>
-        <p:txBody>
-          <a:bodyPr wrap="square" rtlCol="0" anchor="ctr"/>
-          <a:lstStyle/>
-          <a:p>
-            <a:pPr indent="0" marL="0">
-              <a:buNone/>
-            </a:pPr>
-            <a:r>
-              <a:rPr lang="en-US" sz="2800" b="1" dirty="0">
+            <a:ext cx="7680960" cy="548640"/>
+          </a:xfrm>
+          <a:prstGeom prst="rect">
+            <a:avLst/>
+          </a:prstGeom>
+          <a:noFill/>
+          <a:ln/>
+        </p:spPr>
+        <p:txBody>
+          <a:bodyPr wrap="square" rtlCol="0" anchor="ctr"/>
+          <a:lstStyle/>
+          <a:p>
+            <a:pPr indent="0" marL="0">
+              <a:buNone/>
+            </a:pPr>
+            <a:r>
+              <a:rPr lang="en-US" sz="2400" b="1" dirty="0">
                 <a:solidFill>
                   <a:srgbClr val="1E3A8A"/>
                 </a:solidFill>
@@ -9345,7 +9345,7 @@
               </a:rPr>
               <a:t>Project Management &amp; Kanban Board</a:t>
             </a:r>
-            <a:endParaRPr lang="en-US" sz="2800" dirty="0"/>
+            <a:endParaRPr lang="en-US" sz="2400" dirty="0"/>
           </a:p>
         </p:txBody>
       </p:sp>
@@ -9357,8 +9357,8 @@
         </p:nvSpPr>
         <p:spPr>
           <a:xfrm>
-            <a:off x="731520" y="1051560"/>
-            <a:ext cx="1371600" cy="45720"/>
+            <a:off x="731520" y="914400"/>
+            <a:ext cx="1371600" cy="36576"/>
           </a:xfrm>
           <a:prstGeom prst="rect">
             <a:avLst/>
@@ -9382,7 +9382,7 @@
         </p:nvSpPr>
         <p:spPr>
           <a:xfrm>
-            <a:off x="731520" y="6400800"/>
+            <a:off x="731520" y="4709160"/>
             <a:ext cx="6400800" cy="274320"/>
           </a:xfrm>
           <a:prstGeom prst="rect">
@@ -9399,7 +9399,7 @@
               <a:buNone/>
             </a:pPr>
             <a:r>
-              <a:rPr lang="en-US" sz="900" dirty="0">
+              <a:rPr lang="en-US" sz="850" dirty="0">
                 <a:solidFill>
                   <a:srgbClr val="94A3B8"/>
                 </a:solidFill>
@@ -9409,7 +9409,7 @@
               </a:rPr>
               <a:t>AWS DevOps Capstone Project  |  Student Study Planner</a:t>
             </a:r>
-            <a:endParaRPr lang="en-US" sz="900" dirty="0"/>
+            <a:endParaRPr lang="en-US" sz="850" dirty="0"/>
           </a:p>
         </p:txBody>
       </p:sp>
@@ -9421,7 +9421,7 @@
         </p:nvSpPr>
         <p:spPr>
           <a:xfrm>
-            <a:off x="10515600" y="6400800"/>
+            <a:off x="7498080" y="4709160"/>
             <a:ext cx="914400" cy="274320"/>
           </a:xfrm>
           <a:prstGeom prst="rect">
@@ -9438,7 +9438,7 @@
               <a:buNone/>
             </a:pPr>
             <a:r>
-              <a:rPr lang="en-US" sz="900" dirty="0">
+              <a:rPr lang="en-US" sz="850" dirty="0">
                 <a:solidFill>
                   <a:srgbClr val="94A3B8"/>
                 </a:solidFill>
@@ -9448,7 +9448,7 @@
               </a:rPr>
               <a:t>{slide_num} / {slide_num}</a:t>
             </a:r>
-            <a:endParaRPr lang="en-US" sz="900" dirty="0"/>
+            <a:endParaRPr lang="en-US" sz="850" dirty="0"/>
           </a:p>
         </p:txBody>
       </p:sp>
@@ -9460,24 +9460,24 @@
         </p:nvSpPr>
         <p:spPr>
           <a:xfrm>
-            <a:off x="731520" y="1371600"/>
-            <a:ext cx="5120640" cy="365760"/>
-          </a:xfrm>
-          <a:prstGeom prst="rect">
-            <a:avLst/>
-          </a:prstGeom>
-          <a:noFill/>
-          <a:ln/>
-        </p:spPr>
-        <p:txBody>
-          <a:bodyPr wrap="square" rtlCol="0" anchor="ctr"/>
-          <a:lstStyle/>
-          <a:p>
-            <a:pPr indent="0" marL="0">
-              <a:buNone/>
-            </a:pPr>
-            <a:r>
-              <a:rPr lang="en-US" sz="1600" b="1" dirty="0">
+            <a:off x="731520" y="1188720"/>
+            <a:ext cx="3657600" cy="274320"/>
+          </a:xfrm>
+          <a:prstGeom prst="rect">
+            <a:avLst/>
+          </a:prstGeom>
+          <a:noFill/>
+          <a:ln/>
+        </p:spPr>
+        <p:txBody>
+          <a:bodyPr wrap="square" rtlCol="0" anchor="ctr"/>
+          <a:lstStyle/>
+          <a:p>
+            <a:pPr indent="0" marL="0">
+              <a:buNone/>
+            </a:pPr>
+            <a:r>
+              <a:rPr lang="en-US" sz="1300" b="1" dirty="0">
                 <a:solidFill>
                   <a:srgbClr val="1E3A8A"/>
                 </a:solidFill>
@@ -9487,7 +9487,7 @@
               </a:rPr>
               <a:t>TRELLO KANBAN STRUCTURE</a:t>
             </a:r>
-            <a:endParaRPr lang="en-US" sz="1600" dirty="0"/>
+            <a:endParaRPr lang="en-US" sz="1300" dirty="0"/>
           </a:p>
         </p:txBody>
       </p:sp>
@@ -9499,8 +9499,8 @@
         </p:nvSpPr>
         <p:spPr>
           <a:xfrm>
-            <a:off x="731520" y="1828800"/>
-            <a:ext cx="5120640" cy="868680"/>
+            <a:off x="731520" y="1554480"/>
+            <a:ext cx="3657600" cy="640080"/>
           </a:xfrm>
           <a:prstGeom prst="rect">
             <a:avLst/>
@@ -9524,24 +9524,24 @@
         </p:nvSpPr>
         <p:spPr>
           <a:xfrm>
-            <a:off x="914400" y="1874520"/>
-            <a:ext cx="4754880" cy="777240"/>
-          </a:xfrm>
-          <a:prstGeom prst="rect">
-            <a:avLst/>
-          </a:prstGeom>
-          <a:noFill/>
-          <a:ln/>
-        </p:spPr>
-        <p:txBody>
-          <a:bodyPr wrap="square" rtlCol="0" anchor="ctr"/>
-          <a:lstStyle/>
-          <a:p>
-            <a:pPr indent="0" marL="0">
-              <a:buNone/>
-            </a:pPr>
-            <a:r>
-              <a:rPr lang="en-US" sz="1100" b="1" dirty="0">
+            <a:off x="822960" y="1572768"/>
+            <a:ext cx="3474720" cy="594360"/>
+          </a:xfrm>
+          <a:prstGeom prst="rect">
+            <a:avLst/>
+          </a:prstGeom>
+          <a:noFill/>
+          <a:ln/>
+        </p:spPr>
+        <p:txBody>
+          <a:bodyPr wrap="square" rtlCol="0" anchor="ctr"/>
+          <a:lstStyle/>
+          <a:p>
+            <a:pPr indent="0" marL="0">
+              <a:buNone/>
+            </a:pPr>
+            <a:r>
+              <a:rPr lang="en-US" sz="850" b="1" dirty="0">
                 <a:solidFill>
                   <a:srgbClr val="334155"/>
                 </a:solidFill>
@@ -9551,7 +9551,7 @@
               </a:rPr>
               <a:t>Backlog: Planned tasks and configurations not yet started.</a:t>
             </a:r>
-            <a:endParaRPr lang="en-US" sz="1100" dirty="0"/>
+            <a:endParaRPr lang="en-US" sz="850" dirty="0"/>
           </a:p>
         </p:txBody>
       </p:sp>
@@ -9563,8 +9563,8 @@
         </p:nvSpPr>
         <p:spPr>
           <a:xfrm>
-            <a:off x="731520" y="2834640"/>
-            <a:ext cx="5120640" cy="868680"/>
+            <a:off x="731520" y="2286000"/>
+            <a:ext cx="3657600" cy="640080"/>
           </a:xfrm>
           <a:prstGeom prst="rect">
             <a:avLst/>
@@ -9588,24 +9588,24 @@
         </p:nvSpPr>
         <p:spPr>
           <a:xfrm>
-            <a:off x="914400" y="2880360"/>
-            <a:ext cx="4754880" cy="777240"/>
-          </a:xfrm>
-          <a:prstGeom prst="rect">
-            <a:avLst/>
-          </a:prstGeom>
-          <a:noFill/>
-          <a:ln/>
-        </p:spPr>
-        <p:txBody>
-          <a:bodyPr wrap="square" rtlCol="0" anchor="ctr"/>
-          <a:lstStyle/>
-          <a:p>
-            <a:pPr indent="0" marL="0">
-              <a:buNone/>
-            </a:pPr>
-            <a:r>
-              <a:rPr lang="en-US" sz="1100" b="1" dirty="0">
+            <a:off x="822960" y="2304288"/>
+            <a:ext cx="3474720" cy="594360"/>
+          </a:xfrm>
+          <a:prstGeom prst="rect">
+            <a:avLst/>
+          </a:prstGeom>
+          <a:noFill/>
+          <a:ln/>
+        </p:spPr>
+        <p:txBody>
+          <a:bodyPr wrap="square" rtlCol="0" anchor="ctr"/>
+          <a:lstStyle/>
+          <a:p>
+            <a:pPr indent="0" marL="0">
+              <a:buNone/>
+            </a:pPr>
+            <a:r>
+              <a:rPr lang="en-US" sz="850" b="1" dirty="0">
                 <a:solidFill>
                   <a:srgbClr val="334155"/>
                 </a:solidFill>
@@ -9615,7 +9615,7 @@
               </a:rPr>
               <a:t>In Progress: Active development or deployment configurations in progress.</a:t>
             </a:r>
-            <a:endParaRPr lang="en-US" sz="1100" dirty="0"/>
+            <a:endParaRPr lang="en-US" sz="850" dirty="0"/>
           </a:p>
         </p:txBody>
       </p:sp>
@@ -9627,8 +9627,8 @@
         </p:nvSpPr>
         <p:spPr>
           <a:xfrm>
-            <a:off x="731520" y="3840480"/>
-            <a:ext cx="5120640" cy="868680"/>
+            <a:off x="731520" y="3017520"/>
+            <a:ext cx="3657600" cy="640080"/>
           </a:xfrm>
           <a:prstGeom prst="rect">
             <a:avLst/>
@@ -9652,24 +9652,24 @@
         </p:nvSpPr>
         <p:spPr>
           <a:xfrm>
-            <a:off x="914400" y="3886200"/>
-            <a:ext cx="4754880" cy="777240"/>
-          </a:xfrm>
-          <a:prstGeom prst="rect">
-            <a:avLst/>
-          </a:prstGeom>
-          <a:noFill/>
-          <a:ln/>
-        </p:spPr>
-        <p:txBody>
-          <a:bodyPr wrap="square" rtlCol="0" anchor="ctr"/>
-          <a:lstStyle/>
-          <a:p>
-            <a:pPr indent="0" marL="0">
-              <a:buNone/>
-            </a:pPr>
-            <a:r>
-              <a:rPr lang="en-US" sz="1100" b="1" dirty="0">
+            <a:off x="822960" y="3035808"/>
+            <a:ext cx="3474720" cy="594360"/>
+          </a:xfrm>
+          <a:prstGeom prst="rect">
+            <a:avLst/>
+          </a:prstGeom>
+          <a:noFill/>
+          <a:ln/>
+        </p:spPr>
+        <p:txBody>
+          <a:bodyPr wrap="square" rtlCol="0" anchor="ctr"/>
+          <a:lstStyle/>
+          <a:p>
+            <a:pPr indent="0" marL="0">
+              <a:buNone/>
+            </a:pPr>
+            <a:r>
+              <a:rPr lang="en-US" sz="850" b="1" dirty="0">
                 <a:solidFill>
                   <a:srgbClr val="334155"/>
                 </a:solidFill>
@@ -9679,7 +9679,7 @@
               </a:rPr>
               <a:t>Peer Review: Completed tasks waiting for review and approval by other team members.</a:t>
             </a:r>
-            <a:endParaRPr lang="en-US" sz="1100" dirty="0"/>
+            <a:endParaRPr lang="en-US" sz="850" dirty="0"/>
           </a:p>
         </p:txBody>
       </p:sp>
@@ -9691,8 +9691,8 @@
         </p:nvSpPr>
         <p:spPr>
           <a:xfrm>
-            <a:off x="731520" y="4846320"/>
-            <a:ext cx="5120640" cy="868680"/>
+            <a:off x="731520" y="3749040"/>
+            <a:ext cx="3657600" cy="640080"/>
           </a:xfrm>
           <a:prstGeom prst="rect">
             <a:avLst/>
@@ -9716,24 +9716,24 @@
         </p:nvSpPr>
         <p:spPr>
           <a:xfrm>
-            <a:off x="914400" y="4892040"/>
-            <a:ext cx="4754880" cy="777240"/>
-          </a:xfrm>
-          <a:prstGeom prst="rect">
-            <a:avLst/>
-          </a:prstGeom>
-          <a:noFill/>
-          <a:ln/>
-        </p:spPr>
-        <p:txBody>
-          <a:bodyPr wrap="square" rtlCol="0" anchor="ctr"/>
-          <a:lstStyle/>
-          <a:p>
-            <a:pPr indent="0" marL="0">
-              <a:buNone/>
-            </a:pPr>
-            <a:r>
-              <a:rPr lang="en-US" sz="1100" b="1" dirty="0">
+            <a:off x="822960" y="3767328"/>
+            <a:ext cx="3474720" cy="594360"/>
+          </a:xfrm>
+          <a:prstGeom prst="rect">
+            <a:avLst/>
+          </a:prstGeom>
+          <a:noFill/>
+          <a:ln/>
+        </p:spPr>
+        <p:txBody>
+          <a:bodyPr wrap="square" rtlCol="0" anchor="ctr"/>
+          <a:lstStyle/>
+          <a:p>
+            <a:pPr indent="0" marL="0">
+              <a:buNone/>
+            </a:pPr>
+            <a:r>
+              <a:rPr lang="en-US" sz="850" b="1" dirty="0">
                 <a:solidFill>
                   <a:srgbClr val="334155"/>
                 </a:solidFill>
@@ -9743,7 +9743,7 @@
               </a:rPr>
               <a:t>Done: 100% completed tasks, verified, merged, and active on production environment.</a:t>
             </a:r>
-            <a:endParaRPr lang="en-US" sz="1100" dirty="0"/>
+            <a:endParaRPr lang="en-US" sz="850" dirty="0"/>
           </a:p>
         </p:txBody>
       </p:sp>
@@ -9755,24 +9755,24 @@
         </p:nvSpPr>
         <p:spPr>
           <a:xfrm>
-            <a:off x="6309360" y="1371600"/>
-            <a:ext cx="5120640" cy="365760"/>
-          </a:xfrm>
-          <a:prstGeom prst="rect">
-            <a:avLst/>
-          </a:prstGeom>
-          <a:noFill/>
-          <a:ln/>
-        </p:spPr>
-        <p:txBody>
-          <a:bodyPr wrap="square" rtlCol="0" anchor="ctr"/>
-          <a:lstStyle/>
-          <a:p>
-            <a:pPr indent="0" marL="0">
-              <a:buNone/>
-            </a:pPr>
-            <a:r>
-              <a:rPr lang="en-US" sz="1600" b="1" dirty="0">
+            <a:off x="4754880" y="1188720"/>
+            <a:ext cx="3657600" cy="274320"/>
+          </a:xfrm>
+          <a:prstGeom prst="rect">
+            <a:avLst/>
+          </a:prstGeom>
+          <a:noFill/>
+          <a:ln/>
+        </p:spPr>
+        <p:txBody>
+          <a:bodyPr wrap="square" rtlCol="0" anchor="ctr"/>
+          <a:lstStyle/>
+          <a:p>
+            <a:pPr indent="0" marL="0">
+              <a:buNone/>
+            </a:pPr>
+            <a:r>
+              <a:rPr lang="en-US" sz="1300" b="1" dirty="0">
                 <a:solidFill>
                   <a:srgbClr val="1E3A8A"/>
                 </a:solidFill>
@@ -9782,7 +9782,7 @@
               </a:rPr>
               <a:t>SPRINT PROGRESSION BY PHASE</a:t>
             </a:r>
-            <a:endParaRPr lang="en-US" sz="1600" dirty="0"/>
+            <a:endParaRPr lang="en-US" sz="1300" dirty="0"/>
           </a:p>
         </p:txBody>
       </p:sp>
@@ -9794,8 +9794,8 @@
         </p:nvSpPr>
         <p:spPr>
           <a:xfrm>
-            <a:off x="6309360" y="1828800"/>
-            <a:ext cx="5120640" cy="868680"/>
+            <a:off x="4754880" y="1554480"/>
+            <a:ext cx="3657600" cy="640080"/>
           </a:xfrm>
           <a:prstGeom prst="rect">
             <a:avLst/>
@@ -9819,24 +9819,24 @@
         </p:nvSpPr>
         <p:spPr>
           <a:xfrm>
-            <a:off x="6492240" y="1874520"/>
-            <a:ext cx="4754880" cy="274320"/>
-          </a:xfrm>
-          <a:prstGeom prst="rect">
-            <a:avLst/>
-          </a:prstGeom>
-          <a:noFill/>
-          <a:ln/>
-        </p:spPr>
-        <p:txBody>
-          <a:bodyPr wrap="square" rtlCol="0" anchor="ctr"/>
-          <a:lstStyle/>
-          <a:p>
-            <a:pPr indent="0" marL="0">
-              <a:buNone/>
-            </a:pPr>
-            <a:r>
-              <a:rPr lang="en-US" sz="1100" b="1" dirty="0">
+            <a:off x="4846320" y="1572768"/>
+            <a:ext cx="3474720" cy="201168"/>
+          </a:xfrm>
+          <a:prstGeom prst="rect">
+            <a:avLst/>
+          </a:prstGeom>
+          <a:noFill/>
+          <a:ln/>
+        </p:spPr>
+        <p:txBody>
+          <a:bodyPr wrap="square" rtlCol="0" anchor="ctr"/>
+          <a:lstStyle/>
+          <a:p>
+            <a:pPr indent="0" marL="0">
+              <a:buNone/>
+            </a:pPr>
+            <a:r>
+              <a:rPr lang="en-US" sz="900" b="1" dirty="0">
                 <a:solidFill>
                   <a:srgbClr val="1E3A8A"/>
                 </a:solidFill>
@@ -9846,7 +9846,7 @@
               </a:rPr>
               <a:t>Phase 1: Setup &amp; Foundation</a:t>
             </a:r>
-            <a:endParaRPr lang="en-US" sz="1100" dirty="0"/>
+            <a:endParaRPr lang="en-US" sz="900" dirty="0"/>
           </a:p>
         </p:txBody>
       </p:sp>
@@ -9858,24 +9858,24 @@
         </p:nvSpPr>
         <p:spPr>
           <a:xfrm>
-            <a:off x="6492240" y="2148840"/>
-            <a:ext cx="4754880" cy="502920"/>
-          </a:xfrm>
-          <a:prstGeom prst="rect">
-            <a:avLst/>
-          </a:prstGeom>
-          <a:noFill/>
-          <a:ln/>
-        </p:spPr>
-        <p:txBody>
-          <a:bodyPr wrap="square" rtlCol="0" anchor="ctr"/>
-          <a:lstStyle/>
-          <a:p>
-            <a:pPr indent="0" marL="0">
-              <a:buNone/>
-            </a:pPr>
-            <a:r>
-              <a:rPr lang="en-US" sz="950" dirty="0">
+            <a:off x="4846320" y="1783080"/>
+            <a:ext cx="3474720" cy="393192"/>
+          </a:xfrm>
+          <a:prstGeom prst="rect">
+            <a:avLst/>
+          </a:prstGeom>
+          <a:noFill/>
+          <a:ln/>
+        </p:spPr>
+        <p:txBody>
+          <a:bodyPr wrap="square" rtlCol="0" anchor="ctr"/>
+          <a:lstStyle/>
+          <a:p>
+            <a:pPr indent="0" marL="0">
+              <a:buNone/>
+            </a:pPr>
+            <a:r>
+              <a:rPr lang="en-US" sz="800" dirty="0">
                 <a:solidFill>
                   <a:srgbClr val="334155"/>
                 </a:solidFill>
@@ -9885,7 +9885,7 @@
               </a:rPr>
               <a:t>Provisioned basic compute nodes (EC2), security roles (IAM), object storage (S3), and requested TLS certificate.</a:t>
             </a:r>
-            <a:endParaRPr lang="en-US" sz="950" dirty="0"/>
+            <a:endParaRPr lang="en-US" sz="800" dirty="0"/>
           </a:p>
         </p:txBody>
       </p:sp>
@@ -9897,8 +9897,8 @@
         </p:nvSpPr>
         <p:spPr>
           <a:xfrm>
-            <a:off x="6309360" y="2834640"/>
-            <a:ext cx="5120640" cy="868680"/>
+            <a:off x="4754880" y="2286000"/>
+            <a:ext cx="3657600" cy="640080"/>
           </a:xfrm>
           <a:prstGeom prst="rect">
             <a:avLst/>
@@ -9922,24 +9922,24 @@
         </p:nvSpPr>
         <p:spPr>
           <a:xfrm>
-            <a:off x="6492240" y="2880360"/>
-            <a:ext cx="4754880" cy="274320"/>
-          </a:xfrm>
-          <a:prstGeom prst="rect">
-            <a:avLst/>
-          </a:prstGeom>
-          <a:noFill/>
-          <a:ln/>
-        </p:spPr>
-        <p:txBody>
-          <a:bodyPr wrap="square" rtlCol="0" anchor="ctr"/>
-          <a:lstStyle/>
-          <a:p>
-            <a:pPr indent="0" marL="0">
-              <a:buNone/>
-            </a:pPr>
-            <a:r>
-              <a:rPr lang="en-US" sz="1100" b="1" dirty="0">
+            <a:off x="4846320" y="2304288"/>
+            <a:ext cx="3474720" cy="201168"/>
+          </a:xfrm>
+          <a:prstGeom prst="rect">
+            <a:avLst/>
+          </a:prstGeom>
+          <a:noFill/>
+          <a:ln/>
+        </p:spPr>
+        <p:txBody>
+          <a:bodyPr wrap="square" rtlCol="0" anchor="ctr"/>
+          <a:lstStyle/>
+          <a:p>
+            <a:pPr indent="0" marL="0">
+              <a:buNone/>
+            </a:pPr>
+            <a:r>
+              <a:rPr lang="en-US" sz="900" b="1" dirty="0">
                 <a:solidFill>
                   <a:srgbClr val="1E3A8A"/>
                 </a:solidFill>
@@ -9949,7 +9949,7 @@
               </a:rPr>
               <a:t>Phase 2: App &amp; Compute Configuration</a:t>
             </a:r>
-            <a:endParaRPr lang="en-US" sz="1100" dirty="0"/>
+            <a:endParaRPr lang="en-US" sz="900" dirty="0"/>
           </a:p>
         </p:txBody>
       </p:sp>
@@ -9961,24 +9961,24 @@
         </p:nvSpPr>
         <p:spPr>
           <a:xfrm>
-            <a:off x="6492240" y="3154680"/>
-            <a:ext cx="4754880" cy="502920"/>
-          </a:xfrm>
-          <a:prstGeom prst="rect">
-            <a:avLst/>
-          </a:prstGeom>
-          <a:noFill/>
-          <a:ln/>
-        </p:spPr>
-        <p:txBody>
-          <a:bodyPr wrap="square" rtlCol="0" anchor="ctr"/>
-          <a:lstStyle/>
-          <a:p>
-            <a:pPr indent="0" marL="0">
-              <a:buNone/>
-            </a:pPr>
-            <a:r>
-              <a:rPr lang="en-US" sz="950" dirty="0">
+            <a:off x="4846320" y="2514600"/>
+            <a:ext cx="3474720" cy="393192"/>
+          </a:xfrm>
+          <a:prstGeom prst="rect">
+            <a:avLst/>
+          </a:prstGeom>
+          <a:noFill/>
+          <a:ln/>
+        </p:spPr>
+        <p:txBody>
+          <a:bodyPr wrap="square" rtlCol="0" anchor="ctr"/>
+          <a:lstStyle/>
+          <a:p>
+            <a:pPr indent="0" marL="0">
+              <a:buNone/>
+            </a:pPr>
+            <a:r>
+              <a:rPr lang="en-US" sz="800" dirty="0">
                 <a:solidFill>
                   <a:srgbClr val="334155"/>
                 </a:solidFill>
@@ -9988,7 +9988,7 @@
               </a:rPr>
               <a:t>Configured Nginx web server, Application Load Balancer routing, Target Group health checks, and Auto Scaling templates.</a:t>
             </a:r>
-            <a:endParaRPr lang="en-US" sz="950" dirty="0"/>
+            <a:endParaRPr lang="en-US" sz="800" dirty="0"/>
           </a:p>
         </p:txBody>
       </p:sp>
@@ -10000,8 +10000,8 @@
         </p:nvSpPr>
         <p:spPr>
           <a:xfrm>
-            <a:off x="6309360" y="3840480"/>
-            <a:ext cx="5120640" cy="868680"/>
+            <a:off x="4754880" y="3017520"/>
+            <a:ext cx="3657600" cy="640080"/>
           </a:xfrm>
           <a:prstGeom prst="rect">
             <a:avLst/>
@@ -10025,24 +10025,24 @@
         </p:nvSpPr>
         <p:spPr>
           <a:xfrm>
-            <a:off x="6492240" y="3886200"/>
-            <a:ext cx="4754880" cy="274320"/>
-          </a:xfrm>
-          <a:prstGeom prst="rect">
-            <a:avLst/>
-          </a:prstGeom>
-          <a:noFill/>
-          <a:ln/>
-        </p:spPr>
-        <p:txBody>
-          <a:bodyPr wrap="square" rtlCol="0" anchor="ctr"/>
-          <a:lstStyle/>
-          <a:p>
-            <a:pPr indent="0" marL="0">
-              <a:buNone/>
-            </a:pPr>
-            <a:r>
-              <a:rPr lang="en-US" sz="1100" b="1" dirty="0">
+            <a:off x="4846320" y="3035808"/>
+            <a:ext cx="3474720" cy="201168"/>
+          </a:xfrm>
+          <a:prstGeom prst="rect">
+            <a:avLst/>
+          </a:prstGeom>
+          <a:noFill/>
+          <a:ln/>
+        </p:spPr>
+        <p:txBody>
+          <a:bodyPr wrap="square" rtlCol="0" anchor="ctr"/>
+          <a:lstStyle/>
+          <a:p>
+            <a:pPr indent="0" marL="0">
+              <a:buNone/>
+            </a:pPr>
+            <a:r>
+              <a:rPr lang="en-US" sz="900" b="1" dirty="0">
                 <a:solidFill>
                   <a:srgbClr val="1E3A8A"/>
                 </a:solidFill>
@@ -10052,7 +10052,7 @@
               </a:rPr>
               <a:t>Phase 3: CDN &amp; Custom Domain Go-Live</a:t>
             </a:r>
-            <a:endParaRPr lang="en-US" sz="1100" dirty="0"/>
+            <a:endParaRPr lang="en-US" sz="900" dirty="0"/>
           </a:p>
         </p:txBody>
       </p:sp>
@@ -10064,24 +10064,24 @@
         </p:nvSpPr>
         <p:spPr>
           <a:xfrm>
-            <a:off x="6492240" y="4160520"/>
-            <a:ext cx="4754880" cy="502920"/>
-          </a:xfrm>
-          <a:prstGeom prst="rect">
-            <a:avLst/>
-          </a:prstGeom>
-          <a:noFill/>
-          <a:ln/>
-        </p:spPr>
-        <p:txBody>
-          <a:bodyPr wrap="square" rtlCol="0" anchor="ctr"/>
-          <a:lstStyle/>
-          <a:p>
-            <a:pPr indent="0" marL="0">
-              <a:buNone/>
-            </a:pPr>
-            <a:r>
-              <a:rPr lang="en-US" sz="950" dirty="0">
+            <a:off x="4846320" y="3246120"/>
+            <a:ext cx="3474720" cy="393192"/>
+          </a:xfrm>
+          <a:prstGeom prst="rect">
+            <a:avLst/>
+          </a:prstGeom>
+          <a:noFill/>
+          <a:ln/>
+        </p:spPr>
+        <p:txBody>
+          <a:bodyPr wrap="square" rtlCol="0" anchor="ctr"/>
+          <a:lstStyle/>
+          <a:p>
+            <a:pPr indent="0" marL="0">
+              <a:buNone/>
+            </a:pPr>
+            <a:r>
+              <a:rPr lang="en-US" sz="800" dirty="0">
                 <a:solidFill>
                   <a:srgbClr val="334155"/>
                 </a:solidFill>
@@ -10091,7 +10091,7 @@
               </a:rPr>
               <a:t>Deployed CloudFront distribution, Namecheap DNS record routing, and HTTPS redirect verification.</a:t>
             </a:r>
-            <a:endParaRPr lang="en-US" sz="950" dirty="0"/>
+            <a:endParaRPr lang="en-US" sz="800" dirty="0"/>
           </a:p>
         </p:txBody>
       </p:sp>
@@ -10103,8 +10103,8 @@
         </p:nvSpPr>
         <p:spPr>
           <a:xfrm>
-            <a:off x="6309360" y="4846320"/>
-            <a:ext cx="5120640" cy="868680"/>
+            <a:off x="4754880" y="3749040"/>
+            <a:ext cx="3657600" cy="640080"/>
           </a:xfrm>
           <a:prstGeom prst="rect">
             <a:avLst/>
@@ -10128,24 +10128,24 @@
         </p:nvSpPr>
         <p:spPr>
           <a:xfrm>
-            <a:off x="6492240" y="4892040"/>
-            <a:ext cx="4754880" cy="274320"/>
-          </a:xfrm>
-          <a:prstGeom prst="rect">
-            <a:avLst/>
-          </a:prstGeom>
-          <a:noFill/>
-          <a:ln/>
-        </p:spPr>
-        <p:txBody>
-          <a:bodyPr wrap="square" rtlCol="0" anchor="ctr"/>
-          <a:lstStyle/>
-          <a:p>
-            <a:pPr indent="0" marL="0">
-              <a:buNone/>
-            </a:pPr>
-            <a:r>
-              <a:rPr lang="en-US" sz="1100" b="1" dirty="0">
+            <a:off x="4846320" y="3767328"/>
+            <a:ext cx="3474720" cy="201168"/>
+          </a:xfrm>
+          <a:prstGeom prst="rect">
+            <a:avLst/>
+          </a:prstGeom>
+          <a:noFill/>
+          <a:ln/>
+        </p:spPr>
+        <p:txBody>
+          <a:bodyPr wrap="square" rtlCol="0" anchor="ctr"/>
+          <a:lstStyle/>
+          <a:p>
+            <a:pPr indent="0" marL="0">
+              <a:buNone/>
+            </a:pPr>
+            <a:r>
+              <a:rPr lang="en-US" sz="900" b="1" dirty="0">
                 <a:solidFill>
                   <a:srgbClr val="1E3A8A"/>
                 </a:solidFill>
@@ -10155,7 +10155,7 @@
               </a:rPr>
               <a:t>Phase 4: Observation &amp; CI/CD Pipeline</a:t>
             </a:r>
-            <a:endParaRPr lang="en-US" sz="1100" dirty="0"/>
+            <a:endParaRPr lang="en-US" sz="900" dirty="0"/>
           </a:p>
         </p:txBody>
       </p:sp>
@@ -10167,24 +10167,24 @@
         </p:nvSpPr>
         <p:spPr>
           <a:xfrm>
-            <a:off x="6492240" y="5166360"/>
-            <a:ext cx="4754880" cy="502920"/>
-          </a:xfrm>
-          <a:prstGeom prst="rect">
-            <a:avLst/>
-          </a:prstGeom>
-          <a:noFill/>
-          <a:ln/>
-        </p:spPr>
-        <p:txBody>
-          <a:bodyPr wrap="square" rtlCol="0" anchor="ctr"/>
-          <a:lstStyle/>
-          <a:p>
-            <a:pPr indent="0" marL="0">
-              <a:buNone/>
-            </a:pPr>
-            <a:r>
-              <a:rPr lang="en-US" sz="950" dirty="0">
+            <a:off x="4846320" y="3977640"/>
+            <a:ext cx="3474720" cy="393192"/>
+          </a:xfrm>
+          <a:prstGeom prst="rect">
+            <a:avLst/>
+          </a:prstGeom>
+          <a:noFill/>
+          <a:ln/>
+        </p:spPr>
+        <p:txBody>
+          <a:bodyPr wrap="square" rtlCol="0" anchor="ctr"/>
+          <a:lstStyle/>
+          <a:p>
+            <a:pPr indent="0" marL="0">
+              <a:buNone/>
+            </a:pPr>
+            <a:r>
+              <a:rPr lang="en-US" sz="800" dirty="0">
                 <a:solidFill>
                   <a:srgbClr val="334155"/>
                 </a:solidFill>
@@ -10194,7 +10194,7 @@
               </a:rPr>
               <a:t>Wrote GitHub Actions workflow script, attached CloudWatch logs/alarms, and configured Budget monitoring limits.</a:t>
             </a:r>
-            <a:endParaRPr lang="en-US" sz="950" dirty="0"/>
+            <a:endParaRPr lang="en-US" sz="800" dirty="0"/>
           </a:p>
         </p:txBody>
       </p:sp>
@@ -10239,23 +10239,23 @@
         <p:spPr>
           <a:xfrm>
             <a:off x="731520" y="365760"/>
-            <a:ext cx="10515600" cy="640080"/>
-          </a:xfrm>
-          <a:prstGeom prst="rect">
-            <a:avLst/>
-          </a:prstGeom>
-          <a:noFill/>
-          <a:ln/>
-        </p:spPr>
-        <p:txBody>
-          <a:bodyPr wrap="square" rtlCol="0" anchor="ctr"/>
-          <a:lstStyle/>
-          <a:p>
-            <a:pPr indent="0" marL="0">
-              <a:buNone/>
-            </a:pPr>
-            <a:r>
-              <a:rPr lang="en-US" sz="2800" b="1" dirty="0">
+            <a:ext cx="7680960" cy="548640"/>
+          </a:xfrm>
+          <a:prstGeom prst="rect">
+            <a:avLst/>
+          </a:prstGeom>
+          <a:noFill/>
+          <a:ln/>
+        </p:spPr>
+        <p:txBody>
+          <a:bodyPr wrap="square" rtlCol="0" anchor="ctr"/>
+          <a:lstStyle/>
+          <a:p>
+            <a:pPr indent="0" marL="0">
+              <a:buNone/>
+            </a:pPr>
+            <a:r>
+              <a:rPr lang="en-US" sz="2400" b="1" dirty="0">
                 <a:solidFill>
                   <a:srgbClr val="1E3A8A"/>
                 </a:solidFill>
@@ -10265,7 +10265,7 @@
               </a:rPr>
               <a:t>Trello Kanban Board Showcase</a:t>
             </a:r>
-            <a:endParaRPr lang="en-US" sz="2800" dirty="0"/>
+            <a:endParaRPr lang="en-US" sz="2400" dirty="0"/>
           </a:p>
         </p:txBody>
       </p:sp>
@@ -10277,8 +10277,8 @@
         </p:nvSpPr>
         <p:spPr>
           <a:xfrm>
-            <a:off x="731520" y="1051560"/>
-            <a:ext cx="1371600" cy="45720"/>
+            <a:off x="731520" y="914400"/>
+            <a:ext cx="1371600" cy="36576"/>
           </a:xfrm>
           <a:prstGeom prst="rect">
             <a:avLst/>
@@ -10302,7 +10302,7 @@
         </p:nvSpPr>
         <p:spPr>
           <a:xfrm>
-            <a:off x="731520" y="6400800"/>
+            <a:off x="731520" y="4709160"/>
             <a:ext cx="6400800" cy="274320"/>
           </a:xfrm>
           <a:prstGeom prst="rect">
@@ -10319,7 +10319,7 @@
               <a:buNone/>
             </a:pPr>
             <a:r>
-              <a:rPr lang="en-US" sz="900" dirty="0">
+              <a:rPr lang="en-US" sz="850" dirty="0">
                 <a:solidFill>
                   <a:srgbClr val="94A3B8"/>
                 </a:solidFill>
@@ -10329,7 +10329,7 @@
               </a:rPr>
               <a:t>AWS DevOps Capstone Project  |  Student Study Planner</a:t>
             </a:r>
-            <a:endParaRPr lang="en-US" sz="900" dirty="0"/>
+            <a:endParaRPr lang="en-US" sz="850" dirty="0"/>
           </a:p>
         </p:txBody>
       </p:sp>
@@ -10341,7 +10341,7 @@
         </p:nvSpPr>
         <p:spPr>
           <a:xfrm>
-            <a:off x="10515600" y="6400800"/>
+            <a:off x="7498080" y="4709160"/>
             <a:ext cx="914400" cy="274320"/>
           </a:xfrm>
           <a:prstGeom prst="rect">
@@ -10358,7 +10358,7 @@
               <a:buNone/>
             </a:pPr>
             <a:r>
-              <a:rPr lang="en-US" sz="900" dirty="0">
+              <a:rPr lang="en-US" sz="850" dirty="0">
                 <a:solidFill>
                   <a:srgbClr val="94A3B8"/>
                 </a:solidFill>
@@ -10368,7 +10368,7 @@
               </a:rPr>
               <a:t>{slide_num} / {slide_num}</a:t>
             </a:r>
-            <a:endParaRPr lang="en-US" sz="900" dirty="0"/>
+            <a:endParaRPr lang="en-US" sz="850" dirty="0"/>
           </a:p>
         </p:txBody>
       </p:sp>
@@ -10388,8 +10388,8 @@
         </p:blipFill>
         <p:spPr>
           <a:xfrm>
-            <a:off x="1517904" y="1371600"/>
-            <a:ext cx="9144000" cy="4572000"/>
+            <a:off x="1188720" y="1188720"/>
+            <a:ext cx="6766560" cy="3383280"/>
           </a:xfrm>
           <a:prstGeom prst="rect">
             <a:avLst/>
@@ -10437,23 +10437,23 @@
         <p:spPr>
           <a:xfrm>
             <a:off x="731520" y="365760"/>
-            <a:ext cx="10515600" cy="640080"/>
-          </a:xfrm>
-          <a:prstGeom prst="rect">
-            <a:avLst/>
-          </a:prstGeom>
-          <a:noFill/>
-          <a:ln/>
-        </p:spPr>
-        <p:txBody>
-          <a:bodyPr wrap="square" rtlCol="0" anchor="ctr"/>
-          <a:lstStyle/>
-          <a:p>
-            <a:pPr indent="0" marL="0">
-              <a:buNone/>
-            </a:pPr>
-            <a:r>
-              <a:rPr lang="en-US" sz="2800" b="1" dirty="0">
+            <a:ext cx="7680960" cy="548640"/>
+          </a:xfrm>
+          <a:prstGeom prst="rect">
+            <a:avLst/>
+          </a:prstGeom>
+          <a:noFill/>
+          <a:ln/>
+        </p:spPr>
+        <p:txBody>
+          <a:bodyPr wrap="square" rtlCol="0" anchor="ctr"/>
+          <a:lstStyle/>
+          <a:p>
+            <a:pPr indent="0" marL="0">
+              <a:buNone/>
+            </a:pPr>
+            <a:r>
+              <a:rPr lang="en-US" sz="2400" b="1" dirty="0">
                 <a:solidFill>
                   <a:srgbClr val="1E3A8A"/>
                 </a:solidFill>
@@ -10463,7 +10463,7 @@
               </a:rPr>
               <a:t>Live Application Demo</a:t>
             </a:r>
-            <a:endParaRPr lang="en-US" sz="2800" dirty="0"/>
+            <a:endParaRPr lang="en-US" sz="2400" dirty="0"/>
           </a:p>
         </p:txBody>
       </p:sp>
@@ -10475,8 +10475,8 @@
         </p:nvSpPr>
         <p:spPr>
           <a:xfrm>
-            <a:off x="731520" y="1051560"/>
-            <a:ext cx="1371600" cy="45720"/>
+            <a:off x="731520" y="914400"/>
+            <a:ext cx="1371600" cy="36576"/>
           </a:xfrm>
           <a:prstGeom prst="rect">
             <a:avLst/>
@@ -10500,7 +10500,7 @@
         </p:nvSpPr>
         <p:spPr>
           <a:xfrm>
-            <a:off x="731520" y="6400800"/>
+            <a:off x="731520" y="4709160"/>
             <a:ext cx="6400800" cy="274320"/>
           </a:xfrm>
           <a:prstGeom prst="rect">
@@ -10517,7 +10517,7 @@
               <a:buNone/>
             </a:pPr>
             <a:r>
-              <a:rPr lang="en-US" sz="900" dirty="0">
+              <a:rPr lang="en-US" sz="850" dirty="0">
                 <a:solidFill>
                   <a:srgbClr val="94A3B8"/>
                 </a:solidFill>
@@ -10527,7 +10527,7 @@
               </a:rPr>
               <a:t>AWS DevOps Capstone Project  |  Student Study Planner</a:t>
             </a:r>
-            <a:endParaRPr lang="en-US" sz="900" dirty="0"/>
+            <a:endParaRPr lang="en-US" sz="850" dirty="0"/>
           </a:p>
         </p:txBody>
       </p:sp>
@@ -10539,7 +10539,7 @@
         </p:nvSpPr>
         <p:spPr>
           <a:xfrm>
-            <a:off x="10515600" y="6400800"/>
+            <a:off x="7498080" y="4709160"/>
             <a:ext cx="914400" cy="274320"/>
           </a:xfrm>
           <a:prstGeom prst="rect">
@@ -10556,7 +10556,7 @@
               <a:buNone/>
             </a:pPr>
             <a:r>
-              <a:rPr lang="en-US" sz="900" dirty="0">
+              <a:rPr lang="en-US" sz="850" dirty="0">
                 <a:solidFill>
                   <a:srgbClr val="94A3B8"/>
                 </a:solidFill>
@@ -10566,7 +10566,7 @@
               </a:rPr>
               <a:t>{slide_num} / {slide_num}</a:t>
             </a:r>
-            <a:endParaRPr lang="en-US" sz="900" dirty="0"/>
+            <a:endParaRPr lang="en-US" sz="850" dirty="0"/>
           </a:p>
         </p:txBody>
       </p:sp>
@@ -10578,8 +10578,8 @@
         </p:nvSpPr>
         <p:spPr>
           <a:xfrm>
-            <a:off x="731520" y="1371600"/>
-            <a:ext cx="10725912" cy="914400"/>
+            <a:off x="731520" y="1188720"/>
+            <a:ext cx="7680960" cy="731520"/>
           </a:xfrm>
           <a:prstGeom prst="rect">
             <a:avLst/>
@@ -10603,8 +10603,8 @@
         </p:nvSpPr>
         <p:spPr>
           <a:xfrm>
-            <a:off x="731520" y="1463040"/>
-            <a:ext cx="10725912" cy="228600"/>
+            <a:off x="731520" y="1234440"/>
+            <a:ext cx="7680960" cy="182880"/>
           </a:xfrm>
           <a:prstGeom prst="rect">
             <a:avLst/>
@@ -10620,7 +10620,7 @@
               <a:buNone/>
             </a:pPr>
             <a:r>
-              <a:rPr lang="en-US" sz="1100" b="1" dirty="0">
+              <a:rPr lang="en-US" sz="900" b="1" dirty="0">
                 <a:solidFill>
                   <a:srgbClr val="0EA5E9"/>
                 </a:solidFill>
@@ -10630,7 +10630,7 @@
               </a:rPr>
               <a:t>SECURE PRODUCTION DEPLOYMENT URL</a:t>
             </a:r>
-            <a:endParaRPr lang="en-US" sz="1100" dirty="0"/>
+            <a:endParaRPr lang="en-US" sz="900" dirty="0"/>
           </a:p>
         </p:txBody>
       </p:sp>
@@ -10642,8 +10642,8 @@
         </p:nvSpPr>
         <p:spPr>
           <a:xfrm>
-            <a:off x="731520" y="1691640"/>
-            <a:ext cx="10725912" cy="457200"/>
+            <a:off x="731520" y="1417320"/>
+            <a:ext cx="7680960" cy="365760"/>
           </a:xfrm>
           <a:prstGeom prst="rect">
             <a:avLst/>
@@ -10659,7 +10659,7 @@
               <a:buNone/>
             </a:pPr>
             <a:r>
-              <a:rPr lang="en-US" sz="2400" b="1" dirty="0">
+              <a:rPr lang="en-US" sz="1800" b="1" dirty="0">
                 <a:solidFill>
                   <a:srgbClr val="1E3A8A"/>
                 </a:solidFill>
@@ -10669,7 +10669,7 @@
               </a:rPr>
               <a:t>https://www.studentstudyplannerxyz.xyz/</a:t>
             </a:r>
-            <a:endParaRPr lang="en-US" sz="2400" dirty="0"/>
+            <a:endParaRPr lang="en-US" sz="1800" dirty="0"/>
           </a:p>
         </p:txBody>
       </p:sp>
@@ -10681,24 +10681,24 @@
         </p:nvSpPr>
         <p:spPr>
           <a:xfrm>
-            <a:off x="731520" y="2560320"/>
-            <a:ext cx="5120640" cy="320040"/>
-          </a:xfrm>
-          <a:prstGeom prst="rect">
-            <a:avLst/>
-          </a:prstGeom>
-          <a:noFill/>
-          <a:ln/>
-        </p:spPr>
-        <p:txBody>
-          <a:bodyPr wrap="square" rtlCol="0" anchor="ctr"/>
-          <a:lstStyle/>
-          <a:p>
-            <a:pPr indent="0" marL="0">
-              <a:buNone/>
-            </a:pPr>
-            <a:r>
-              <a:rPr lang="en-US" sz="1400" b="1" dirty="0">
+            <a:off x="731520" y="2103120"/>
+            <a:ext cx="3657600" cy="274320"/>
+          </a:xfrm>
+          <a:prstGeom prst="rect">
+            <a:avLst/>
+          </a:prstGeom>
+          <a:noFill/>
+          <a:ln/>
+        </p:spPr>
+        <p:txBody>
+          <a:bodyPr wrap="square" rtlCol="0" anchor="ctr"/>
+          <a:lstStyle/>
+          <a:p>
+            <a:pPr indent="0" marL="0">
+              <a:buNone/>
+            </a:pPr>
+            <a:r>
+              <a:rPr lang="en-US" sz="1200" b="1" dirty="0">
                 <a:solidFill>
                   <a:srgbClr val="1E3A8A"/>
                 </a:solidFill>
@@ -10708,7 +10708,7 @@
               </a:rPr>
               <a:t>STEP-BY-STEP LIVE DEMO GUIDE</a:t>
             </a:r>
-            <a:endParaRPr lang="en-US" sz="1400" dirty="0"/>
+            <a:endParaRPr lang="en-US" sz="1200" dirty="0"/>
           </a:p>
         </p:txBody>
       </p:sp>
@@ -10720,8 +10720,8 @@
         </p:nvSpPr>
         <p:spPr>
           <a:xfrm>
-            <a:off x="731520" y="2971800"/>
-            <a:ext cx="5120640" cy="566928"/>
+            <a:off x="731520" y="2423160"/>
+            <a:ext cx="3657600" cy="384048"/>
           </a:xfrm>
           <a:prstGeom prst="rect">
             <a:avLst/>
@@ -10745,24 +10745,24 @@
         </p:nvSpPr>
         <p:spPr>
           <a:xfrm>
-            <a:off x="868680" y="2999232"/>
-            <a:ext cx="4846320" cy="502920"/>
-          </a:xfrm>
-          <a:prstGeom prst="rect">
-            <a:avLst/>
-          </a:prstGeom>
-          <a:noFill/>
-          <a:ln/>
-        </p:spPr>
-        <p:txBody>
-          <a:bodyPr wrap="square" rtlCol="0" anchor="ctr"/>
-          <a:lstStyle/>
-          <a:p>
-            <a:pPr indent="0" marL="0">
-              <a:buNone/>
-            </a:pPr>
-            <a:r>
-              <a:rPr lang="en-US" sz="1000" dirty="0">
+            <a:off x="822960" y="2441448"/>
+            <a:ext cx="3474720" cy="347472"/>
+          </a:xfrm>
+          <a:prstGeom prst="rect">
+            <a:avLst/>
+          </a:prstGeom>
+          <a:noFill/>
+          <a:ln/>
+        </p:spPr>
+        <p:txBody>
+          <a:bodyPr wrap="square" rtlCol="0" anchor="ctr"/>
+          <a:lstStyle/>
+          <a:p>
+            <a:pPr indent="0" marL="0">
+              <a:buNone/>
+            </a:pPr>
+            <a:r>
+              <a:rPr lang="en-US" sz="800" dirty="0">
                 <a:solidFill>
                   <a:srgbClr val="334155"/>
                 </a:solidFill>
@@ -10772,7 +10772,7 @@
               </a:rPr>
               <a:t>1. SSL/TLS Verification: Check lock icon in the browser address bar to show DNS-validated certificate (issued via AWS ACM).</a:t>
             </a:r>
-            <a:endParaRPr lang="en-US" sz="1000" dirty="0"/>
+            <a:endParaRPr lang="en-US" sz="800" dirty="0"/>
           </a:p>
         </p:txBody>
       </p:sp>
@@ -10784,8 +10784,8 @@
         </p:nvSpPr>
         <p:spPr>
           <a:xfrm>
-            <a:off x="731520" y="3611880"/>
-            <a:ext cx="5120640" cy="566928"/>
+            <a:off x="731520" y="2862072"/>
+            <a:ext cx="3657600" cy="384048"/>
           </a:xfrm>
           <a:prstGeom prst="rect">
             <a:avLst/>
@@ -10809,24 +10809,24 @@
         </p:nvSpPr>
         <p:spPr>
           <a:xfrm>
-            <a:off x="868680" y="3639312"/>
-            <a:ext cx="4846320" cy="502920"/>
-          </a:xfrm>
-          <a:prstGeom prst="rect">
-            <a:avLst/>
-          </a:prstGeom>
-          <a:noFill/>
-          <a:ln/>
-        </p:spPr>
-        <p:txBody>
-          <a:bodyPr wrap="square" rtlCol="0" anchor="ctr"/>
-          <a:lstStyle/>
-          <a:p>
-            <a:pPr indent="0" marL="0">
-              <a:buNone/>
-            </a:pPr>
-            <a:r>
-              <a:rPr lang="en-US" sz="1000" dirty="0">
+            <a:off x="822960" y="2880360"/>
+            <a:ext cx="3474720" cy="347472"/>
+          </a:xfrm>
+          <a:prstGeom prst="rect">
+            <a:avLst/>
+          </a:prstGeom>
+          <a:noFill/>
+          <a:ln/>
+        </p:spPr>
+        <p:txBody>
+          <a:bodyPr wrap="square" rtlCol="0" anchor="ctr"/>
+          <a:lstStyle/>
+          <a:p>
+            <a:pPr indent="0" marL="0">
+              <a:buNone/>
+            </a:pPr>
+            <a:r>
+              <a:rPr lang="en-US" sz="800" dirty="0">
                 <a:solidFill>
                   <a:srgbClr val="334155"/>
                 </a:solidFill>
@@ -10836,7 +10836,7 @@
               </a:rPr>
               <a:t>2. Functional Testing: Enter study tasks with subjects, set urgency priorities, and specify academic due dates.</a:t>
             </a:r>
-            <a:endParaRPr lang="en-US" sz="1000" dirty="0"/>
+            <a:endParaRPr lang="en-US" sz="800" dirty="0"/>
           </a:p>
         </p:txBody>
       </p:sp>
@@ -10848,8 +10848,8 @@
         </p:nvSpPr>
         <p:spPr>
           <a:xfrm>
-            <a:off x="731520" y="4251960"/>
-            <a:ext cx="5120640" cy="566928"/>
+            <a:off x="731520" y="3300984"/>
+            <a:ext cx="3657600" cy="384048"/>
           </a:xfrm>
           <a:prstGeom prst="rect">
             <a:avLst/>
@@ -10873,24 +10873,24 @@
         </p:nvSpPr>
         <p:spPr>
           <a:xfrm>
-            <a:off x="868680" y="4279392"/>
-            <a:ext cx="4846320" cy="502920"/>
-          </a:xfrm>
-          <a:prstGeom prst="rect">
-            <a:avLst/>
-          </a:prstGeom>
-          <a:noFill/>
-          <a:ln/>
-        </p:spPr>
-        <p:txBody>
-          <a:bodyPr wrap="square" rtlCol="0" anchor="ctr"/>
-          <a:lstStyle/>
-          <a:p>
-            <a:pPr indent="0" marL="0">
-              <a:buNone/>
-            </a:pPr>
-            <a:r>
-              <a:rPr lang="en-US" sz="1000" dirty="0">
+            <a:off x="822960" y="3319272"/>
+            <a:ext cx="3474720" cy="347472"/>
+          </a:xfrm>
+          <a:prstGeom prst="rect">
+            <a:avLst/>
+          </a:prstGeom>
+          <a:noFill/>
+          <a:ln/>
+        </p:spPr>
+        <p:txBody>
+          <a:bodyPr wrap="square" rtlCol="0" anchor="ctr"/>
+          <a:lstStyle/>
+          <a:p>
+            <a:pPr indent="0" marL="0">
+              <a:buNone/>
+            </a:pPr>
+            <a:r>
+              <a:rPr lang="en-US" sz="800" dirty="0">
                 <a:solidFill>
                   <a:srgbClr val="334155"/>
                 </a:solidFill>
@@ -10900,7 +10900,7 @@
               </a:rPr>
               <a:t>3. Dynamic Progress Indicator: Mark tasks complete to watch progress bar percentage increase in real time.</a:t>
             </a:r>
-            <a:endParaRPr lang="en-US" sz="1000" dirty="0"/>
+            <a:endParaRPr lang="en-US" sz="800" dirty="0"/>
           </a:p>
         </p:txBody>
       </p:sp>
@@ -10912,8 +10912,8 @@
         </p:nvSpPr>
         <p:spPr>
           <a:xfrm>
-            <a:off x="731520" y="4892040"/>
-            <a:ext cx="5120640" cy="566928"/>
+            <a:off x="731520" y="3739896"/>
+            <a:ext cx="3657600" cy="384048"/>
           </a:xfrm>
           <a:prstGeom prst="rect">
             <a:avLst/>
@@ -10937,24 +10937,24 @@
         </p:nvSpPr>
         <p:spPr>
           <a:xfrm>
-            <a:off x="868680" y="4919472"/>
-            <a:ext cx="4846320" cy="502920"/>
-          </a:xfrm>
-          <a:prstGeom prst="rect">
-            <a:avLst/>
-          </a:prstGeom>
-          <a:noFill/>
-          <a:ln/>
-        </p:spPr>
-        <p:txBody>
-          <a:bodyPr wrap="square" rtlCol="0" anchor="ctr"/>
-          <a:lstStyle/>
-          <a:p>
-            <a:pPr indent="0" marL="0">
-              <a:buNone/>
-            </a:pPr>
-            <a:r>
-              <a:rPr lang="en-US" sz="1000" dirty="0">
+            <a:off x="822960" y="3758184"/>
+            <a:ext cx="3474720" cy="347472"/>
+          </a:xfrm>
+          <a:prstGeom prst="rect">
+            <a:avLst/>
+          </a:prstGeom>
+          <a:noFill/>
+          <a:ln/>
+        </p:spPr>
+        <p:txBody>
+          <a:bodyPr wrap="square" rtlCol="0" anchor="ctr"/>
+          <a:lstStyle/>
+          <a:p>
+            <a:pPr indent="0" marL="0">
+              <a:buNone/>
+            </a:pPr>
+            <a:r>
+              <a:rPr lang="en-US" sz="800" dirty="0">
                 <a:solidFill>
                   <a:srgbClr val="334155"/>
                 </a:solidFill>
@@ -10964,7 +10964,7 @@
               </a:rPr>
               <a:t>4. Local Storage Persistence: Refresh page or toggle offline mode to verify data remains saved on the client browser.</a:t>
             </a:r>
-            <a:endParaRPr lang="en-US" sz="1000" dirty="0"/>
+            <a:endParaRPr lang="en-US" sz="800" dirty="0"/>
           </a:p>
         </p:txBody>
       </p:sp>
@@ -10976,8 +10976,8 @@
         </p:nvSpPr>
         <p:spPr>
           <a:xfrm>
-            <a:off x="731520" y="5532120"/>
-            <a:ext cx="5120640" cy="566928"/>
+            <a:off x="731520" y="4178808"/>
+            <a:ext cx="3657600" cy="384048"/>
           </a:xfrm>
           <a:prstGeom prst="rect">
             <a:avLst/>
@@ -11001,24 +11001,24 @@
         </p:nvSpPr>
         <p:spPr>
           <a:xfrm>
-            <a:off x="868680" y="5559552"/>
-            <a:ext cx="4846320" cy="502920"/>
-          </a:xfrm>
-          <a:prstGeom prst="rect">
-            <a:avLst/>
-          </a:prstGeom>
-          <a:noFill/>
-          <a:ln/>
-        </p:spPr>
-        <p:txBody>
-          <a:bodyPr wrap="square" rtlCol="0" anchor="ctr"/>
-          <a:lstStyle/>
-          <a:p>
-            <a:pPr indent="0" marL="0">
-              <a:buNone/>
-            </a:pPr>
-            <a:r>
-              <a:rPr lang="en-US" sz="1000" dirty="0">
+            <a:off x="822960" y="4197096"/>
+            <a:ext cx="3474720" cy="347472"/>
+          </a:xfrm>
+          <a:prstGeom prst="rect">
+            <a:avLst/>
+          </a:prstGeom>
+          <a:noFill/>
+          <a:ln/>
+        </p:spPr>
+        <p:txBody>
+          <a:bodyPr wrap="square" rtlCol="0" anchor="ctr"/>
+          <a:lstStyle/>
+          <a:p>
+            <a:pPr indent="0" marL="0">
+              <a:buNone/>
+            </a:pPr>
+            <a:r>
+              <a:rPr lang="en-US" sz="800" dirty="0">
                 <a:solidFill>
                   <a:srgbClr val="334155"/>
                 </a:solidFill>
@@ -11028,7 +11028,7 @@
               </a:rPr>
               <a:t>5. Headers Verification: Verify X-Cache: Hit from cloudfront header in DevTools network tab.</a:t>
             </a:r>
-            <a:endParaRPr lang="en-US" sz="1000" dirty="0"/>
+            <a:endParaRPr lang="en-US" sz="800" dirty="0"/>
           </a:p>
         </p:txBody>
       </p:sp>
@@ -11040,24 +11040,24 @@
         </p:nvSpPr>
         <p:spPr>
           <a:xfrm>
-            <a:off x="6309360" y="2560320"/>
-            <a:ext cx="5120640" cy="320040"/>
-          </a:xfrm>
-          <a:prstGeom prst="rect">
-            <a:avLst/>
-          </a:prstGeom>
-          <a:noFill/>
-          <a:ln/>
-        </p:spPr>
-        <p:txBody>
-          <a:bodyPr wrap="square" rtlCol="0" anchor="ctr"/>
-          <a:lstStyle/>
-          <a:p>
-            <a:pPr indent="0" marL="0">
-              <a:buNone/>
-            </a:pPr>
-            <a:r>
-              <a:rPr lang="en-US" sz="1400" b="1" dirty="0">
+            <a:off x="4754880" y="2103120"/>
+            <a:ext cx="3657600" cy="274320"/>
+          </a:xfrm>
+          <a:prstGeom prst="rect">
+            <a:avLst/>
+          </a:prstGeom>
+          <a:noFill/>
+          <a:ln/>
+        </p:spPr>
+        <p:txBody>
+          <a:bodyPr wrap="square" rtlCol="0" anchor="ctr"/>
+          <a:lstStyle/>
+          <a:p>
+            <a:pPr indent="0" marL="0">
+              <a:buNone/>
+            </a:pPr>
+            <a:r>
+              <a:rPr lang="en-US" sz="1200" b="1" dirty="0">
                 <a:solidFill>
                   <a:srgbClr val="1E3A8A"/>
                 </a:solidFill>
@@ -11067,7 +11067,7 @@
               </a:rPr>
               <a:t>DEMO RESOURCES &amp; METRICS</a:t>
             </a:r>
-            <a:endParaRPr lang="en-US" sz="1400" dirty="0"/>
+            <a:endParaRPr lang="en-US" sz="1200" dirty="0"/>
           </a:p>
         </p:txBody>
       </p:sp>
@@ -11079,8 +11079,8 @@
         </p:nvSpPr>
         <p:spPr>
           <a:xfrm>
-            <a:off x="6309360" y="2971800"/>
-            <a:ext cx="5120640" cy="1463040"/>
+            <a:off x="4754880" y="2423160"/>
+            <a:ext cx="3657600" cy="1005840"/>
           </a:xfrm>
           <a:prstGeom prst="rect">
             <a:avLst/>
@@ -11104,24 +11104,24 @@
         </p:nvSpPr>
         <p:spPr>
           <a:xfrm>
-            <a:off x="6492240" y="3063240"/>
-            <a:ext cx="4754880" cy="274320"/>
-          </a:xfrm>
-          <a:prstGeom prst="rect">
-            <a:avLst/>
-          </a:prstGeom>
-          <a:noFill/>
-          <a:ln/>
-        </p:spPr>
-        <p:txBody>
-          <a:bodyPr wrap="square" rtlCol="0" anchor="ctr"/>
-          <a:lstStyle/>
-          <a:p>
-            <a:pPr indent="0" marL="0">
-              <a:buNone/>
-            </a:pPr>
-            <a:r>
-              <a:rPr lang="en-US" sz="1200" b="1" dirty="0">
+            <a:off x="4892040" y="2468880"/>
+            <a:ext cx="3383280" cy="182880"/>
+          </a:xfrm>
+          <a:prstGeom prst="rect">
+            <a:avLst/>
+          </a:prstGeom>
+          <a:noFill/>
+          <a:ln/>
+        </p:spPr>
+        <p:txBody>
+          <a:bodyPr wrap="square" rtlCol="0" anchor="ctr"/>
+          <a:lstStyle/>
+          <a:p>
+            <a:pPr indent="0" marL="0">
+              <a:buNone/>
+            </a:pPr>
+            <a:r>
+              <a:rPr lang="en-US" sz="1000" b="1" dirty="0">
                 <a:solidFill>
                   <a:srgbClr val="1E3A8A"/>
                 </a:solidFill>
@@ -11131,7 +11131,7 @@
               </a:rPr>
               <a:t>🎥 DEMO RECORDING LINK</a:t>
             </a:r>
-            <a:endParaRPr lang="en-US" sz="1200" dirty="0"/>
+            <a:endParaRPr lang="en-US" sz="1000" dirty="0"/>
           </a:p>
         </p:txBody>
       </p:sp>
@@ -11143,24 +11143,24 @@
         </p:nvSpPr>
         <p:spPr>
           <a:xfrm>
-            <a:off x="6492240" y="3383280"/>
-            <a:ext cx="4754880" cy="914400"/>
-          </a:xfrm>
-          <a:prstGeom prst="rect">
-            <a:avLst/>
-          </a:prstGeom>
-          <a:noFill/>
-          <a:ln/>
-        </p:spPr>
-        <p:txBody>
-          <a:bodyPr wrap="square" rtlCol="0" anchor="ctr"/>
-          <a:lstStyle/>
-          <a:p>
-            <a:pPr indent="0" marL="0">
-              <a:buNone/>
-            </a:pPr>
-            <a:r>
-              <a:rPr lang="en-US" sz="1100" b="1" dirty="0">
+            <a:off x="4892040" y="2651760"/>
+            <a:ext cx="3383280" cy="731520"/>
+          </a:xfrm>
+          <a:prstGeom prst="rect">
+            <a:avLst/>
+          </a:prstGeom>
+          <a:noFill/>
+          <a:ln/>
+        </p:spPr>
+        <p:txBody>
+          <a:bodyPr wrap="square" rtlCol="0" anchor="ctr"/>
+          <a:lstStyle/>
+          <a:p>
+            <a:pPr indent="0" marL="0">
+              <a:buNone/>
+            </a:pPr>
+            <a:r>
+              <a:rPr lang="en-US" sz="850" b="1" dirty="0">
                 <a:solidFill>
                   <a:srgbClr val="0EA5E9"/>
                 </a:solidFill>
@@ -11170,7 +11170,7 @@
               </a:rPr>
               <a:t>https://drive.google.com/file/d/1DXGpDX82FUIWEva6sP-sFRv0VPGFDekr/view?usp=sharing</a:t>
             </a:r>
-            <a:endParaRPr lang="en-US" sz="1100" dirty="0"/>
+            <a:endParaRPr lang="en-US" sz="850" dirty="0"/>
           </a:p>
         </p:txBody>
       </p:sp>
@@ -11182,8 +11182,8 @@
         </p:nvSpPr>
         <p:spPr>
           <a:xfrm>
-            <a:off x="6309360" y="4617720"/>
-            <a:ext cx="5120640" cy="1463040"/>
+            <a:off x="4754880" y="3566160"/>
+            <a:ext cx="3657600" cy="1051560"/>
           </a:xfrm>
           <a:prstGeom prst="rect">
             <a:avLst/>
@@ -11207,24 +11207,24 @@
         </p:nvSpPr>
         <p:spPr>
           <a:xfrm>
-            <a:off x="6492240" y="4709160"/>
-            <a:ext cx="4754880" cy="274320"/>
-          </a:xfrm>
-          <a:prstGeom prst="rect">
-            <a:avLst/>
-          </a:prstGeom>
-          <a:noFill/>
-          <a:ln/>
-        </p:spPr>
-        <p:txBody>
-          <a:bodyPr wrap="square" rtlCol="0" anchor="ctr"/>
-          <a:lstStyle/>
-          <a:p>
-            <a:pPr indent="0" marL="0">
-              <a:buNone/>
-            </a:pPr>
-            <a:r>
-              <a:rPr lang="en-US" sz="1200" b="1" dirty="0">
+            <a:off x="4892040" y="3611880"/>
+            <a:ext cx="3383280" cy="182880"/>
+          </a:xfrm>
+          <a:prstGeom prst="rect">
+            <a:avLst/>
+          </a:prstGeom>
+          <a:noFill/>
+          <a:ln/>
+        </p:spPr>
+        <p:txBody>
+          <a:bodyPr wrap="square" rtlCol="0" anchor="ctr"/>
+          <a:lstStyle/>
+          <a:p>
+            <a:pPr indent="0" marL="0">
+              <a:buNone/>
+            </a:pPr>
+            <a:r>
+              <a:rPr lang="en-US" sz="1000" b="1" dirty="0">
                 <a:solidFill>
                   <a:srgbClr val="1E3A8A"/>
                 </a:solidFill>
@@ -11234,7 +11234,7 @@
               </a:rPr>
               <a:t>⚙️ PERFORMANCE SPECS</a:t>
             </a:r>
-            <a:endParaRPr lang="en-US" sz="1200" dirty="0"/>
+            <a:endParaRPr lang="en-US" sz="1000" dirty="0"/>
           </a:p>
         </p:txBody>
       </p:sp>
@@ -11246,24 +11246,24 @@
         </p:nvSpPr>
         <p:spPr>
           <a:xfrm>
-            <a:off x="6492240" y="5029200"/>
-            <a:ext cx="4754880" cy="960120"/>
-          </a:xfrm>
-          <a:prstGeom prst="rect">
-            <a:avLst/>
-          </a:prstGeom>
-          <a:noFill/>
-          <a:ln/>
-        </p:spPr>
-        <p:txBody>
-          <a:bodyPr wrap="square" rtlCol="0" anchor="ctr"/>
-          <a:lstStyle/>
-          <a:p>
-            <a:pPr indent="0" marL="0">
-              <a:buNone/>
-            </a:pPr>
-            <a:r>
-              <a:rPr lang="en-US" sz="1050" dirty="0">
+            <a:off x="4892040" y="3840480"/>
+            <a:ext cx="3383280" cy="749808"/>
+          </a:xfrm>
+          <a:prstGeom prst="rect">
+            <a:avLst/>
+          </a:prstGeom>
+          <a:noFill/>
+          <a:ln/>
+        </p:spPr>
+        <p:txBody>
+          <a:bodyPr wrap="square" rtlCol="0" anchor="ctr"/>
+          <a:lstStyle/>
+          <a:p>
+            <a:pPr indent="0" marL="0">
+              <a:buNone/>
+            </a:pPr>
+            <a:r>
+              <a:rPr lang="en-US" sz="850" dirty="0">
                 <a:solidFill>
                   <a:srgbClr val="334155"/>
                 </a:solidFill>
@@ -11273,14 +11273,14 @@
               </a:rPr>
               <a:t>• Edge delivery: Served in under 50ms worldwide via CDN caching.</a:t>
             </a:r>
-            <a:endParaRPr lang="en-US" sz="1050" dirty="0"/>
-          </a:p>
-          <a:p>
-            <a:pPr indent="0" marL="0">
-              <a:buNone/>
-            </a:pPr>
-            <a:r>
-              <a:rPr lang="en-US" sz="1050" dirty="0">
+            <a:endParaRPr lang="en-US" sz="850" dirty="0"/>
+          </a:p>
+          <a:p>
+            <a:pPr indent="0" marL="0">
+              <a:buNone/>
+            </a:pPr>
+            <a:r>
+              <a:rPr lang="en-US" sz="850" dirty="0">
                 <a:solidFill>
                   <a:srgbClr val="334155"/>
                 </a:solidFill>
@@ -11290,14 +11290,14 @@
               </a:rPr>
               <a:t>• Failover capability: Auto-scales across availability zones automatically.</a:t>
             </a:r>
-            <a:endParaRPr lang="en-US" sz="1050" dirty="0"/>
-          </a:p>
-          <a:p>
-            <a:pPr indent="0" marL="0">
-              <a:buNone/>
-            </a:pPr>
-            <a:r>
-              <a:rPr lang="en-US" sz="1050" dirty="0">
+            <a:endParaRPr lang="en-US" sz="850" dirty="0"/>
+          </a:p>
+          <a:p>
+            <a:pPr indent="0" marL="0">
+              <a:buNone/>
+            </a:pPr>
+            <a:r>
+              <a:rPr lang="en-US" sz="850" dirty="0">
                 <a:solidFill>
                   <a:srgbClr val="334155"/>
                 </a:solidFill>
@@ -11307,7 +11307,7 @@
               </a:rPr>
               <a:t>• Scalability: ASG group configuration supports up to 300 active connections.</a:t>
             </a:r>
-            <a:endParaRPr lang="en-US" sz="1050" dirty="0"/>
+            <a:endParaRPr lang="en-US" sz="850" dirty="0"/>
           </a:p>
         </p:txBody>
       </p:sp>
